--- a/1차 프로젝트/3. 화면설계서_박준수.pptx
+++ b/1차 프로젝트/3. 화면설계서_박준수.pptx
@@ -5,17 +5,14 @@
     <p:sldMasterId id="2147483648" r:id="rId1"/>
   </p:sldMasterIdLst>
   <p:sldIdLst>
-    <p:sldId id="266" r:id="rId2"/>
+    <p:sldId id="267" r:id="rId2"/>
+    <p:sldId id="266" r:id="rId3"/>
+    <p:sldId id="268" r:id="rId4"/>
+    <p:sldId id="269" r:id="rId5"/>
+    <p:sldId id="270" r:id="rId6"/>
   </p:sldIdLst>
   <p:sldSz cx="24384000" cy="13716000"/>
   <p:notesSz cx="6858000" cy="9144000"/>
-  <p:embeddedFontLst>
-    <p:embeddedFont>
-      <p:font typeface="맑은 고딕" panose="020B0503020000020004" pitchFamily="34" charset="-127"/>
-      <p:regular r:id="rId3"/>
-      <p:bold r:id="rId4"/>
-    </p:embeddedFont>
-  </p:embeddedFontLst>
   <p:defaultTextStyle>
     <a:defPPr>
       <a:defRPr lang="en-US"/>
@@ -318,7 +315,7 @@
             <a:fld id="{1D8BD707-D9CF-40AE-B4C6-C98DA3205C09}" type="datetimeFigureOut">
               <a:rPr lang="en-US" smtClean="0"/>
               <a:pPr/>
-              <a:t>3/15/2026</a:t>
+              <a:t>3/21/2026</a:t>
             </a:fld>
             <a:endParaRPr lang="en-US"/>
           </a:p>
@@ -483,7 +480,7 @@
             <a:fld id="{1D8BD707-D9CF-40AE-B4C6-C98DA3205C09}" type="datetimeFigureOut">
               <a:rPr lang="en-US" smtClean="0"/>
               <a:pPr/>
-              <a:t>3/15/2026</a:t>
+              <a:t>3/21/2026</a:t>
             </a:fld>
             <a:endParaRPr lang="en-US"/>
           </a:p>
@@ -658,7 +655,7 @@
             <a:fld id="{1D8BD707-D9CF-40AE-B4C6-C98DA3205C09}" type="datetimeFigureOut">
               <a:rPr lang="en-US" smtClean="0"/>
               <a:pPr/>
-              <a:t>3/15/2026</a:t>
+              <a:t>3/21/2026</a:t>
             </a:fld>
             <a:endParaRPr lang="en-US"/>
           </a:p>
@@ -823,7 +820,7 @@
             <a:fld id="{1D8BD707-D9CF-40AE-B4C6-C98DA3205C09}" type="datetimeFigureOut">
               <a:rPr lang="en-US" smtClean="0"/>
               <a:pPr/>
-              <a:t>3/15/2026</a:t>
+              <a:t>3/21/2026</a:t>
             </a:fld>
             <a:endParaRPr lang="en-US"/>
           </a:p>
@@ -1065,7 +1062,7 @@
             <a:fld id="{1D8BD707-D9CF-40AE-B4C6-C98DA3205C09}" type="datetimeFigureOut">
               <a:rPr lang="en-US" smtClean="0"/>
               <a:pPr/>
-              <a:t>3/15/2026</a:t>
+              <a:t>3/21/2026</a:t>
             </a:fld>
             <a:endParaRPr lang="en-US"/>
           </a:p>
@@ -1347,7 +1344,7 @@
             <a:fld id="{1D8BD707-D9CF-40AE-B4C6-C98DA3205C09}" type="datetimeFigureOut">
               <a:rPr lang="en-US" smtClean="0"/>
               <a:pPr/>
-              <a:t>3/15/2026</a:t>
+              <a:t>3/21/2026</a:t>
             </a:fld>
             <a:endParaRPr lang="en-US"/>
           </a:p>
@@ -1763,7 +1760,7 @@
             <a:fld id="{1D8BD707-D9CF-40AE-B4C6-C98DA3205C09}" type="datetimeFigureOut">
               <a:rPr lang="en-US" smtClean="0"/>
               <a:pPr/>
-              <a:t>3/15/2026</a:t>
+              <a:t>3/21/2026</a:t>
             </a:fld>
             <a:endParaRPr lang="en-US"/>
           </a:p>
@@ -1877,7 +1874,7 @@
             <a:fld id="{1D8BD707-D9CF-40AE-B4C6-C98DA3205C09}" type="datetimeFigureOut">
               <a:rPr lang="en-US" smtClean="0"/>
               <a:pPr/>
-              <a:t>3/15/2026</a:t>
+              <a:t>3/21/2026</a:t>
             </a:fld>
             <a:endParaRPr lang="en-US"/>
           </a:p>
@@ -1969,7 +1966,7 @@
             <a:fld id="{1D8BD707-D9CF-40AE-B4C6-C98DA3205C09}" type="datetimeFigureOut">
               <a:rPr lang="en-US" smtClean="0"/>
               <a:pPr/>
-              <a:t>3/15/2026</a:t>
+              <a:t>3/21/2026</a:t>
             </a:fld>
             <a:endParaRPr lang="en-US"/>
           </a:p>
@@ -2241,7 +2238,7 @@
             <a:fld id="{1D8BD707-D9CF-40AE-B4C6-C98DA3205C09}" type="datetimeFigureOut">
               <a:rPr lang="en-US" smtClean="0"/>
               <a:pPr/>
-              <a:t>3/15/2026</a:t>
+              <a:t>3/21/2026</a:t>
             </a:fld>
             <a:endParaRPr lang="en-US"/>
           </a:p>
@@ -2490,7 +2487,7 @@
             <a:fld id="{1D8BD707-D9CF-40AE-B4C6-C98DA3205C09}" type="datetimeFigureOut">
               <a:rPr lang="en-US" smtClean="0"/>
               <a:pPr/>
-              <a:t>3/15/2026</a:t>
+              <a:t>3/21/2026</a:t>
             </a:fld>
             <a:endParaRPr lang="en-US"/>
           </a:p>
@@ -2698,7 +2695,7 @@
             <a:fld id="{1D8BD707-D9CF-40AE-B4C6-C98DA3205C09}" type="datetimeFigureOut">
               <a:rPr lang="en-US" smtClean="0"/>
               <a:pPr/>
-              <a:t>3/15/2026</a:t>
+              <a:t>3/21/2026</a:t>
             </a:fld>
             <a:endParaRPr lang="en-US"/>
           </a:p>
@@ -3068,6 +3065,782 @@
         <p:cNvPr id="1" name="">
           <a:extLst>
             <a:ext uri="{FF2B5EF4-FFF2-40B4-BE49-F238E27FC236}">
+              <a16:creationId xmlns:a16="http://schemas.microsoft.com/office/drawing/2014/main" id="{33F1534F-FB79-9126-EFEE-75BEA96CCDD5}"/>
+            </a:ext>
+          </a:extLst>
+        </p:cNvPr>
+        <p:cNvGrpSpPr/>
+        <p:nvPr/>
+      </p:nvGrpSpPr>
+      <p:grpSpPr>
+        <a:xfrm>
+          <a:off x="0" y="0"/>
+          <a:ext cx="0" cy="0"/>
+          <a:chOff x="0" y="0"/>
+          <a:chExt cx="0" cy="0"/>
+        </a:xfrm>
+      </p:grpSpPr>
+      <p:graphicFrame>
+        <p:nvGraphicFramePr>
+          <p:cNvPr id="6" name="표 5">
+            <a:extLst>
+              <a:ext uri="{FF2B5EF4-FFF2-40B4-BE49-F238E27FC236}">
+                <a16:creationId xmlns:a16="http://schemas.microsoft.com/office/drawing/2014/main" id="{B92CB9C0-6D62-CCC7-7D10-A61552F66087}"/>
+              </a:ext>
+            </a:extLst>
+          </p:cNvPr>
+          <p:cNvGraphicFramePr>
+            <a:graphicFrameLocks noGrp="1"/>
+          </p:cNvGraphicFramePr>
+          <p:nvPr>
+            <p:extLst>
+              <p:ext uri="{D42A27DB-BD31-4B8C-83A1-F6EECF244321}">
+                <p14:modId xmlns:p14="http://schemas.microsoft.com/office/powerpoint/2010/main" val="163187016"/>
+              </p:ext>
+            </p:extLst>
+          </p:nvPr>
+        </p:nvGraphicFramePr>
+        <p:xfrm>
+          <a:off x="533399" y="304800"/>
+          <a:ext cx="23293602" cy="1981200"/>
+        </p:xfrm>
+        <a:graphic>
+          <a:graphicData uri="http://schemas.openxmlformats.org/drawingml/2006/table">
+            <a:tbl>
+              <a:tblPr firstRow="1" bandRow="1">
+                <a:tableStyleId>{5940675A-B579-460E-94D1-54222C63F5DA}</a:tableStyleId>
+              </a:tblPr>
+              <a:tblGrid>
+                <a:gridCol w="3882267">
+                  <a:extLst>
+                    <a:ext uri="{9D8B030D-6E8A-4147-A177-3AD203B41FA5}">
+                      <a16:colId xmlns:a16="http://schemas.microsoft.com/office/drawing/2014/main" val="3008628612"/>
+                    </a:ext>
+                  </a:extLst>
+                </a:gridCol>
+                <a:gridCol w="3882267">
+                  <a:extLst>
+                    <a:ext uri="{9D8B030D-6E8A-4147-A177-3AD203B41FA5}">
+                      <a16:colId xmlns:a16="http://schemas.microsoft.com/office/drawing/2014/main" val="676787877"/>
+                    </a:ext>
+                  </a:extLst>
+                </a:gridCol>
+                <a:gridCol w="3882267">
+                  <a:extLst>
+                    <a:ext uri="{9D8B030D-6E8A-4147-A177-3AD203B41FA5}">
+                      <a16:colId xmlns:a16="http://schemas.microsoft.com/office/drawing/2014/main" val="4230366021"/>
+                    </a:ext>
+                  </a:extLst>
+                </a:gridCol>
+                <a:gridCol w="3882267">
+                  <a:extLst>
+                    <a:ext uri="{9D8B030D-6E8A-4147-A177-3AD203B41FA5}">
+                      <a16:colId xmlns:a16="http://schemas.microsoft.com/office/drawing/2014/main" val="750898098"/>
+                    </a:ext>
+                  </a:extLst>
+                </a:gridCol>
+                <a:gridCol w="3882267">
+                  <a:extLst>
+                    <a:ext uri="{9D8B030D-6E8A-4147-A177-3AD203B41FA5}">
+                      <a16:colId xmlns:a16="http://schemas.microsoft.com/office/drawing/2014/main" val="1811449162"/>
+                    </a:ext>
+                  </a:extLst>
+                </a:gridCol>
+                <a:gridCol w="3882267">
+                  <a:extLst>
+                    <a:ext uri="{9D8B030D-6E8A-4147-A177-3AD203B41FA5}">
+                      <a16:colId xmlns:a16="http://schemas.microsoft.com/office/drawing/2014/main" val="3001645729"/>
+                    </a:ext>
+                  </a:extLst>
+                </a:gridCol>
+              </a:tblGrid>
+              <a:tr h="990600">
+                <a:tc>
+                  <a:txBody>
+                    <a:bodyPr/>
+                    <a:lstStyle/>
+                    <a:p>
+                      <a:pPr algn="ctr" latinLnBrk="1"/>
+                      <a:r>
+                        <a:rPr lang="ko-KR" altLang="en-US" sz="2800" dirty="0"/>
+                        <a:t>프로젝트 명</a:t>
+                      </a:r>
+                    </a:p>
+                  </a:txBody>
+                  <a:tcPr anchor="ctr">
+                    <a:solidFill>
+                      <a:schemeClr val="tx2">
+                        <a:lumMod val="20000"/>
+                        <a:lumOff val="80000"/>
+                      </a:schemeClr>
+                    </a:solidFill>
+                  </a:tcPr>
+                </a:tc>
+                <a:tc>
+                  <a:txBody>
+                    <a:bodyPr/>
+                    <a:lstStyle/>
+                    <a:p>
+                      <a:pPr algn="ctr" latinLnBrk="1"/>
+                      <a:r>
+                        <a:rPr lang="ko-KR" altLang="en-US" sz="2800" dirty="0"/>
+                        <a:t>식습관 유형 분석</a:t>
+                      </a:r>
+                    </a:p>
+                  </a:txBody>
+                  <a:tcPr anchor="ctr"/>
+                </a:tc>
+                <a:tc>
+                  <a:txBody>
+                    <a:bodyPr/>
+                    <a:lstStyle/>
+                    <a:p>
+                      <a:pPr algn="ctr" latinLnBrk="1"/>
+                      <a:r>
+                        <a:rPr lang="ko-KR" altLang="en-US" sz="2800" dirty="0"/>
+                        <a:t>설명</a:t>
+                      </a:r>
+                    </a:p>
+                  </a:txBody>
+                  <a:tcPr anchor="ctr">
+                    <a:solidFill>
+                      <a:schemeClr val="tx2">
+                        <a:lumMod val="20000"/>
+                        <a:lumOff val="80000"/>
+                      </a:schemeClr>
+                    </a:solidFill>
+                  </a:tcPr>
+                </a:tc>
+                <a:tc>
+                  <a:txBody>
+                    <a:bodyPr/>
+                    <a:lstStyle/>
+                    <a:p>
+                      <a:pPr algn="ctr" latinLnBrk="1"/>
+                      <a:r>
+                        <a:rPr lang="ko-KR" altLang="en-US" sz="2800" dirty="0"/>
+                        <a:t>메인 페이지</a:t>
+                      </a:r>
+                    </a:p>
+                  </a:txBody>
+                  <a:tcPr anchor="ctr"/>
+                </a:tc>
+                <a:tc>
+                  <a:txBody>
+                    <a:bodyPr/>
+                    <a:lstStyle/>
+                    <a:p>
+                      <a:pPr algn="ctr" latinLnBrk="1"/>
+                      <a:r>
+                        <a:rPr lang="ko-KR" altLang="en-US" sz="2800" dirty="0"/>
+                        <a:t>페이지 </a:t>
+                      </a:r>
+                      <a:r>
+                        <a:rPr lang="en-US" altLang="ko-KR" sz="2800" dirty="0"/>
+                        <a:t>#</a:t>
+                      </a:r>
+                      <a:endParaRPr lang="ko-KR" altLang="en-US" sz="2800" dirty="0"/>
+                    </a:p>
+                  </a:txBody>
+                  <a:tcPr anchor="ctr">
+                    <a:solidFill>
+                      <a:schemeClr val="tx2">
+                        <a:lumMod val="20000"/>
+                        <a:lumOff val="80000"/>
+                      </a:schemeClr>
+                    </a:solidFill>
+                  </a:tcPr>
+                </a:tc>
+                <a:tc>
+                  <a:txBody>
+                    <a:bodyPr/>
+                    <a:lstStyle/>
+                    <a:p>
+                      <a:pPr algn="ctr" latinLnBrk="1"/>
+                      <a:r>
+                        <a:rPr lang="en-US" altLang="ko-KR" sz="2800" dirty="0"/>
+                        <a:t>01-1</a:t>
+                      </a:r>
+                      <a:endParaRPr lang="ko-KR" altLang="en-US" sz="2800" dirty="0"/>
+                    </a:p>
+                  </a:txBody>
+                  <a:tcPr anchor="ctr"/>
+                </a:tc>
+                <a:extLst>
+                  <a:ext uri="{0D108BD9-81ED-4DB2-BD59-A6C34878D82A}">
+                    <a16:rowId xmlns:a16="http://schemas.microsoft.com/office/drawing/2014/main" val="566629533"/>
+                  </a:ext>
+                </a:extLst>
+              </a:tr>
+              <a:tr h="990600">
+                <a:tc>
+                  <a:txBody>
+                    <a:bodyPr/>
+                    <a:lstStyle/>
+                    <a:p>
+                      <a:pPr algn="ctr" latinLnBrk="1"/>
+                      <a:r>
+                        <a:rPr lang="ko-KR" altLang="en-US" sz="2800" dirty="0"/>
+                        <a:t>페이지</a:t>
+                      </a:r>
+                    </a:p>
+                  </a:txBody>
+                  <a:tcPr anchor="ctr">
+                    <a:solidFill>
+                      <a:schemeClr val="tx2">
+                        <a:lumMod val="20000"/>
+                        <a:lumOff val="80000"/>
+                      </a:schemeClr>
+                    </a:solidFill>
+                  </a:tcPr>
+                </a:tc>
+                <a:tc gridSpan="5">
+                  <a:txBody>
+                    <a:bodyPr/>
+                    <a:lstStyle/>
+                    <a:p>
+                      <a:pPr algn="ctr" latinLnBrk="1"/>
+                      <a:r>
+                        <a:rPr lang="ko-KR" altLang="en-US" sz="2800" dirty="0"/>
+                        <a:t>메인 페이지</a:t>
+                      </a:r>
+                    </a:p>
+                  </a:txBody>
+                  <a:tcPr anchor="ctr"/>
+                </a:tc>
+                <a:tc hMerge="1">
+                  <a:txBody>
+                    <a:bodyPr/>
+                    <a:lstStyle/>
+                    <a:p>
+                      <a:pPr latinLnBrk="1"/>
+                      <a:endParaRPr lang="ko-KR" altLang="en-US" dirty="0"/>
+                    </a:p>
+                  </a:txBody>
+                  <a:tcPr/>
+                </a:tc>
+                <a:tc hMerge="1">
+                  <a:txBody>
+                    <a:bodyPr/>
+                    <a:lstStyle/>
+                    <a:p>
+                      <a:pPr latinLnBrk="1"/>
+                      <a:endParaRPr lang="ko-KR" altLang="en-US" dirty="0"/>
+                    </a:p>
+                  </a:txBody>
+                  <a:tcPr/>
+                </a:tc>
+                <a:tc hMerge="1">
+                  <a:txBody>
+                    <a:bodyPr/>
+                    <a:lstStyle/>
+                    <a:p>
+                      <a:pPr latinLnBrk="1"/>
+                      <a:endParaRPr lang="ko-KR" altLang="en-US" dirty="0"/>
+                    </a:p>
+                  </a:txBody>
+                  <a:tcPr/>
+                </a:tc>
+                <a:tc hMerge="1">
+                  <a:txBody>
+                    <a:bodyPr/>
+                    <a:lstStyle/>
+                    <a:p>
+                      <a:pPr latinLnBrk="1"/>
+                      <a:endParaRPr lang="ko-KR" altLang="en-US" dirty="0"/>
+                    </a:p>
+                  </a:txBody>
+                  <a:tcPr/>
+                </a:tc>
+                <a:extLst>
+                  <a:ext uri="{0D108BD9-81ED-4DB2-BD59-A6C34878D82A}">
+                    <a16:rowId xmlns:a16="http://schemas.microsoft.com/office/drawing/2014/main" val="2713347330"/>
+                  </a:ext>
+                </a:extLst>
+              </a:tr>
+            </a:tbl>
+          </a:graphicData>
+        </a:graphic>
+      </p:graphicFrame>
+      <p:pic>
+        <p:nvPicPr>
+          <p:cNvPr id="3" name="그림 2">
+            <a:extLst>
+              <a:ext uri="{FF2B5EF4-FFF2-40B4-BE49-F238E27FC236}">
+                <a16:creationId xmlns:a16="http://schemas.microsoft.com/office/drawing/2014/main" id="{C8A1CEDE-B8F1-5A41-41A3-20B98E70F1E7}"/>
+              </a:ext>
+            </a:extLst>
+          </p:cNvPr>
+          <p:cNvPicPr>
+            <a:picLocks noChangeAspect="1"/>
+          </p:cNvPicPr>
+          <p:nvPr/>
+        </p:nvPicPr>
+        <p:blipFill>
+          <a:blip r:embed="rId2">
+            <a:extLst>
+              <a:ext uri="{28A0092B-C50C-407E-A947-70E740481C1C}">
+                <a14:useLocalDpi xmlns:a14="http://schemas.microsoft.com/office/drawing/2010/main" val="0"/>
+              </a:ext>
+            </a:extLst>
+          </a:blip>
+          <a:stretch>
+            <a:fillRect/>
+          </a:stretch>
+        </p:blipFill>
+        <p:spPr>
+          <a:xfrm>
+            <a:off x="506625" y="2542572"/>
+            <a:ext cx="17632609" cy="10353301"/>
+          </a:xfrm>
+          <a:prstGeom prst="rect">
+            <a:avLst/>
+          </a:prstGeom>
+        </p:spPr>
+      </p:pic>
+      <p:sp>
+        <p:nvSpPr>
+          <p:cNvPr id="4" name="타원 3">
+            <a:extLst>
+              <a:ext uri="{FF2B5EF4-FFF2-40B4-BE49-F238E27FC236}">
+                <a16:creationId xmlns:a16="http://schemas.microsoft.com/office/drawing/2014/main" id="{5E36300D-34ED-BDFF-7A36-B02598ABA4F5}"/>
+              </a:ext>
+            </a:extLst>
+          </p:cNvPr>
+          <p:cNvSpPr/>
+          <p:nvPr/>
+        </p:nvSpPr>
+        <p:spPr>
+          <a:xfrm>
+            <a:off x="7010400" y="4572000"/>
+            <a:ext cx="762000" cy="762000"/>
+          </a:xfrm>
+          <a:prstGeom prst="ellipse">
+            <a:avLst/>
+          </a:prstGeom>
+        </p:spPr>
+        <p:style>
+          <a:lnRef idx="3">
+            <a:schemeClr val="lt1"/>
+          </a:lnRef>
+          <a:fillRef idx="1">
+            <a:schemeClr val="accent6"/>
+          </a:fillRef>
+          <a:effectRef idx="1">
+            <a:schemeClr val="accent6"/>
+          </a:effectRef>
+          <a:fontRef idx="minor">
+            <a:schemeClr val="lt1"/>
+          </a:fontRef>
+        </p:style>
+        <p:txBody>
+          <a:bodyPr rtlCol="0" anchor="ctr"/>
+          <a:lstStyle/>
+          <a:p>
+            <a:pPr algn="ctr"/>
+            <a:r>
+              <a:rPr lang="en-US" altLang="ko-KR" sz="4800" dirty="0"/>
+              <a:t>1</a:t>
+            </a:r>
+            <a:endParaRPr lang="ko-KR" altLang="en-US" sz="4800" dirty="0"/>
+          </a:p>
+        </p:txBody>
+      </p:sp>
+      <p:sp>
+        <p:nvSpPr>
+          <p:cNvPr id="5" name="타원 4">
+            <a:extLst>
+              <a:ext uri="{FF2B5EF4-FFF2-40B4-BE49-F238E27FC236}">
+                <a16:creationId xmlns:a16="http://schemas.microsoft.com/office/drawing/2014/main" id="{024E02C0-0DBF-C918-7B3B-94F36E787AAF}"/>
+              </a:ext>
+            </a:extLst>
+          </p:cNvPr>
+          <p:cNvSpPr/>
+          <p:nvPr/>
+        </p:nvSpPr>
+        <p:spPr>
+          <a:xfrm>
+            <a:off x="6248400" y="6096000"/>
+            <a:ext cx="762000" cy="762000"/>
+          </a:xfrm>
+          <a:prstGeom prst="ellipse">
+            <a:avLst/>
+          </a:prstGeom>
+        </p:spPr>
+        <p:style>
+          <a:lnRef idx="3">
+            <a:schemeClr val="lt1"/>
+          </a:lnRef>
+          <a:fillRef idx="1">
+            <a:schemeClr val="accent6"/>
+          </a:fillRef>
+          <a:effectRef idx="1">
+            <a:schemeClr val="accent6"/>
+          </a:effectRef>
+          <a:fontRef idx="minor">
+            <a:schemeClr val="lt1"/>
+          </a:fontRef>
+        </p:style>
+        <p:txBody>
+          <a:bodyPr rtlCol="0" anchor="ctr"/>
+          <a:lstStyle/>
+          <a:p>
+            <a:pPr algn="ctr"/>
+            <a:r>
+              <a:rPr lang="en-US" altLang="ko-KR" sz="4800" dirty="0"/>
+              <a:t>2</a:t>
+            </a:r>
+            <a:endParaRPr lang="ko-KR" altLang="en-US" sz="4800" dirty="0"/>
+          </a:p>
+        </p:txBody>
+      </p:sp>
+      <p:sp>
+        <p:nvSpPr>
+          <p:cNvPr id="8" name="타원 7">
+            <a:extLst>
+              <a:ext uri="{FF2B5EF4-FFF2-40B4-BE49-F238E27FC236}">
+                <a16:creationId xmlns:a16="http://schemas.microsoft.com/office/drawing/2014/main" id="{A555E0EC-D0D0-AD0B-A5ED-E60D58A5183B}"/>
+              </a:ext>
+            </a:extLst>
+          </p:cNvPr>
+          <p:cNvSpPr/>
+          <p:nvPr/>
+        </p:nvSpPr>
+        <p:spPr>
+          <a:xfrm>
+            <a:off x="9322929" y="6081584"/>
+            <a:ext cx="762000" cy="762000"/>
+          </a:xfrm>
+          <a:prstGeom prst="ellipse">
+            <a:avLst/>
+          </a:prstGeom>
+        </p:spPr>
+        <p:style>
+          <a:lnRef idx="3">
+            <a:schemeClr val="lt1"/>
+          </a:lnRef>
+          <a:fillRef idx="1">
+            <a:schemeClr val="accent6"/>
+          </a:fillRef>
+          <a:effectRef idx="1">
+            <a:schemeClr val="accent6"/>
+          </a:effectRef>
+          <a:fontRef idx="minor">
+            <a:schemeClr val="lt1"/>
+          </a:fontRef>
+        </p:style>
+        <p:txBody>
+          <a:bodyPr rtlCol="0" anchor="ctr"/>
+          <a:lstStyle/>
+          <a:p>
+            <a:pPr algn="ctr"/>
+            <a:r>
+              <a:rPr lang="en-US" altLang="ko-KR" sz="4800" dirty="0"/>
+              <a:t>3</a:t>
+            </a:r>
+            <a:endParaRPr lang="ko-KR" altLang="en-US" sz="4800" dirty="0"/>
+          </a:p>
+        </p:txBody>
+      </p:sp>
+      <p:sp>
+        <p:nvSpPr>
+          <p:cNvPr id="10" name="타원 9">
+            <a:extLst>
+              <a:ext uri="{FF2B5EF4-FFF2-40B4-BE49-F238E27FC236}">
+                <a16:creationId xmlns:a16="http://schemas.microsoft.com/office/drawing/2014/main" id="{FAF6B144-7BD8-E7D7-EBC8-99D8E96D7E25}"/>
+              </a:ext>
+            </a:extLst>
+          </p:cNvPr>
+          <p:cNvSpPr/>
+          <p:nvPr/>
+        </p:nvSpPr>
+        <p:spPr>
+          <a:xfrm>
+            <a:off x="6248400" y="9296400"/>
+            <a:ext cx="762000" cy="762000"/>
+          </a:xfrm>
+          <a:prstGeom prst="ellipse">
+            <a:avLst/>
+          </a:prstGeom>
+        </p:spPr>
+        <p:style>
+          <a:lnRef idx="3">
+            <a:schemeClr val="lt1"/>
+          </a:lnRef>
+          <a:fillRef idx="1">
+            <a:schemeClr val="accent6"/>
+          </a:fillRef>
+          <a:effectRef idx="1">
+            <a:schemeClr val="accent6"/>
+          </a:effectRef>
+          <a:fontRef idx="minor">
+            <a:schemeClr val="lt1"/>
+          </a:fontRef>
+        </p:style>
+        <p:txBody>
+          <a:bodyPr rtlCol="0" anchor="ctr"/>
+          <a:lstStyle/>
+          <a:p>
+            <a:pPr algn="ctr"/>
+            <a:r>
+              <a:rPr lang="en-US" altLang="ko-KR" sz="4800" dirty="0"/>
+              <a:t>4</a:t>
+            </a:r>
+            <a:endParaRPr lang="ko-KR" altLang="en-US" sz="4800" dirty="0"/>
+          </a:p>
+        </p:txBody>
+      </p:sp>
+      <p:graphicFrame>
+        <p:nvGraphicFramePr>
+          <p:cNvPr id="12" name="표 11">
+            <a:extLst>
+              <a:ext uri="{FF2B5EF4-FFF2-40B4-BE49-F238E27FC236}">
+                <a16:creationId xmlns:a16="http://schemas.microsoft.com/office/drawing/2014/main" id="{64A38FB7-0DD6-E2F7-EACF-90C85561C986}"/>
+              </a:ext>
+            </a:extLst>
+          </p:cNvPr>
+          <p:cNvGraphicFramePr>
+            <a:graphicFrameLocks noGrp="1"/>
+          </p:cNvGraphicFramePr>
+          <p:nvPr>
+            <p:extLst>
+              <p:ext uri="{D42A27DB-BD31-4B8C-83A1-F6EECF244321}">
+                <p14:modId xmlns:p14="http://schemas.microsoft.com/office/powerpoint/2010/main" val="1590237555"/>
+              </p:ext>
+            </p:extLst>
+          </p:nvPr>
+        </p:nvGraphicFramePr>
+        <p:xfrm>
+          <a:off x="18490773" y="5547522"/>
+          <a:ext cx="5386602" cy="4343400"/>
+        </p:xfrm>
+        <a:graphic>
+          <a:graphicData uri="http://schemas.openxmlformats.org/drawingml/2006/table">
+            <a:tbl>
+              <a:tblPr firstRow="1" bandRow="1">
+                <a:tableStyleId>{5940675A-B579-460E-94D1-54222C63F5DA}</a:tableStyleId>
+              </a:tblPr>
+              <a:tblGrid>
+                <a:gridCol w="1143001">
+                  <a:extLst>
+                    <a:ext uri="{9D8B030D-6E8A-4147-A177-3AD203B41FA5}">
+                      <a16:colId xmlns:a16="http://schemas.microsoft.com/office/drawing/2014/main" val="3099305099"/>
+                    </a:ext>
+                  </a:extLst>
+                </a:gridCol>
+                <a:gridCol w="4243601">
+                  <a:extLst>
+                    <a:ext uri="{9D8B030D-6E8A-4147-A177-3AD203B41FA5}">
+                      <a16:colId xmlns:a16="http://schemas.microsoft.com/office/drawing/2014/main" val="1372832432"/>
+                    </a:ext>
+                  </a:extLst>
+                </a:gridCol>
+              </a:tblGrid>
+              <a:tr h="1085850">
+                <a:tc>
+                  <a:txBody>
+                    <a:bodyPr/>
+                    <a:lstStyle/>
+                    <a:p>
+                      <a:pPr algn="ctr" latinLnBrk="1"/>
+                      <a:r>
+                        <a:rPr lang="en-US" altLang="ko-KR" sz="3200" dirty="0"/>
+                        <a:t>1</a:t>
+                      </a:r>
+                      <a:endParaRPr lang="ko-KR" altLang="en-US" sz="3200" dirty="0"/>
+                    </a:p>
+                  </a:txBody>
+                  <a:tcPr anchor="ctr">
+                    <a:solidFill>
+                      <a:schemeClr val="tx2">
+                        <a:lumMod val="20000"/>
+                        <a:lumOff val="80000"/>
+                      </a:schemeClr>
+                    </a:solidFill>
+                  </a:tcPr>
+                </a:tc>
+                <a:tc>
+                  <a:txBody>
+                    <a:bodyPr/>
+                    <a:lstStyle/>
+                    <a:p>
+                      <a:pPr algn="ctr" latinLnBrk="1"/>
+                      <a:r>
+                        <a:rPr lang="ko-KR" altLang="en-US" sz="3200" dirty="0"/>
+                        <a:t>제목</a:t>
+                      </a:r>
+                    </a:p>
+                  </a:txBody>
+                  <a:tcPr anchor="ctr"/>
+                </a:tc>
+                <a:extLst>
+                  <a:ext uri="{0D108BD9-81ED-4DB2-BD59-A6C34878D82A}">
+                    <a16:rowId xmlns:a16="http://schemas.microsoft.com/office/drawing/2014/main" val="1335438258"/>
+                  </a:ext>
+                </a:extLst>
+              </a:tr>
+              <a:tr h="1085850">
+                <a:tc>
+                  <a:txBody>
+                    <a:bodyPr/>
+                    <a:lstStyle/>
+                    <a:p>
+                      <a:pPr algn="ctr" latinLnBrk="1"/>
+                      <a:r>
+                        <a:rPr lang="en-US" altLang="ko-KR" sz="3200" dirty="0"/>
+                        <a:t>2</a:t>
+                      </a:r>
+                      <a:endParaRPr lang="ko-KR" altLang="en-US" sz="3200" dirty="0"/>
+                    </a:p>
+                  </a:txBody>
+                  <a:tcPr anchor="ctr">
+                    <a:solidFill>
+                      <a:schemeClr val="tx2">
+                        <a:lumMod val="20000"/>
+                        <a:lumOff val="80000"/>
+                      </a:schemeClr>
+                    </a:solidFill>
+                  </a:tcPr>
+                </a:tc>
+                <a:tc>
+                  <a:txBody>
+                    <a:bodyPr/>
+                    <a:lstStyle/>
+                    <a:p>
+                      <a:pPr algn="ctr" latinLnBrk="1"/>
+                      <a:r>
+                        <a:rPr lang="ko-KR" altLang="en-US" sz="3200" dirty="0"/>
+                        <a:t>로그인 탭</a:t>
+                      </a:r>
+                    </a:p>
+                  </a:txBody>
+                  <a:tcPr anchor="ctr"/>
+                </a:tc>
+                <a:extLst>
+                  <a:ext uri="{0D108BD9-81ED-4DB2-BD59-A6C34878D82A}">
+                    <a16:rowId xmlns:a16="http://schemas.microsoft.com/office/drawing/2014/main" val="2820470733"/>
+                  </a:ext>
+                </a:extLst>
+              </a:tr>
+              <a:tr h="1085850">
+                <a:tc>
+                  <a:txBody>
+                    <a:bodyPr/>
+                    <a:lstStyle/>
+                    <a:p>
+                      <a:pPr algn="ctr" latinLnBrk="1"/>
+                      <a:r>
+                        <a:rPr lang="en-US" altLang="ko-KR" sz="3200" dirty="0"/>
+                        <a:t>3</a:t>
+                      </a:r>
+                      <a:endParaRPr lang="ko-KR" altLang="en-US" sz="3200" dirty="0"/>
+                    </a:p>
+                  </a:txBody>
+                  <a:tcPr anchor="ctr">
+                    <a:solidFill>
+                      <a:schemeClr val="tx2">
+                        <a:lumMod val="20000"/>
+                        <a:lumOff val="80000"/>
+                      </a:schemeClr>
+                    </a:solidFill>
+                  </a:tcPr>
+                </a:tc>
+                <a:tc>
+                  <a:txBody>
+                    <a:bodyPr/>
+                    <a:lstStyle/>
+                    <a:p>
+                      <a:pPr algn="ctr" latinLnBrk="1"/>
+                      <a:r>
+                        <a:rPr lang="ko-KR" altLang="en-US" sz="3200" dirty="0"/>
+                        <a:t>회원가입 탭</a:t>
+                      </a:r>
+                    </a:p>
+                  </a:txBody>
+                  <a:tcPr anchor="ctr"/>
+                </a:tc>
+                <a:extLst>
+                  <a:ext uri="{0D108BD9-81ED-4DB2-BD59-A6C34878D82A}">
+                    <a16:rowId xmlns:a16="http://schemas.microsoft.com/office/drawing/2014/main" val="111030149"/>
+                  </a:ext>
+                </a:extLst>
+              </a:tr>
+              <a:tr h="1085850">
+                <a:tc>
+                  <a:txBody>
+                    <a:bodyPr/>
+                    <a:lstStyle/>
+                    <a:p>
+                      <a:pPr algn="ctr" latinLnBrk="1"/>
+                      <a:r>
+                        <a:rPr lang="en-US" altLang="ko-KR" sz="3200" dirty="0"/>
+                        <a:t>4</a:t>
+                      </a:r>
+                      <a:endParaRPr lang="ko-KR" altLang="en-US" sz="3200" dirty="0"/>
+                    </a:p>
+                  </a:txBody>
+                  <a:tcPr anchor="ctr">
+                    <a:solidFill>
+                      <a:schemeClr val="tx2">
+                        <a:lumMod val="20000"/>
+                        <a:lumOff val="80000"/>
+                      </a:schemeClr>
+                    </a:solidFill>
+                  </a:tcPr>
+                </a:tc>
+                <a:tc>
+                  <a:txBody>
+                    <a:bodyPr/>
+                    <a:lstStyle/>
+                    <a:p>
+                      <a:pPr algn="ctr" latinLnBrk="1"/>
+                      <a:r>
+                        <a:rPr lang="ko-KR" altLang="en-US" sz="3200" dirty="0"/>
+                        <a:t>로그인 버튼</a:t>
+                      </a:r>
+                    </a:p>
+                  </a:txBody>
+                  <a:tcPr anchor="ctr"/>
+                </a:tc>
+                <a:extLst>
+                  <a:ext uri="{0D108BD9-81ED-4DB2-BD59-A6C34878D82A}">
+                    <a16:rowId xmlns:a16="http://schemas.microsoft.com/office/drawing/2014/main" val="1548616452"/>
+                  </a:ext>
+                </a:extLst>
+              </a:tr>
+            </a:tbl>
+          </a:graphicData>
+        </a:graphic>
+      </p:graphicFrame>
+    </p:spTree>
+    <p:extLst>
+      <p:ext uri="{BB962C8B-B14F-4D97-AF65-F5344CB8AC3E}">
+        <p14:creationId xmlns:p14="http://schemas.microsoft.com/office/powerpoint/2010/main" val="3587771884"/>
+      </p:ext>
+    </p:extLst>
+  </p:cSld>
+  <p:clrMapOvr>
+    <a:masterClrMapping/>
+  </p:clrMapOvr>
+</p:sld>
+</file>
+
+<file path=ppt/slides/slide2.xml><?xml version="1.0" encoding="utf-8"?>
+<p:sld xmlns:a="http://schemas.openxmlformats.org/drawingml/2006/main" xmlns:r="http://schemas.openxmlformats.org/officeDocument/2006/relationships" xmlns:p="http://schemas.openxmlformats.org/presentationml/2006/main">
+  <p:cSld>
+    <p:bg>
+      <p:bgPr>
+        <a:solidFill>
+          <a:srgbClr val="F8F7F5"/>
+        </a:solidFill>
+        <a:effectLst/>
+      </p:bgPr>
+    </p:bg>
+    <p:spTree>
+      <p:nvGrpSpPr>
+        <p:cNvPr id="1" name="">
+          <a:extLst>
+            <a:ext uri="{FF2B5EF4-FFF2-40B4-BE49-F238E27FC236}">
               <a16:creationId xmlns:a16="http://schemas.microsoft.com/office/drawing/2014/main" id="{65735AA2-1089-71EE-3949-7059410D31AC}"/>
             </a:ext>
           </a:extLst>
@@ -3083,612 +3856,2013 @@
           <a:chExt cx="0" cy="0"/>
         </a:xfrm>
       </p:grpSpPr>
-      <p:grpSp>
-        <p:nvGrpSpPr>
-          <p:cNvPr id="16" name="그룹 15">
+      <p:graphicFrame>
+        <p:nvGraphicFramePr>
+          <p:cNvPr id="6" name="표 5">
             <a:extLst>
               <a:ext uri="{FF2B5EF4-FFF2-40B4-BE49-F238E27FC236}">
-                <a16:creationId xmlns:a16="http://schemas.microsoft.com/office/drawing/2014/main" id="{358EF27E-E2BD-EA10-8475-CEF0F2C794F6}"/>
+                <a16:creationId xmlns:a16="http://schemas.microsoft.com/office/drawing/2014/main" id="{8E23524C-3D36-6C15-7527-EB61091FD503}"/>
               </a:ext>
             </a:extLst>
           </p:cNvPr>
-          <p:cNvGrpSpPr/>
-          <p:nvPr/>
-        </p:nvGrpSpPr>
-        <p:grpSpPr>
-          <a:xfrm>
-            <a:off x="4978" y="0"/>
-            <a:ext cx="16687800" cy="13716000"/>
-            <a:chOff x="5334000" y="2971800"/>
-            <a:chExt cx="13106400" cy="10210800"/>
-          </a:xfrm>
-        </p:grpSpPr>
-        <p:sp>
-          <p:nvSpPr>
-            <p:cNvPr id="14" name="직사각형 13">
-              <a:extLst>
-                <a:ext uri="{FF2B5EF4-FFF2-40B4-BE49-F238E27FC236}">
-                  <a16:creationId xmlns:a16="http://schemas.microsoft.com/office/drawing/2014/main" id="{B4A66BCC-41D4-A50E-D88D-13BD45BEF0F7}"/>
-                </a:ext>
-              </a:extLst>
-            </p:cNvPr>
-            <p:cNvSpPr/>
-            <p:nvPr/>
-          </p:nvSpPr>
-          <p:spPr>
-            <a:xfrm>
-              <a:off x="5334000" y="2971800"/>
-              <a:ext cx="13106400" cy="10210800"/>
-            </a:xfrm>
-            <a:prstGeom prst="rect">
-              <a:avLst/>
-            </a:prstGeom>
-          </p:spPr>
-          <p:style>
-            <a:lnRef idx="2">
-              <a:schemeClr val="dk1"/>
-            </a:lnRef>
-            <a:fillRef idx="1">
-              <a:schemeClr val="lt1"/>
-            </a:fillRef>
-            <a:effectRef idx="0">
-              <a:schemeClr val="dk1"/>
-            </a:effectRef>
-            <a:fontRef idx="minor">
-              <a:schemeClr val="dk1"/>
-            </a:fontRef>
-          </p:style>
-          <p:txBody>
-            <a:bodyPr rtlCol="0" anchor="ctr"/>
-            <a:lstStyle/>
-            <a:p>
-              <a:pPr algn="ctr"/>
-              <a:endParaRPr lang="ko-KR" altLang="en-US"/>
-            </a:p>
-          </p:txBody>
-        </p:sp>
-        <p:grpSp>
-          <p:nvGrpSpPr>
-            <p:cNvPr id="15" name="그룹 14">
-              <a:extLst>
-                <a:ext uri="{FF2B5EF4-FFF2-40B4-BE49-F238E27FC236}">
-                  <a16:creationId xmlns:a16="http://schemas.microsoft.com/office/drawing/2014/main" id="{9528DCE0-99D8-B2D4-F1E2-CE0AB609B601}"/>
-                </a:ext>
-              </a:extLst>
-            </p:cNvPr>
-            <p:cNvGrpSpPr/>
-            <p:nvPr/>
-          </p:nvGrpSpPr>
-          <p:grpSpPr>
-            <a:xfrm>
-              <a:off x="5686592" y="3319325"/>
-              <a:ext cx="12273260" cy="9347147"/>
-              <a:chOff x="5686592" y="3319325"/>
-              <a:chExt cx="12273260" cy="9347147"/>
-            </a:xfrm>
-          </p:grpSpPr>
-          <p:pic>
-            <p:nvPicPr>
-              <p:cNvPr id="9" name="그림 8">
+          <p:cNvGraphicFramePr>
+            <a:graphicFrameLocks noGrp="1"/>
+          </p:cNvGraphicFramePr>
+          <p:nvPr>
+            <p:extLst>
+              <p:ext uri="{D42A27DB-BD31-4B8C-83A1-F6EECF244321}">
+                <p14:modId xmlns:p14="http://schemas.microsoft.com/office/powerpoint/2010/main" val="235967404"/>
+              </p:ext>
+            </p:extLst>
+          </p:nvPr>
+        </p:nvGraphicFramePr>
+        <p:xfrm>
+          <a:off x="533399" y="304800"/>
+          <a:ext cx="23293602" cy="1981200"/>
+        </p:xfrm>
+        <a:graphic>
+          <a:graphicData uri="http://schemas.openxmlformats.org/drawingml/2006/table">
+            <a:tbl>
+              <a:tblPr firstRow="1" bandRow="1">
+                <a:tableStyleId>{5940675A-B579-460E-94D1-54222C63F5DA}</a:tableStyleId>
+              </a:tblPr>
+              <a:tblGrid>
+                <a:gridCol w="3882267">
+                  <a:extLst>
+                    <a:ext uri="{9D8B030D-6E8A-4147-A177-3AD203B41FA5}">
+                      <a16:colId xmlns:a16="http://schemas.microsoft.com/office/drawing/2014/main" val="3008628612"/>
+                    </a:ext>
+                  </a:extLst>
+                </a:gridCol>
+                <a:gridCol w="3882267">
+                  <a:extLst>
+                    <a:ext uri="{9D8B030D-6E8A-4147-A177-3AD203B41FA5}">
+                      <a16:colId xmlns:a16="http://schemas.microsoft.com/office/drawing/2014/main" val="676787877"/>
+                    </a:ext>
+                  </a:extLst>
+                </a:gridCol>
+                <a:gridCol w="3882267">
+                  <a:extLst>
+                    <a:ext uri="{9D8B030D-6E8A-4147-A177-3AD203B41FA5}">
+                      <a16:colId xmlns:a16="http://schemas.microsoft.com/office/drawing/2014/main" val="4230366021"/>
+                    </a:ext>
+                  </a:extLst>
+                </a:gridCol>
+                <a:gridCol w="3882267">
+                  <a:extLst>
+                    <a:ext uri="{9D8B030D-6E8A-4147-A177-3AD203B41FA5}">
+                      <a16:colId xmlns:a16="http://schemas.microsoft.com/office/drawing/2014/main" val="750898098"/>
+                    </a:ext>
+                  </a:extLst>
+                </a:gridCol>
+                <a:gridCol w="3882267">
+                  <a:extLst>
+                    <a:ext uri="{9D8B030D-6E8A-4147-A177-3AD203B41FA5}">
+                      <a16:colId xmlns:a16="http://schemas.microsoft.com/office/drawing/2014/main" val="1811449162"/>
+                    </a:ext>
+                  </a:extLst>
+                </a:gridCol>
+                <a:gridCol w="3882267">
+                  <a:extLst>
+                    <a:ext uri="{9D8B030D-6E8A-4147-A177-3AD203B41FA5}">
+                      <a16:colId xmlns:a16="http://schemas.microsoft.com/office/drawing/2014/main" val="3001645729"/>
+                    </a:ext>
+                  </a:extLst>
+                </a:gridCol>
+              </a:tblGrid>
+              <a:tr h="990600">
+                <a:tc>
+                  <a:txBody>
+                    <a:bodyPr/>
+                    <a:lstStyle/>
+                    <a:p>
+                      <a:pPr algn="ctr" latinLnBrk="1"/>
+                      <a:r>
+                        <a:rPr lang="ko-KR" altLang="en-US" sz="2800" dirty="0"/>
+                        <a:t>프로젝트 명</a:t>
+                      </a:r>
+                    </a:p>
+                  </a:txBody>
+                  <a:tcPr anchor="ctr"/>
+                </a:tc>
+                <a:tc>
+                  <a:txBody>
+                    <a:bodyPr/>
+                    <a:lstStyle/>
+                    <a:p>
+                      <a:pPr algn="ctr" latinLnBrk="1"/>
+                      <a:endParaRPr lang="ko-KR" altLang="en-US" sz="2800" dirty="0"/>
+                    </a:p>
+                  </a:txBody>
+                  <a:tcPr anchor="ctr"/>
+                </a:tc>
+                <a:tc>
+                  <a:txBody>
+                    <a:bodyPr/>
+                    <a:lstStyle/>
+                    <a:p>
+                      <a:pPr algn="ctr" latinLnBrk="1"/>
+                      <a:r>
+                        <a:rPr lang="ko-KR" altLang="en-US" sz="2800" dirty="0"/>
+                        <a:t>설명</a:t>
+                      </a:r>
+                    </a:p>
+                  </a:txBody>
+                  <a:tcPr anchor="ctr"/>
+                </a:tc>
+                <a:tc>
+                  <a:txBody>
+                    <a:bodyPr/>
+                    <a:lstStyle/>
+                    <a:p>
+                      <a:pPr algn="ctr" latinLnBrk="1"/>
+                      <a:r>
+                        <a:rPr lang="ko-KR" altLang="en-US" sz="2800" dirty="0"/>
+                        <a:t>메인 페이지</a:t>
+                      </a:r>
+                    </a:p>
+                  </a:txBody>
+                  <a:tcPr anchor="ctr"/>
+                </a:tc>
+                <a:tc>
+                  <a:txBody>
+                    <a:bodyPr/>
+                    <a:lstStyle/>
+                    <a:p>
+                      <a:pPr algn="ctr" latinLnBrk="1"/>
+                      <a:r>
+                        <a:rPr lang="ko-KR" altLang="en-US" sz="2800" dirty="0"/>
+                        <a:t>페이지 </a:t>
+                      </a:r>
+                      <a:r>
+                        <a:rPr lang="en-US" altLang="ko-KR" sz="2800" dirty="0"/>
+                        <a:t>#</a:t>
+                      </a:r>
+                      <a:endParaRPr lang="ko-KR" altLang="en-US" sz="2800" dirty="0"/>
+                    </a:p>
+                  </a:txBody>
+                  <a:tcPr anchor="ctr"/>
+                </a:tc>
+                <a:tc>
+                  <a:txBody>
+                    <a:bodyPr/>
+                    <a:lstStyle/>
+                    <a:p>
+                      <a:pPr algn="ctr" latinLnBrk="1"/>
+                      <a:r>
+                        <a:rPr lang="en-US" altLang="ko-KR" sz="2800" dirty="0"/>
+                        <a:t>01-1</a:t>
+                      </a:r>
+                      <a:endParaRPr lang="ko-KR" altLang="en-US" sz="2800" dirty="0"/>
+                    </a:p>
+                  </a:txBody>
+                  <a:tcPr anchor="ctr"/>
+                </a:tc>
                 <a:extLst>
-                  <a:ext uri="{FF2B5EF4-FFF2-40B4-BE49-F238E27FC236}">
-                    <a16:creationId xmlns:a16="http://schemas.microsoft.com/office/drawing/2014/main" id="{403189B9-D142-1FAC-2425-9F45329EDB94}"/>
+                  <a:ext uri="{0D108BD9-81ED-4DB2-BD59-A6C34878D82A}">
+                    <a16:rowId xmlns:a16="http://schemas.microsoft.com/office/drawing/2014/main" val="566629533"/>
                   </a:ext>
                 </a:extLst>
-              </p:cNvPr>
-              <p:cNvPicPr>
-                <a:picLocks noChangeAspect="1"/>
-              </p:cNvPicPr>
-              <p:nvPr/>
-            </p:nvPicPr>
-            <p:blipFill>
-              <a:blip r:embed="rId2">
+              </a:tr>
+              <a:tr h="990600">
+                <a:tc>
+                  <a:txBody>
+                    <a:bodyPr/>
+                    <a:lstStyle/>
+                    <a:p>
+                      <a:pPr algn="ctr" latinLnBrk="1"/>
+                      <a:r>
+                        <a:rPr lang="ko-KR" altLang="en-US" sz="2800" dirty="0"/>
+                        <a:t>페이지</a:t>
+                      </a:r>
+                    </a:p>
+                  </a:txBody>
+                  <a:tcPr anchor="ctr"/>
+                </a:tc>
+                <a:tc gridSpan="5">
+                  <a:txBody>
+                    <a:bodyPr/>
+                    <a:lstStyle/>
+                    <a:p>
+                      <a:pPr algn="ctr" latinLnBrk="1"/>
+                      <a:r>
+                        <a:rPr lang="ko-KR" altLang="en-US" sz="2800" dirty="0"/>
+                        <a:t>메인 페이지</a:t>
+                      </a:r>
+                    </a:p>
+                  </a:txBody>
+                  <a:tcPr anchor="ctr"/>
+                </a:tc>
+                <a:tc hMerge="1">
+                  <a:txBody>
+                    <a:bodyPr/>
+                    <a:lstStyle/>
+                    <a:p>
+                      <a:pPr latinLnBrk="1"/>
+                      <a:endParaRPr lang="ko-KR" altLang="en-US" dirty="0"/>
+                    </a:p>
+                  </a:txBody>
+                  <a:tcPr/>
+                </a:tc>
+                <a:tc hMerge="1">
+                  <a:txBody>
+                    <a:bodyPr/>
+                    <a:lstStyle/>
+                    <a:p>
+                      <a:pPr latinLnBrk="1"/>
+                      <a:endParaRPr lang="ko-KR" altLang="en-US" dirty="0"/>
+                    </a:p>
+                  </a:txBody>
+                  <a:tcPr/>
+                </a:tc>
+                <a:tc hMerge="1">
+                  <a:txBody>
+                    <a:bodyPr/>
+                    <a:lstStyle/>
+                    <a:p>
+                      <a:pPr latinLnBrk="1"/>
+                      <a:endParaRPr lang="ko-KR" altLang="en-US" dirty="0"/>
+                    </a:p>
+                  </a:txBody>
+                  <a:tcPr/>
+                </a:tc>
+                <a:tc hMerge="1">
+                  <a:txBody>
+                    <a:bodyPr/>
+                    <a:lstStyle/>
+                    <a:p>
+                      <a:pPr latinLnBrk="1"/>
+                      <a:endParaRPr lang="ko-KR" altLang="en-US" dirty="0"/>
+                    </a:p>
+                  </a:txBody>
+                  <a:tcPr/>
+                </a:tc>
                 <a:extLst>
-                  <a:ext uri="{28A0092B-C50C-407E-A947-70E740481C1C}">
-                    <a14:useLocalDpi xmlns:a14="http://schemas.microsoft.com/office/drawing/2010/main" val="0"/>
+                  <a:ext uri="{0D108BD9-81ED-4DB2-BD59-A6C34878D82A}">
+                    <a16:rowId xmlns:a16="http://schemas.microsoft.com/office/drawing/2014/main" val="2713347330"/>
                   </a:ext>
                 </a:extLst>
-              </a:blip>
-              <a:stretch>
-                <a:fillRect/>
-              </a:stretch>
-            </p:blipFill>
-            <p:spPr>
-              <a:xfrm>
-                <a:off x="5823691" y="3319325"/>
-                <a:ext cx="12127017" cy="1971950"/>
-              </a:xfrm>
-              <a:prstGeom prst="rect">
-                <a:avLst/>
-              </a:prstGeom>
-            </p:spPr>
-          </p:pic>
-          <p:pic>
-            <p:nvPicPr>
-              <p:cNvPr id="11" name="그림 10">
-                <a:extLst>
-                  <a:ext uri="{FF2B5EF4-FFF2-40B4-BE49-F238E27FC236}">
-                    <a16:creationId xmlns:a16="http://schemas.microsoft.com/office/drawing/2014/main" id="{8F8008D3-10B1-C266-D80C-6752E91C52E0}"/>
-                  </a:ext>
-                </a:extLst>
-              </p:cNvPr>
-              <p:cNvPicPr>
-                <a:picLocks noChangeAspect="1"/>
-              </p:cNvPicPr>
-              <p:nvPr/>
-            </p:nvPicPr>
-            <p:blipFill>
-              <a:blip r:embed="rId3">
-                <a:extLst>
-                  <a:ext uri="{28A0092B-C50C-407E-A947-70E740481C1C}">
-                    <a14:useLocalDpi xmlns:a14="http://schemas.microsoft.com/office/drawing/2010/main" val="0"/>
-                  </a:ext>
-                </a:extLst>
-              </a:blip>
-              <a:stretch>
-                <a:fillRect/>
-              </a:stretch>
-            </p:blipFill>
-            <p:spPr>
-              <a:xfrm>
-                <a:off x="5787114" y="5291275"/>
-                <a:ext cx="12127017" cy="5144796"/>
-              </a:xfrm>
-              <a:prstGeom prst="rect">
-                <a:avLst/>
-              </a:prstGeom>
-            </p:spPr>
-          </p:pic>
-          <p:pic>
-            <p:nvPicPr>
-              <p:cNvPr id="13" name="그림 12">
-                <a:extLst>
-                  <a:ext uri="{FF2B5EF4-FFF2-40B4-BE49-F238E27FC236}">
-                    <a16:creationId xmlns:a16="http://schemas.microsoft.com/office/drawing/2014/main" id="{21CEE532-2B63-2023-D705-66F78C52F70F}"/>
-                  </a:ext>
-                </a:extLst>
-              </p:cNvPr>
-              <p:cNvPicPr>
-                <a:picLocks noChangeAspect="1"/>
-              </p:cNvPicPr>
-              <p:nvPr/>
-            </p:nvPicPr>
-            <p:blipFill>
-              <a:blip r:embed="rId4">
-                <a:extLst>
-                  <a:ext uri="{28A0092B-C50C-407E-A947-70E740481C1C}">
-                    <a14:useLocalDpi xmlns:a14="http://schemas.microsoft.com/office/drawing/2010/main" val="0"/>
-                  </a:ext>
-                </a:extLst>
-              </a:blip>
-              <a:stretch>
-                <a:fillRect/>
-              </a:stretch>
-            </p:blipFill>
-            <p:spPr>
-              <a:xfrm>
-                <a:off x="5686592" y="10554943"/>
-                <a:ext cx="12273260" cy="2111529"/>
-              </a:xfrm>
-              <a:prstGeom prst="rect">
-                <a:avLst/>
-              </a:prstGeom>
-            </p:spPr>
-          </p:pic>
-        </p:grpSp>
-      </p:grpSp>
-      <p:sp>
-        <p:nvSpPr>
-          <p:cNvPr id="2" name="타원 1">
+              </a:tr>
+            </a:tbl>
+          </a:graphicData>
+        </a:graphic>
+      </p:graphicFrame>
+      <p:pic>
+        <p:nvPicPr>
+          <p:cNvPr id="10" name="그림 9">
             <a:extLst>
               <a:ext uri="{FF2B5EF4-FFF2-40B4-BE49-F238E27FC236}">
-                <a16:creationId xmlns:a16="http://schemas.microsoft.com/office/drawing/2014/main" id="{69CF825A-AE4B-76B4-86A4-1AB9735BC0CD}"/>
+                <a16:creationId xmlns:a16="http://schemas.microsoft.com/office/drawing/2014/main" id="{9622CB15-3CCB-E07F-0D6C-4B6A492D02EE}"/>
               </a:ext>
             </a:extLst>
           </p:cNvPr>
-          <p:cNvSpPr/>
+          <p:cNvPicPr>
+            <a:picLocks noChangeAspect="1"/>
+          </p:cNvPicPr>
           <p:nvPr/>
-        </p:nvSpPr>
+        </p:nvPicPr>
+        <p:blipFill>
+          <a:blip r:embed="rId2">
+            <a:extLst>
+              <a:ext uri="{28A0092B-C50C-407E-A947-70E740481C1C}">
+                <a14:useLocalDpi xmlns:a14="http://schemas.microsoft.com/office/drawing/2010/main" val="0"/>
+              </a:ext>
+            </a:extLst>
+          </a:blip>
+          <a:stretch>
+            <a:fillRect/>
+          </a:stretch>
+        </p:blipFill>
         <p:spPr>
           <a:xfrm>
-            <a:off x="-10361" y="1314124"/>
-            <a:ext cx="847759" cy="819500"/>
-          </a:xfrm>
-          <a:prstGeom prst="ellipse">
-            <a:avLst/>
-          </a:prstGeom>
-          <a:solidFill>
-            <a:schemeClr val="accent5"/>
-          </a:solidFill>
-        </p:spPr>
-        <p:style>
-          <a:lnRef idx="2">
-            <a:schemeClr val="accent1">
-              <a:shade val="15000"/>
-            </a:schemeClr>
-          </a:lnRef>
-          <a:fillRef idx="1">
-            <a:schemeClr val="accent1"/>
-          </a:fillRef>
-          <a:effectRef idx="0">
-            <a:schemeClr val="accent1"/>
-          </a:effectRef>
-          <a:fontRef idx="minor">
-            <a:schemeClr val="lt1"/>
-          </a:fontRef>
-        </p:style>
-        <p:txBody>
-          <a:bodyPr rtlCol="0" anchor="ctr"/>
-          <a:lstStyle/>
-          <a:p>
-            <a:pPr algn="ctr"/>
-            <a:r>
-              <a:rPr lang="ko-KR" altLang="en-US" sz="4000">
-                <a:ea typeface="맑은 고딕"/>
-                <a:cs typeface="Calibri"/>
-              </a:rPr>
-              <a:t>1</a:t>
-            </a:r>
-          </a:p>
-        </p:txBody>
-      </p:sp>
-      <p:sp>
-        <p:nvSpPr>
-          <p:cNvPr id="3" name="타원 2">
-            <a:extLst>
-              <a:ext uri="{FF2B5EF4-FFF2-40B4-BE49-F238E27FC236}">
-                <a16:creationId xmlns:a16="http://schemas.microsoft.com/office/drawing/2014/main" id="{60312C07-D932-82DB-45EC-2D9914EE26F1}"/>
-              </a:ext>
-            </a:extLst>
-          </p:cNvPr>
-          <p:cNvSpPr/>
-          <p:nvPr/>
-        </p:nvSpPr>
-        <p:spPr>
-          <a:xfrm>
-            <a:off x="-9435" y="3411299"/>
-            <a:ext cx="847759" cy="819500"/>
-          </a:xfrm>
-          <a:prstGeom prst="ellipse">
-            <a:avLst/>
-          </a:prstGeom>
-          <a:solidFill>
-            <a:schemeClr val="accent5"/>
-          </a:solidFill>
-        </p:spPr>
-        <p:style>
-          <a:lnRef idx="2">
-            <a:schemeClr val="accent1">
-              <a:shade val="15000"/>
-            </a:schemeClr>
-          </a:lnRef>
-          <a:fillRef idx="1">
-            <a:schemeClr val="accent1"/>
-          </a:fillRef>
-          <a:effectRef idx="0">
-            <a:schemeClr val="accent1"/>
-          </a:effectRef>
-          <a:fontRef idx="minor">
-            <a:schemeClr val="lt1"/>
-          </a:fontRef>
-        </p:style>
-        <p:txBody>
-          <a:bodyPr lIns="91440" tIns="45720" rIns="91440" bIns="45720" rtlCol="0" anchor="ctr"/>
-          <a:lstStyle/>
-          <a:p>
-            <a:pPr algn="ctr"/>
-            <a:r>
-              <a:rPr lang="ko-KR" altLang="en-US" sz="4000">
-                <a:ea typeface="맑은 고딕"/>
-                <a:cs typeface="Calibri"/>
-              </a:rPr>
-              <a:t>2</a:t>
-            </a:r>
-          </a:p>
-        </p:txBody>
-      </p:sp>
-      <p:sp>
-        <p:nvSpPr>
-          <p:cNvPr id="4" name="타원 3">
-            <a:extLst>
-              <a:ext uri="{FF2B5EF4-FFF2-40B4-BE49-F238E27FC236}">
-                <a16:creationId xmlns:a16="http://schemas.microsoft.com/office/drawing/2014/main" id="{E9445866-FE0D-E5EE-945B-4332C1247A81}"/>
-              </a:ext>
-            </a:extLst>
-          </p:cNvPr>
-          <p:cNvSpPr/>
-          <p:nvPr/>
-        </p:nvSpPr>
-        <p:spPr>
-          <a:xfrm>
-            <a:off x="-8508" y="6812807"/>
-            <a:ext cx="847759" cy="819500"/>
-          </a:xfrm>
-          <a:prstGeom prst="ellipse">
-            <a:avLst/>
-          </a:prstGeom>
-          <a:solidFill>
-            <a:schemeClr val="accent5"/>
-          </a:solidFill>
-        </p:spPr>
-        <p:style>
-          <a:lnRef idx="2">
-            <a:schemeClr val="accent1">
-              <a:shade val="15000"/>
-            </a:schemeClr>
-          </a:lnRef>
-          <a:fillRef idx="1">
-            <a:schemeClr val="accent1"/>
-          </a:fillRef>
-          <a:effectRef idx="0">
-            <a:schemeClr val="accent1"/>
-          </a:effectRef>
-          <a:fontRef idx="minor">
-            <a:schemeClr val="lt1"/>
-          </a:fontRef>
-        </p:style>
-        <p:txBody>
-          <a:bodyPr lIns="91440" tIns="45720" rIns="91440" bIns="45720" rtlCol="0" anchor="ctr"/>
-          <a:lstStyle/>
-          <a:p>
-            <a:pPr algn="ctr"/>
-            <a:r>
-              <a:rPr lang="ko-KR" altLang="en-US" sz="4000">
-                <a:ea typeface="맑은 고딕"/>
-                <a:cs typeface="Calibri"/>
-              </a:rPr>
-              <a:t>3</a:t>
-            </a:r>
-          </a:p>
-        </p:txBody>
-      </p:sp>
-      <p:sp>
-        <p:nvSpPr>
-          <p:cNvPr id="5" name="타원 4">
-            <a:extLst>
-              <a:ext uri="{FF2B5EF4-FFF2-40B4-BE49-F238E27FC236}">
-                <a16:creationId xmlns:a16="http://schemas.microsoft.com/office/drawing/2014/main" id="{850B372C-FDCE-3CF9-62B7-A356DC85C7AC}"/>
-              </a:ext>
-            </a:extLst>
-          </p:cNvPr>
-          <p:cNvSpPr/>
-          <p:nvPr/>
-        </p:nvSpPr>
-        <p:spPr>
-          <a:xfrm>
-            <a:off x="-7580" y="11332313"/>
-            <a:ext cx="847759" cy="819500"/>
-          </a:xfrm>
-          <a:prstGeom prst="ellipse">
-            <a:avLst/>
-          </a:prstGeom>
-          <a:solidFill>
-            <a:schemeClr val="accent5"/>
-          </a:solidFill>
-        </p:spPr>
-        <p:style>
-          <a:lnRef idx="2">
-            <a:schemeClr val="accent1">
-              <a:shade val="15000"/>
-            </a:schemeClr>
-          </a:lnRef>
-          <a:fillRef idx="1">
-            <a:schemeClr val="accent1"/>
-          </a:fillRef>
-          <a:effectRef idx="0">
-            <a:schemeClr val="accent1"/>
-          </a:effectRef>
-          <a:fontRef idx="minor">
-            <a:schemeClr val="lt1"/>
-          </a:fontRef>
-        </p:style>
-        <p:txBody>
-          <a:bodyPr lIns="91440" tIns="45720" rIns="91440" bIns="45720" rtlCol="0" anchor="ctr"/>
-          <a:lstStyle/>
-          <a:p>
-            <a:pPr algn="ctr"/>
-            <a:r>
-              <a:rPr lang="ko-KR" altLang="en-US" sz="4000">
-                <a:ea typeface="맑은 고딕"/>
-                <a:cs typeface="Calibri"/>
-              </a:rPr>
-              <a:t>4</a:t>
-            </a:r>
-          </a:p>
-        </p:txBody>
-      </p:sp>
-      <p:sp>
-        <p:nvSpPr>
-          <p:cNvPr id="7" name="직사각형 6">
-            <a:extLst>
-              <a:ext uri="{FF2B5EF4-FFF2-40B4-BE49-F238E27FC236}">
-                <a16:creationId xmlns:a16="http://schemas.microsoft.com/office/drawing/2014/main" id="{D1EDCC70-567F-EA3F-2EA1-22BCCCCEB069}"/>
-              </a:ext>
-            </a:extLst>
-          </p:cNvPr>
-          <p:cNvSpPr/>
-          <p:nvPr/>
-        </p:nvSpPr>
-        <p:spPr>
-          <a:xfrm>
-            <a:off x="17073186" y="801176"/>
-            <a:ext cx="6753815" cy="12094698"/>
+            <a:off x="565237" y="2743200"/>
+            <a:ext cx="17642660" cy="10363200"/>
           </a:xfrm>
           <a:prstGeom prst="rect">
             <a:avLst/>
           </a:prstGeom>
-          <a:solidFill>
-            <a:schemeClr val="bg1">
-              <a:lumMod val="95000"/>
-            </a:schemeClr>
-          </a:solidFill>
         </p:spPr>
-        <p:style>
-          <a:lnRef idx="2">
-            <a:schemeClr val="accent1">
-              <a:shade val="15000"/>
-            </a:schemeClr>
-          </a:lnRef>
-          <a:fillRef idx="1">
-            <a:schemeClr val="accent1"/>
-          </a:fillRef>
-          <a:effectRef idx="0">
-            <a:schemeClr val="accent1"/>
-          </a:effectRef>
-          <a:fontRef idx="minor">
-            <a:schemeClr val="lt1"/>
-          </a:fontRef>
-        </p:style>
-        <p:txBody>
-          <a:bodyPr rot="0" spcFirstLastPara="0" vertOverflow="overflow" horzOverflow="overflow" vert="horz" wrap="square" lIns="91440" tIns="45720" rIns="91440" bIns="45720" numCol="1" spcCol="0" rtlCol="0" fromWordArt="0" anchor="t" anchorCtr="0" forceAA="0" compatLnSpc="1">
-            <a:prstTxWarp prst="textNoShape">
-              <a:avLst/>
-            </a:prstTxWarp>
-            <a:noAutofit/>
-          </a:bodyPr>
-          <a:lstStyle/>
-          <a:p>
-            <a:pPr marL="914400" indent="-914400">
-              <a:buAutoNum type="arabicPeriod"/>
-            </a:pPr>
-            <a:endParaRPr lang="ko-KR" altLang="en-US" sz="4400" dirty="0">
-              <a:solidFill>
-                <a:schemeClr val="tx1"/>
-              </a:solidFill>
-              <a:ea typeface="맑은 고딕"/>
-              <a:cs typeface="Calibri"/>
-            </a:endParaRPr>
-          </a:p>
-          <a:p>
-            <a:pPr marL="914400" indent="-914400">
-              <a:buAutoNum type="arabicPeriod"/>
-            </a:pPr>
-            <a:r>
-              <a:rPr lang="ko-KR" altLang="en-US" sz="4400">
-                <a:solidFill>
-                  <a:schemeClr val="tx1"/>
-                </a:solidFill>
-                <a:ea typeface="맑은 고딕"/>
-                <a:cs typeface="Calibri"/>
-              </a:rPr>
-              <a:t>연령대별 옵션 선택</a:t>
-            </a:r>
-            <a:endParaRPr lang="ko-KR" altLang="en-US" sz="4400" dirty="0">
-              <a:solidFill>
-                <a:schemeClr val="tx1"/>
-              </a:solidFill>
-              <a:ea typeface="맑은 고딕"/>
-              <a:cs typeface="Calibri"/>
-            </a:endParaRPr>
-          </a:p>
-          <a:p>
-            <a:pPr marL="914400" indent="-914400">
-              <a:buAutoNum type="arabicPeriod"/>
-            </a:pPr>
-            <a:endParaRPr lang="ko-KR" altLang="en-US" sz="4400" dirty="0">
-              <a:solidFill>
-                <a:schemeClr val="tx1"/>
-              </a:solidFill>
-              <a:ea typeface="맑은 고딕"/>
-              <a:cs typeface="Calibri"/>
-            </a:endParaRPr>
-          </a:p>
-          <a:p>
-            <a:pPr marL="914400" indent="-914400">
-              <a:buAutoNum type="arabicPeriod"/>
-            </a:pPr>
-            <a:r>
-              <a:rPr lang="ko-KR" altLang="en-US" sz="4400">
-                <a:solidFill>
-                  <a:schemeClr val="tx1"/>
-                </a:solidFill>
-                <a:ea typeface="맑은 고딕"/>
-                <a:cs typeface="Calibri"/>
-              </a:rPr>
-              <a:t>선택한 연령 별 핵심 영양소가 무엇인지 출력</a:t>
-            </a:r>
-            <a:endParaRPr lang="ko-KR" altLang="en-US" sz="4400" dirty="0">
-              <a:solidFill>
-                <a:schemeClr val="tx1"/>
-              </a:solidFill>
-              <a:ea typeface="맑은 고딕"/>
-              <a:cs typeface="Calibri"/>
-            </a:endParaRPr>
-          </a:p>
-          <a:p>
-            <a:pPr marL="914400" indent="-914400">
-              <a:buAutoNum type="arabicPeriod"/>
-            </a:pPr>
-            <a:endParaRPr lang="ko-KR" altLang="en-US" sz="4400" dirty="0">
-              <a:solidFill>
-                <a:schemeClr val="tx1"/>
-              </a:solidFill>
-              <a:ea typeface="맑은 고딕"/>
-              <a:cs typeface="Calibri"/>
-            </a:endParaRPr>
-          </a:p>
-          <a:p>
-            <a:pPr marL="914400" indent="-914400">
-              <a:buAutoNum type="arabicPeriod"/>
-            </a:pPr>
-            <a:r>
-              <a:rPr lang="ko-KR" altLang="en-US" sz="4400">
-                <a:solidFill>
-                  <a:schemeClr val="tx1"/>
-                </a:solidFill>
-                <a:ea typeface="맑은 고딕"/>
-                <a:cs typeface="Calibri"/>
-              </a:rPr>
-              <a:t>선택한 연령 별 중성지방 기여도 분석</a:t>
-            </a:r>
-            <a:endParaRPr lang="ko-KR" altLang="en-US" sz="4400" dirty="0">
-              <a:solidFill>
-                <a:schemeClr val="tx1"/>
-              </a:solidFill>
-              <a:ea typeface="맑은 고딕"/>
-              <a:cs typeface="Calibri"/>
-            </a:endParaRPr>
-          </a:p>
-          <a:p>
-            <a:pPr marL="914400" indent="-914400">
-              <a:buAutoNum type="arabicPeriod"/>
-            </a:pPr>
-            <a:endParaRPr lang="ko-KR" altLang="en-US" sz="4400" dirty="0">
-              <a:solidFill>
-                <a:schemeClr val="tx1"/>
-              </a:solidFill>
-              <a:ea typeface="맑은 고딕"/>
-              <a:cs typeface="Calibri"/>
-            </a:endParaRPr>
-          </a:p>
-          <a:p>
-            <a:pPr marL="914400" indent="-914400">
-              <a:buAutoNum type="arabicPeriod"/>
-            </a:pPr>
-            <a:r>
-              <a:rPr lang="ko-KR" altLang="en-US" sz="4400">
-                <a:solidFill>
-                  <a:schemeClr val="tx1"/>
-                </a:solidFill>
-                <a:ea typeface="맑은 고딕"/>
-                <a:cs typeface="Calibri"/>
-              </a:rPr>
-              <a:t>개선 방안 제안</a:t>
-            </a:r>
-            <a:endParaRPr lang="ko-KR" altLang="en-US" sz="4400" dirty="0">
-              <a:solidFill>
-                <a:schemeClr val="tx1"/>
-              </a:solidFill>
-              <a:ea typeface="맑은 고딕"/>
-              <a:cs typeface="Calibri"/>
-            </a:endParaRPr>
-          </a:p>
-        </p:txBody>
-      </p:sp>
+      </p:pic>
     </p:spTree>
     <p:extLst>
       <p:ext uri="{BB962C8B-B14F-4D97-AF65-F5344CB8AC3E}">
         <p14:creationId xmlns:p14="http://schemas.microsoft.com/office/powerpoint/2010/main" val="1866004893"/>
+      </p:ext>
+    </p:extLst>
+  </p:cSld>
+  <p:clrMapOvr>
+    <a:masterClrMapping/>
+  </p:clrMapOvr>
+</p:sld>
+</file>
+
+<file path=ppt/slides/slide3.xml><?xml version="1.0" encoding="utf-8"?>
+<p:sld xmlns:a="http://schemas.openxmlformats.org/drawingml/2006/main" xmlns:r="http://schemas.openxmlformats.org/officeDocument/2006/relationships" xmlns:p="http://schemas.openxmlformats.org/presentationml/2006/main">
+  <p:cSld>
+    <p:bg>
+      <p:bgPr>
+        <a:solidFill>
+          <a:srgbClr val="F8F7F5"/>
+        </a:solidFill>
+        <a:effectLst/>
+      </p:bgPr>
+    </p:bg>
+    <p:spTree>
+      <p:nvGrpSpPr>
+        <p:cNvPr id="1" name="">
+          <a:extLst>
+            <a:ext uri="{FF2B5EF4-FFF2-40B4-BE49-F238E27FC236}">
+              <a16:creationId xmlns:a16="http://schemas.microsoft.com/office/drawing/2014/main" id="{64EC1709-9F93-0771-BDF5-231896B92625}"/>
+            </a:ext>
+          </a:extLst>
+        </p:cNvPr>
+        <p:cNvGrpSpPr/>
+        <p:nvPr/>
+      </p:nvGrpSpPr>
+      <p:grpSpPr>
+        <a:xfrm>
+          <a:off x="0" y="0"/>
+          <a:ext cx="0" cy="0"/>
+          <a:chOff x="0" y="0"/>
+          <a:chExt cx="0" cy="0"/>
+        </a:xfrm>
+      </p:grpSpPr>
+      <p:graphicFrame>
+        <p:nvGraphicFramePr>
+          <p:cNvPr id="6" name="표 5">
+            <a:extLst>
+              <a:ext uri="{FF2B5EF4-FFF2-40B4-BE49-F238E27FC236}">
+                <a16:creationId xmlns:a16="http://schemas.microsoft.com/office/drawing/2014/main" id="{74E9F1BD-7FBA-FAD5-A575-9D2278B51908}"/>
+              </a:ext>
+            </a:extLst>
+          </p:cNvPr>
+          <p:cNvGraphicFramePr>
+            <a:graphicFrameLocks noGrp="1"/>
+          </p:cNvGraphicFramePr>
+          <p:nvPr/>
+        </p:nvGraphicFramePr>
+        <p:xfrm>
+          <a:off x="533399" y="304800"/>
+          <a:ext cx="23293602" cy="1981200"/>
+        </p:xfrm>
+        <a:graphic>
+          <a:graphicData uri="http://schemas.openxmlformats.org/drawingml/2006/table">
+            <a:tbl>
+              <a:tblPr firstRow="1" bandRow="1">
+                <a:tableStyleId>{5940675A-B579-460E-94D1-54222C63F5DA}</a:tableStyleId>
+              </a:tblPr>
+              <a:tblGrid>
+                <a:gridCol w="3882267">
+                  <a:extLst>
+                    <a:ext uri="{9D8B030D-6E8A-4147-A177-3AD203B41FA5}">
+                      <a16:colId xmlns:a16="http://schemas.microsoft.com/office/drawing/2014/main" val="3008628612"/>
+                    </a:ext>
+                  </a:extLst>
+                </a:gridCol>
+                <a:gridCol w="3882267">
+                  <a:extLst>
+                    <a:ext uri="{9D8B030D-6E8A-4147-A177-3AD203B41FA5}">
+                      <a16:colId xmlns:a16="http://schemas.microsoft.com/office/drawing/2014/main" val="676787877"/>
+                    </a:ext>
+                  </a:extLst>
+                </a:gridCol>
+                <a:gridCol w="3882267">
+                  <a:extLst>
+                    <a:ext uri="{9D8B030D-6E8A-4147-A177-3AD203B41FA5}">
+                      <a16:colId xmlns:a16="http://schemas.microsoft.com/office/drawing/2014/main" val="4230366021"/>
+                    </a:ext>
+                  </a:extLst>
+                </a:gridCol>
+                <a:gridCol w="3882267">
+                  <a:extLst>
+                    <a:ext uri="{9D8B030D-6E8A-4147-A177-3AD203B41FA5}">
+                      <a16:colId xmlns:a16="http://schemas.microsoft.com/office/drawing/2014/main" val="750898098"/>
+                    </a:ext>
+                  </a:extLst>
+                </a:gridCol>
+                <a:gridCol w="3882267">
+                  <a:extLst>
+                    <a:ext uri="{9D8B030D-6E8A-4147-A177-3AD203B41FA5}">
+                      <a16:colId xmlns:a16="http://schemas.microsoft.com/office/drawing/2014/main" val="1811449162"/>
+                    </a:ext>
+                  </a:extLst>
+                </a:gridCol>
+                <a:gridCol w="3882267">
+                  <a:extLst>
+                    <a:ext uri="{9D8B030D-6E8A-4147-A177-3AD203B41FA5}">
+                      <a16:colId xmlns:a16="http://schemas.microsoft.com/office/drawing/2014/main" val="3001645729"/>
+                    </a:ext>
+                  </a:extLst>
+                </a:gridCol>
+              </a:tblGrid>
+              <a:tr h="990600">
+                <a:tc>
+                  <a:txBody>
+                    <a:bodyPr/>
+                    <a:lstStyle/>
+                    <a:p>
+                      <a:pPr algn="ctr" latinLnBrk="1"/>
+                      <a:r>
+                        <a:rPr lang="ko-KR" altLang="en-US" sz="2800" dirty="0"/>
+                        <a:t>프로젝트 명</a:t>
+                      </a:r>
+                    </a:p>
+                  </a:txBody>
+                  <a:tcPr anchor="ctr">
+                    <a:solidFill>
+                      <a:schemeClr val="tx2">
+                        <a:lumMod val="20000"/>
+                        <a:lumOff val="80000"/>
+                      </a:schemeClr>
+                    </a:solidFill>
+                  </a:tcPr>
+                </a:tc>
+                <a:tc>
+                  <a:txBody>
+                    <a:bodyPr/>
+                    <a:lstStyle/>
+                    <a:p>
+                      <a:pPr algn="ctr" latinLnBrk="1"/>
+                      <a:r>
+                        <a:rPr lang="ko-KR" altLang="en-US" sz="2800" dirty="0"/>
+                        <a:t>식습관 유형 분석</a:t>
+                      </a:r>
+                    </a:p>
+                  </a:txBody>
+                  <a:tcPr anchor="ctr"/>
+                </a:tc>
+                <a:tc>
+                  <a:txBody>
+                    <a:bodyPr/>
+                    <a:lstStyle/>
+                    <a:p>
+                      <a:pPr algn="ctr" latinLnBrk="1"/>
+                      <a:r>
+                        <a:rPr lang="ko-KR" altLang="en-US" sz="2800" dirty="0"/>
+                        <a:t>설명</a:t>
+                      </a:r>
+                    </a:p>
+                  </a:txBody>
+                  <a:tcPr anchor="ctr">
+                    <a:solidFill>
+                      <a:schemeClr val="tx2">
+                        <a:lumMod val="20000"/>
+                        <a:lumOff val="80000"/>
+                      </a:schemeClr>
+                    </a:solidFill>
+                  </a:tcPr>
+                </a:tc>
+                <a:tc>
+                  <a:txBody>
+                    <a:bodyPr/>
+                    <a:lstStyle/>
+                    <a:p>
+                      <a:pPr algn="ctr" latinLnBrk="1"/>
+                      <a:r>
+                        <a:rPr lang="ko-KR" altLang="en-US" sz="2800" dirty="0"/>
+                        <a:t>메인 페이지</a:t>
+                      </a:r>
+                    </a:p>
+                  </a:txBody>
+                  <a:tcPr anchor="ctr"/>
+                </a:tc>
+                <a:tc>
+                  <a:txBody>
+                    <a:bodyPr/>
+                    <a:lstStyle/>
+                    <a:p>
+                      <a:pPr algn="ctr" latinLnBrk="1"/>
+                      <a:r>
+                        <a:rPr lang="ko-KR" altLang="en-US" sz="2800" dirty="0"/>
+                        <a:t>페이지 </a:t>
+                      </a:r>
+                      <a:r>
+                        <a:rPr lang="en-US" altLang="ko-KR" sz="2800" dirty="0"/>
+                        <a:t>#</a:t>
+                      </a:r>
+                      <a:endParaRPr lang="ko-KR" altLang="en-US" sz="2800" dirty="0"/>
+                    </a:p>
+                  </a:txBody>
+                  <a:tcPr anchor="ctr">
+                    <a:solidFill>
+                      <a:schemeClr val="tx2">
+                        <a:lumMod val="20000"/>
+                        <a:lumOff val="80000"/>
+                      </a:schemeClr>
+                    </a:solidFill>
+                  </a:tcPr>
+                </a:tc>
+                <a:tc>
+                  <a:txBody>
+                    <a:bodyPr/>
+                    <a:lstStyle/>
+                    <a:p>
+                      <a:pPr algn="ctr" latinLnBrk="1"/>
+                      <a:r>
+                        <a:rPr lang="en-US" altLang="ko-KR" sz="2800" dirty="0"/>
+                        <a:t>01-1</a:t>
+                      </a:r>
+                      <a:endParaRPr lang="ko-KR" altLang="en-US" sz="2800" dirty="0"/>
+                    </a:p>
+                  </a:txBody>
+                  <a:tcPr anchor="ctr"/>
+                </a:tc>
+                <a:extLst>
+                  <a:ext uri="{0D108BD9-81ED-4DB2-BD59-A6C34878D82A}">
+                    <a16:rowId xmlns:a16="http://schemas.microsoft.com/office/drawing/2014/main" val="566629533"/>
+                  </a:ext>
+                </a:extLst>
+              </a:tr>
+              <a:tr h="990600">
+                <a:tc>
+                  <a:txBody>
+                    <a:bodyPr/>
+                    <a:lstStyle/>
+                    <a:p>
+                      <a:pPr algn="ctr" latinLnBrk="1"/>
+                      <a:r>
+                        <a:rPr lang="ko-KR" altLang="en-US" sz="2800" dirty="0"/>
+                        <a:t>페이지</a:t>
+                      </a:r>
+                    </a:p>
+                  </a:txBody>
+                  <a:tcPr anchor="ctr">
+                    <a:solidFill>
+                      <a:schemeClr val="tx2">
+                        <a:lumMod val="20000"/>
+                        <a:lumOff val="80000"/>
+                      </a:schemeClr>
+                    </a:solidFill>
+                  </a:tcPr>
+                </a:tc>
+                <a:tc gridSpan="5">
+                  <a:txBody>
+                    <a:bodyPr/>
+                    <a:lstStyle/>
+                    <a:p>
+                      <a:pPr algn="ctr" latinLnBrk="1"/>
+                      <a:r>
+                        <a:rPr lang="ko-KR" altLang="en-US" sz="2800" dirty="0"/>
+                        <a:t>메인 페이지</a:t>
+                      </a:r>
+                    </a:p>
+                  </a:txBody>
+                  <a:tcPr anchor="ctr"/>
+                </a:tc>
+                <a:tc hMerge="1">
+                  <a:txBody>
+                    <a:bodyPr/>
+                    <a:lstStyle/>
+                    <a:p>
+                      <a:pPr latinLnBrk="1"/>
+                      <a:endParaRPr lang="ko-KR" altLang="en-US" dirty="0"/>
+                    </a:p>
+                  </a:txBody>
+                  <a:tcPr/>
+                </a:tc>
+                <a:tc hMerge="1">
+                  <a:txBody>
+                    <a:bodyPr/>
+                    <a:lstStyle/>
+                    <a:p>
+                      <a:pPr latinLnBrk="1"/>
+                      <a:endParaRPr lang="ko-KR" altLang="en-US" dirty="0"/>
+                    </a:p>
+                  </a:txBody>
+                  <a:tcPr/>
+                </a:tc>
+                <a:tc hMerge="1">
+                  <a:txBody>
+                    <a:bodyPr/>
+                    <a:lstStyle/>
+                    <a:p>
+                      <a:pPr latinLnBrk="1"/>
+                      <a:endParaRPr lang="ko-KR" altLang="en-US" dirty="0"/>
+                    </a:p>
+                  </a:txBody>
+                  <a:tcPr/>
+                </a:tc>
+                <a:tc hMerge="1">
+                  <a:txBody>
+                    <a:bodyPr/>
+                    <a:lstStyle/>
+                    <a:p>
+                      <a:pPr latinLnBrk="1"/>
+                      <a:endParaRPr lang="ko-KR" altLang="en-US" dirty="0"/>
+                    </a:p>
+                  </a:txBody>
+                  <a:tcPr/>
+                </a:tc>
+                <a:extLst>
+                  <a:ext uri="{0D108BD9-81ED-4DB2-BD59-A6C34878D82A}">
+                    <a16:rowId xmlns:a16="http://schemas.microsoft.com/office/drawing/2014/main" val="2713347330"/>
+                  </a:ext>
+                </a:extLst>
+              </a:tr>
+            </a:tbl>
+          </a:graphicData>
+        </a:graphic>
+      </p:graphicFrame>
+      <p:graphicFrame>
+        <p:nvGraphicFramePr>
+          <p:cNvPr id="12" name="표 11">
+            <a:extLst>
+              <a:ext uri="{FF2B5EF4-FFF2-40B4-BE49-F238E27FC236}">
+                <a16:creationId xmlns:a16="http://schemas.microsoft.com/office/drawing/2014/main" id="{F798484B-2407-D9BB-E387-2E959E9DE8C7}"/>
+              </a:ext>
+            </a:extLst>
+          </p:cNvPr>
+          <p:cNvGraphicFramePr>
+            <a:graphicFrameLocks noGrp="1"/>
+          </p:cNvGraphicFramePr>
+          <p:nvPr/>
+        </p:nvGraphicFramePr>
+        <p:xfrm>
+          <a:off x="18490773" y="5547522"/>
+          <a:ext cx="5386602" cy="4343400"/>
+        </p:xfrm>
+        <a:graphic>
+          <a:graphicData uri="http://schemas.openxmlformats.org/drawingml/2006/table">
+            <a:tbl>
+              <a:tblPr firstRow="1" bandRow="1">
+                <a:tableStyleId>{5940675A-B579-460E-94D1-54222C63F5DA}</a:tableStyleId>
+              </a:tblPr>
+              <a:tblGrid>
+                <a:gridCol w="1143001">
+                  <a:extLst>
+                    <a:ext uri="{9D8B030D-6E8A-4147-A177-3AD203B41FA5}">
+                      <a16:colId xmlns:a16="http://schemas.microsoft.com/office/drawing/2014/main" val="3099305099"/>
+                    </a:ext>
+                  </a:extLst>
+                </a:gridCol>
+                <a:gridCol w="4243601">
+                  <a:extLst>
+                    <a:ext uri="{9D8B030D-6E8A-4147-A177-3AD203B41FA5}">
+                      <a16:colId xmlns:a16="http://schemas.microsoft.com/office/drawing/2014/main" val="1372832432"/>
+                    </a:ext>
+                  </a:extLst>
+                </a:gridCol>
+              </a:tblGrid>
+              <a:tr h="1085850">
+                <a:tc>
+                  <a:txBody>
+                    <a:bodyPr/>
+                    <a:lstStyle/>
+                    <a:p>
+                      <a:pPr algn="ctr" latinLnBrk="1"/>
+                      <a:r>
+                        <a:rPr lang="en-US" altLang="ko-KR" sz="3200" dirty="0"/>
+                        <a:t>1</a:t>
+                      </a:r>
+                      <a:endParaRPr lang="ko-KR" altLang="en-US" sz="3200" dirty="0"/>
+                    </a:p>
+                  </a:txBody>
+                  <a:tcPr anchor="ctr">
+                    <a:solidFill>
+                      <a:schemeClr val="tx2">
+                        <a:lumMod val="20000"/>
+                        <a:lumOff val="80000"/>
+                      </a:schemeClr>
+                    </a:solidFill>
+                  </a:tcPr>
+                </a:tc>
+                <a:tc>
+                  <a:txBody>
+                    <a:bodyPr/>
+                    <a:lstStyle/>
+                    <a:p>
+                      <a:pPr algn="ctr" latinLnBrk="1"/>
+                      <a:r>
+                        <a:rPr lang="ko-KR" altLang="en-US" sz="3200" dirty="0"/>
+                        <a:t>제목</a:t>
+                      </a:r>
+                    </a:p>
+                  </a:txBody>
+                  <a:tcPr anchor="ctr"/>
+                </a:tc>
+                <a:extLst>
+                  <a:ext uri="{0D108BD9-81ED-4DB2-BD59-A6C34878D82A}">
+                    <a16:rowId xmlns:a16="http://schemas.microsoft.com/office/drawing/2014/main" val="1335438258"/>
+                  </a:ext>
+                </a:extLst>
+              </a:tr>
+              <a:tr h="1085850">
+                <a:tc>
+                  <a:txBody>
+                    <a:bodyPr/>
+                    <a:lstStyle/>
+                    <a:p>
+                      <a:pPr algn="ctr" latinLnBrk="1"/>
+                      <a:r>
+                        <a:rPr lang="en-US" altLang="ko-KR" sz="3200" dirty="0"/>
+                        <a:t>2</a:t>
+                      </a:r>
+                      <a:endParaRPr lang="ko-KR" altLang="en-US" sz="3200" dirty="0"/>
+                    </a:p>
+                  </a:txBody>
+                  <a:tcPr anchor="ctr">
+                    <a:solidFill>
+                      <a:schemeClr val="tx2">
+                        <a:lumMod val="20000"/>
+                        <a:lumOff val="80000"/>
+                      </a:schemeClr>
+                    </a:solidFill>
+                  </a:tcPr>
+                </a:tc>
+                <a:tc>
+                  <a:txBody>
+                    <a:bodyPr/>
+                    <a:lstStyle/>
+                    <a:p>
+                      <a:pPr algn="ctr" latinLnBrk="1"/>
+                      <a:r>
+                        <a:rPr lang="ko-KR" altLang="en-US" sz="3200" dirty="0"/>
+                        <a:t>로그인 탭</a:t>
+                      </a:r>
+                    </a:p>
+                  </a:txBody>
+                  <a:tcPr anchor="ctr"/>
+                </a:tc>
+                <a:extLst>
+                  <a:ext uri="{0D108BD9-81ED-4DB2-BD59-A6C34878D82A}">
+                    <a16:rowId xmlns:a16="http://schemas.microsoft.com/office/drawing/2014/main" val="2820470733"/>
+                  </a:ext>
+                </a:extLst>
+              </a:tr>
+              <a:tr h="1085850">
+                <a:tc>
+                  <a:txBody>
+                    <a:bodyPr/>
+                    <a:lstStyle/>
+                    <a:p>
+                      <a:pPr algn="ctr" latinLnBrk="1"/>
+                      <a:r>
+                        <a:rPr lang="en-US" altLang="ko-KR" sz="3200" dirty="0"/>
+                        <a:t>3</a:t>
+                      </a:r>
+                      <a:endParaRPr lang="ko-KR" altLang="en-US" sz="3200" dirty="0"/>
+                    </a:p>
+                  </a:txBody>
+                  <a:tcPr anchor="ctr">
+                    <a:solidFill>
+                      <a:schemeClr val="tx2">
+                        <a:lumMod val="20000"/>
+                        <a:lumOff val="80000"/>
+                      </a:schemeClr>
+                    </a:solidFill>
+                  </a:tcPr>
+                </a:tc>
+                <a:tc>
+                  <a:txBody>
+                    <a:bodyPr/>
+                    <a:lstStyle/>
+                    <a:p>
+                      <a:pPr algn="ctr" latinLnBrk="1"/>
+                      <a:r>
+                        <a:rPr lang="ko-KR" altLang="en-US" sz="3200" dirty="0"/>
+                        <a:t>회원가입 탭</a:t>
+                      </a:r>
+                    </a:p>
+                  </a:txBody>
+                  <a:tcPr anchor="ctr"/>
+                </a:tc>
+                <a:extLst>
+                  <a:ext uri="{0D108BD9-81ED-4DB2-BD59-A6C34878D82A}">
+                    <a16:rowId xmlns:a16="http://schemas.microsoft.com/office/drawing/2014/main" val="111030149"/>
+                  </a:ext>
+                </a:extLst>
+              </a:tr>
+              <a:tr h="1085850">
+                <a:tc>
+                  <a:txBody>
+                    <a:bodyPr/>
+                    <a:lstStyle/>
+                    <a:p>
+                      <a:pPr algn="ctr" latinLnBrk="1"/>
+                      <a:r>
+                        <a:rPr lang="en-US" altLang="ko-KR" sz="3200" dirty="0"/>
+                        <a:t>4</a:t>
+                      </a:r>
+                      <a:endParaRPr lang="ko-KR" altLang="en-US" sz="3200" dirty="0"/>
+                    </a:p>
+                  </a:txBody>
+                  <a:tcPr anchor="ctr">
+                    <a:solidFill>
+                      <a:schemeClr val="tx2">
+                        <a:lumMod val="20000"/>
+                        <a:lumOff val="80000"/>
+                      </a:schemeClr>
+                    </a:solidFill>
+                  </a:tcPr>
+                </a:tc>
+                <a:tc>
+                  <a:txBody>
+                    <a:bodyPr/>
+                    <a:lstStyle/>
+                    <a:p>
+                      <a:pPr algn="ctr" latinLnBrk="1"/>
+                      <a:r>
+                        <a:rPr lang="ko-KR" altLang="en-US" sz="3200" dirty="0"/>
+                        <a:t>로그인 버튼</a:t>
+                      </a:r>
+                    </a:p>
+                  </a:txBody>
+                  <a:tcPr anchor="ctr"/>
+                </a:tc>
+                <a:extLst>
+                  <a:ext uri="{0D108BD9-81ED-4DB2-BD59-A6C34878D82A}">
+                    <a16:rowId xmlns:a16="http://schemas.microsoft.com/office/drawing/2014/main" val="1548616452"/>
+                  </a:ext>
+                </a:extLst>
+              </a:tr>
+            </a:tbl>
+          </a:graphicData>
+        </a:graphic>
+      </p:graphicFrame>
+      <p:pic>
+        <p:nvPicPr>
+          <p:cNvPr id="7" name="그림 6">
+            <a:extLst>
+              <a:ext uri="{FF2B5EF4-FFF2-40B4-BE49-F238E27FC236}">
+                <a16:creationId xmlns:a16="http://schemas.microsoft.com/office/drawing/2014/main" id="{6F6BDB89-EA06-6CA4-078F-F34DF7B30199}"/>
+              </a:ext>
+            </a:extLst>
+          </p:cNvPr>
+          <p:cNvPicPr>
+            <a:picLocks noChangeAspect="1"/>
+          </p:cNvPicPr>
+          <p:nvPr/>
+        </p:nvPicPr>
+        <p:blipFill>
+          <a:blip r:embed="rId2">
+            <a:extLst>
+              <a:ext uri="{28A0092B-C50C-407E-A947-70E740481C1C}">
+                <a14:useLocalDpi xmlns:a14="http://schemas.microsoft.com/office/drawing/2010/main" val="0"/>
+              </a:ext>
+            </a:extLst>
+          </a:blip>
+          <a:stretch>
+            <a:fillRect/>
+          </a:stretch>
+        </p:blipFill>
+        <p:spPr>
+          <a:xfrm>
+            <a:off x="533399" y="2542572"/>
+            <a:ext cx="17674146" cy="10411427"/>
+          </a:xfrm>
+          <a:prstGeom prst="rect">
+            <a:avLst/>
+          </a:prstGeom>
+        </p:spPr>
+      </p:pic>
+    </p:spTree>
+    <p:extLst>
+      <p:ext uri="{BB962C8B-B14F-4D97-AF65-F5344CB8AC3E}">
+        <p14:creationId xmlns:p14="http://schemas.microsoft.com/office/powerpoint/2010/main" val="3755587971"/>
+      </p:ext>
+    </p:extLst>
+  </p:cSld>
+  <p:clrMapOvr>
+    <a:masterClrMapping/>
+  </p:clrMapOvr>
+</p:sld>
+</file>
+
+<file path=ppt/slides/slide4.xml><?xml version="1.0" encoding="utf-8"?>
+<p:sld xmlns:a="http://schemas.openxmlformats.org/drawingml/2006/main" xmlns:r="http://schemas.openxmlformats.org/officeDocument/2006/relationships" xmlns:p="http://schemas.openxmlformats.org/presentationml/2006/main">
+  <p:cSld>
+    <p:bg>
+      <p:bgPr>
+        <a:solidFill>
+          <a:srgbClr val="F8F7F5"/>
+        </a:solidFill>
+        <a:effectLst/>
+      </p:bgPr>
+    </p:bg>
+    <p:spTree>
+      <p:nvGrpSpPr>
+        <p:cNvPr id="1" name="">
+          <a:extLst>
+            <a:ext uri="{FF2B5EF4-FFF2-40B4-BE49-F238E27FC236}">
+              <a16:creationId xmlns:a16="http://schemas.microsoft.com/office/drawing/2014/main" id="{FED8FE81-B847-572F-89F3-44736C4D1E7E}"/>
+            </a:ext>
+          </a:extLst>
+        </p:cNvPr>
+        <p:cNvGrpSpPr/>
+        <p:nvPr/>
+      </p:nvGrpSpPr>
+      <p:grpSpPr>
+        <a:xfrm>
+          <a:off x="0" y="0"/>
+          <a:ext cx="0" cy="0"/>
+          <a:chOff x="0" y="0"/>
+          <a:chExt cx="0" cy="0"/>
+        </a:xfrm>
+      </p:grpSpPr>
+      <p:graphicFrame>
+        <p:nvGraphicFramePr>
+          <p:cNvPr id="6" name="표 5">
+            <a:extLst>
+              <a:ext uri="{FF2B5EF4-FFF2-40B4-BE49-F238E27FC236}">
+                <a16:creationId xmlns:a16="http://schemas.microsoft.com/office/drawing/2014/main" id="{F0DFEB79-E37A-536C-08DE-44DDCE506BE7}"/>
+              </a:ext>
+            </a:extLst>
+          </p:cNvPr>
+          <p:cNvGraphicFramePr>
+            <a:graphicFrameLocks noGrp="1"/>
+          </p:cNvGraphicFramePr>
+          <p:nvPr/>
+        </p:nvGraphicFramePr>
+        <p:xfrm>
+          <a:off x="533399" y="304800"/>
+          <a:ext cx="23293602" cy="1981200"/>
+        </p:xfrm>
+        <a:graphic>
+          <a:graphicData uri="http://schemas.openxmlformats.org/drawingml/2006/table">
+            <a:tbl>
+              <a:tblPr firstRow="1" bandRow="1">
+                <a:tableStyleId>{5940675A-B579-460E-94D1-54222C63F5DA}</a:tableStyleId>
+              </a:tblPr>
+              <a:tblGrid>
+                <a:gridCol w="3882267">
+                  <a:extLst>
+                    <a:ext uri="{9D8B030D-6E8A-4147-A177-3AD203B41FA5}">
+                      <a16:colId xmlns:a16="http://schemas.microsoft.com/office/drawing/2014/main" val="3008628612"/>
+                    </a:ext>
+                  </a:extLst>
+                </a:gridCol>
+                <a:gridCol w="3882267">
+                  <a:extLst>
+                    <a:ext uri="{9D8B030D-6E8A-4147-A177-3AD203B41FA5}">
+                      <a16:colId xmlns:a16="http://schemas.microsoft.com/office/drawing/2014/main" val="676787877"/>
+                    </a:ext>
+                  </a:extLst>
+                </a:gridCol>
+                <a:gridCol w="3882267">
+                  <a:extLst>
+                    <a:ext uri="{9D8B030D-6E8A-4147-A177-3AD203B41FA5}">
+                      <a16:colId xmlns:a16="http://schemas.microsoft.com/office/drawing/2014/main" val="4230366021"/>
+                    </a:ext>
+                  </a:extLst>
+                </a:gridCol>
+                <a:gridCol w="3882267">
+                  <a:extLst>
+                    <a:ext uri="{9D8B030D-6E8A-4147-A177-3AD203B41FA5}">
+                      <a16:colId xmlns:a16="http://schemas.microsoft.com/office/drawing/2014/main" val="750898098"/>
+                    </a:ext>
+                  </a:extLst>
+                </a:gridCol>
+                <a:gridCol w="3882267">
+                  <a:extLst>
+                    <a:ext uri="{9D8B030D-6E8A-4147-A177-3AD203B41FA5}">
+                      <a16:colId xmlns:a16="http://schemas.microsoft.com/office/drawing/2014/main" val="1811449162"/>
+                    </a:ext>
+                  </a:extLst>
+                </a:gridCol>
+                <a:gridCol w="3882267">
+                  <a:extLst>
+                    <a:ext uri="{9D8B030D-6E8A-4147-A177-3AD203B41FA5}">
+                      <a16:colId xmlns:a16="http://schemas.microsoft.com/office/drawing/2014/main" val="3001645729"/>
+                    </a:ext>
+                  </a:extLst>
+                </a:gridCol>
+              </a:tblGrid>
+              <a:tr h="990600">
+                <a:tc>
+                  <a:txBody>
+                    <a:bodyPr/>
+                    <a:lstStyle/>
+                    <a:p>
+                      <a:pPr algn="ctr" latinLnBrk="1"/>
+                      <a:r>
+                        <a:rPr lang="ko-KR" altLang="en-US" sz="2800" dirty="0"/>
+                        <a:t>프로젝트 명</a:t>
+                      </a:r>
+                    </a:p>
+                  </a:txBody>
+                  <a:tcPr anchor="ctr">
+                    <a:solidFill>
+                      <a:schemeClr val="tx2">
+                        <a:lumMod val="20000"/>
+                        <a:lumOff val="80000"/>
+                      </a:schemeClr>
+                    </a:solidFill>
+                  </a:tcPr>
+                </a:tc>
+                <a:tc>
+                  <a:txBody>
+                    <a:bodyPr/>
+                    <a:lstStyle/>
+                    <a:p>
+                      <a:pPr algn="ctr" latinLnBrk="1"/>
+                      <a:r>
+                        <a:rPr lang="ko-KR" altLang="en-US" sz="2800" dirty="0"/>
+                        <a:t>식습관 유형 분석</a:t>
+                      </a:r>
+                    </a:p>
+                  </a:txBody>
+                  <a:tcPr anchor="ctr"/>
+                </a:tc>
+                <a:tc>
+                  <a:txBody>
+                    <a:bodyPr/>
+                    <a:lstStyle/>
+                    <a:p>
+                      <a:pPr algn="ctr" latinLnBrk="1"/>
+                      <a:r>
+                        <a:rPr lang="ko-KR" altLang="en-US" sz="2800" dirty="0"/>
+                        <a:t>설명</a:t>
+                      </a:r>
+                    </a:p>
+                  </a:txBody>
+                  <a:tcPr anchor="ctr">
+                    <a:solidFill>
+                      <a:schemeClr val="tx2">
+                        <a:lumMod val="20000"/>
+                        <a:lumOff val="80000"/>
+                      </a:schemeClr>
+                    </a:solidFill>
+                  </a:tcPr>
+                </a:tc>
+                <a:tc>
+                  <a:txBody>
+                    <a:bodyPr/>
+                    <a:lstStyle/>
+                    <a:p>
+                      <a:pPr algn="ctr" latinLnBrk="1"/>
+                      <a:r>
+                        <a:rPr lang="ko-KR" altLang="en-US" sz="2800" dirty="0"/>
+                        <a:t>메인 페이지</a:t>
+                      </a:r>
+                    </a:p>
+                  </a:txBody>
+                  <a:tcPr anchor="ctr"/>
+                </a:tc>
+                <a:tc>
+                  <a:txBody>
+                    <a:bodyPr/>
+                    <a:lstStyle/>
+                    <a:p>
+                      <a:pPr algn="ctr" latinLnBrk="1"/>
+                      <a:r>
+                        <a:rPr lang="ko-KR" altLang="en-US" sz="2800" dirty="0"/>
+                        <a:t>페이지 </a:t>
+                      </a:r>
+                      <a:r>
+                        <a:rPr lang="en-US" altLang="ko-KR" sz="2800" dirty="0"/>
+                        <a:t>#</a:t>
+                      </a:r>
+                      <a:endParaRPr lang="ko-KR" altLang="en-US" sz="2800" dirty="0"/>
+                    </a:p>
+                  </a:txBody>
+                  <a:tcPr anchor="ctr">
+                    <a:solidFill>
+                      <a:schemeClr val="tx2">
+                        <a:lumMod val="20000"/>
+                        <a:lumOff val="80000"/>
+                      </a:schemeClr>
+                    </a:solidFill>
+                  </a:tcPr>
+                </a:tc>
+                <a:tc>
+                  <a:txBody>
+                    <a:bodyPr/>
+                    <a:lstStyle/>
+                    <a:p>
+                      <a:pPr algn="ctr" latinLnBrk="1"/>
+                      <a:r>
+                        <a:rPr lang="en-US" altLang="ko-KR" sz="2800" dirty="0"/>
+                        <a:t>01-1</a:t>
+                      </a:r>
+                      <a:endParaRPr lang="ko-KR" altLang="en-US" sz="2800" dirty="0"/>
+                    </a:p>
+                  </a:txBody>
+                  <a:tcPr anchor="ctr"/>
+                </a:tc>
+                <a:extLst>
+                  <a:ext uri="{0D108BD9-81ED-4DB2-BD59-A6C34878D82A}">
+                    <a16:rowId xmlns:a16="http://schemas.microsoft.com/office/drawing/2014/main" val="566629533"/>
+                  </a:ext>
+                </a:extLst>
+              </a:tr>
+              <a:tr h="990600">
+                <a:tc>
+                  <a:txBody>
+                    <a:bodyPr/>
+                    <a:lstStyle/>
+                    <a:p>
+                      <a:pPr algn="ctr" latinLnBrk="1"/>
+                      <a:r>
+                        <a:rPr lang="ko-KR" altLang="en-US" sz="2800" dirty="0"/>
+                        <a:t>페이지</a:t>
+                      </a:r>
+                    </a:p>
+                  </a:txBody>
+                  <a:tcPr anchor="ctr">
+                    <a:solidFill>
+                      <a:schemeClr val="tx2">
+                        <a:lumMod val="20000"/>
+                        <a:lumOff val="80000"/>
+                      </a:schemeClr>
+                    </a:solidFill>
+                  </a:tcPr>
+                </a:tc>
+                <a:tc gridSpan="5">
+                  <a:txBody>
+                    <a:bodyPr/>
+                    <a:lstStyle/>
+                    <a:p>
+                      <a:pPr algn="ctr" latinLnBrk="1"/>
+                      <a:r>
+                        <a:rPr lang="ko-KR" altLang="en-US" sz="2800" dirty="0"/>
+                        <a:t>메인 페이지</a:t>
+                      </a:r>
+                    </a:p>
+                  </a:txBody>
+                  <a:tcPr anchor="ctr"/>
+                </a:tc>
+                <a:tc hMerge="1">
+                  <a:txBody>
+                    <a:bodyPr/>
+                    <a:lstStyle/>
+                    <a:p>
+                      <a:pPr latinLnBrk="1"/>
+                      <a:endParaRPr lang="ko-KR" altLang="en-US" dirty="0"/>
+                    </a:p>
+                  </a:txBody>
+                  <a:tcPr/>
+                </a:tc>
+                <a:tc hMerge="1">
+                  <a:txBody>
+                    <a:bodyPr/>
+                    <a:lstStyle/>
+                    <a:p>
+                      <a:pPr latinLnBrk="1"/>
+                      <a:endParaRPr lang="ko-KR" altLang="en-US" dirty="0"/>
+                    </a:p>
+                  </a:txBody>
+                  <a:tcPr/>
+                </a:tc>
+                <a:tc hMerge="1">
+                  <a:txBody>
+                    <a:bodyPr/>
+                    <a:lstStyle/>
+                    <a:p>
+                      <a:pPr latinLnBrk="1"/>
+                      <a:endParaRPr lang="ko-KR" altLang="en-US" dirty="0"/>
+                    </a:p>
+                  </a:txBody>
+                  <a:tcPr/>
+                </a:tc>
+                <a:tc hMerge="1">
+                  <a:txBody>
+                    <a:bodyPr/>
+                    <a:lstStyle/>
+                    <a:p>
+                      <a:pPr latinLnBrk="1"/>
+                      <a:endParaRPr lang="ko-KR" altLang="en-US" dirty="0"/>
+                    </a:p>
+                  </a:txBody>
+                  <a:tcPr/>
+                </a:tc>
+                <a:extLst>
+                  <a:ext uri="{0D108BD9-81ED-4DB2-BD59-A6C34878D82A}">
+                    <a16:rowId xmlns:a16="http://schemas.microsoft.com/office/drawing/2014/main" val="2713347330"/>
+                  </a:ext>
+                </a:extLst>
+              </a:tr>
+            </a:tbl>
+          </a:graphicData>
+        </a:graphic>
+      </p:graphicFrame>
+      <p:graphicFrame>
+        <p:nvGraphicFramePr>
+          <p:cNvPr id="12" name="표 11">
+            <a:extLst>
+              <a:ext uri="{FF2B5EF4-FFF2-40B4-BE49-F238E27FC236}">
+                <a16:creationId xmlns:a16="http://schemas.microsoft.com/office/drawing/2014/main" id="{9E8606B9-8140-B325-7170-CEB9D897FC3A}"/>
+              </a:ext>
+            </a:extLst>
+          </p:cNvPr>
+          <p:cNvGraphicFramePr>
+            <a:graphicFrameLocks noGrp="1"/>
+          </p:cNvGraphicFramePr>
+          <p:nvPr/>
+        </p:nvGraphicFramePr>
+        <p:xfrm>
+          <a:off x="18490773" y="5547522"/>
+          <a:ext cx="5386602" cy="4343400"/>
+        </p:xfrm>
+        <a:graphic>
+          <a:graphicData uri="http://schemas.openxmlformats.org/drawingml/2006/table">
+            <a:tbl>
+              <a:tblPr firstRow="1" bandRow="1">
+                <a:tableStyleId>{5940675A-B579-460E-94D1-54222C63F5DA}</a:tableStyleId>
+              </a:tblPr>
+              <a:tblGrid>
+                <a:gridCol w="1143001">
+                  <a:extLst>
+                    <a:ext uri="{9D8B030D-6E8A-4147-A177-3AD203B41FA5}">
+                      <a16:colId xmlns:a16="http://schemas.microsoft.com/office/drawing/2014/main" val="3099305099"/>
+                    </a:ext>
+                  </a:extLst>
+                </a:gridCol>
+                <a:gridCol w="4243601">
+                  <a:extLst>
+                    <a:ext uri="{9D8B030D-6E8A-4147-A177-3AD203B41FA5}">
+                      <a16:colId xmlns:a16="http://schemas.microsoft.com/office/drawing/2014/main" val="1372832432"/>
+                    </a:ext>
+                  </a:extLst>
+                </a:gridCol>
+              </a:tblGrid>
+              <a:tr h="1085850">
+                <a:tc>
+                  <a:txBody>
+                    <a:bodyPr/>
+                    <a:lstStyle/>
+                    <a:p>
+                      <a:pPr algn="ctr" latinLnBrk="1"/>
+                      <a:r>
+                        <a:rPr lang="en-US" altLang="ko-KR" sz="3200" dirty="0"/>
+                        <a:t>1</a:t>
+                      </a:r>
+                      <a:endParaRPr lang="ko-KR" altLang="en-US" sz="3200" dirty="0"/>
+                    </a:p>
+                  </a:txBody>
+                  <a:tcPr anchor="ctr">
+                    <a:solidFill>
+                      <a:schemeClr val="tx2">
+                        <a:lumMod val="20000"/>
+                        <a:lumOff val="80000"/>
+                      </a:schemeClr>
+                    </a:solidFill>
+                  </a:tcPr>
+                </a:tc>
+                <a:tc>
+                  <a:txBody>
+                    <a:bodyPr/>
+                    <a:lstStyle/>
+                    <a:p>
+                      <a:pPr algn="ctr" latinLnBrk="1"/>
+                      <a:r>
+                        <a:rPr lang="ko-KR" altLang="en-US" sz="3200" dirty="0"/>
+                        <a:t>제목</a:t>
+                      </a:r>
+                    </a:p>
+                  </a:txBody>
+                  <a:tcPr anchor="ctr"/>
+                </a:tc>
+                <a:extLst>
+                  <a:ext uri="{0D108BD9-81ED-4DB2-BD59-A6C34878D82A}">
+                    <a16:rowId xmlns:a16="http://schemas.microsoft.com/office/drawing/2014/main" val="1335438258"/>
+                  </a:ext>
+                </a:extLst>
+              </a:tr>
+              <a:tr h="1085850">
+                <a:tc>
+                  <a:txBody>
+                    <a:bodyPr/>
+                    <a:lstStyle/>
+                    <a:p>
+                      <a:pPr algn="ctr" latinLnBrk="1"/>
+                      <a:r>
+                        <a:rPr lang="en-US" altLang="ko-KR" sz="3200" dirty="0"/>
+                        <a:t>2</a:t>
+                      </a:r>
+                      <a:endParaRPr lang="ko-KR" altLang="en-US" sz="3200" dirty="0"/>
+                    </a:p>
+                  </a:txBody>
+                  <a:tcPr anchor="ctr">
+                    <a:solidFill>
+                      <a:schemeClr val="tx2">
+                        <a:lumMod val="20000"/>
+                        <a:lumOff val="80000"/>
+                      </a:schemeClr>
+                    </a:solidFill>
+                  </a:tcPr>
+                </a:tc>
+                <a:tc>
+                  <a:txBody>
+                    <a:bodyPr/>
+                    <a:lstStyle/>
+                    <a:p>
+                      <a:pPr algn="ctr" latinLnBrk="1"/>
+                      <a:r>
+                        <a:rPr lang="ko-KR" altLang="en-US" sz="3200" dirty="0"/>
+                        <a:t>로그인 탭</a:t>
+                      </a:r>
+                    </a:p>
+                  </a:txBody>
+                  <a:tcPr anchor="ctr"/>
+                </a:tc>
+                <a:extLst>
+                  <a:ext uri="{0D108BD9-81ED-4DB2-BD59-A6C34878D82A}">
+                    <a16:rowId xmlns:a16="http://schemas.microsoft.com/office/drawing/2014/main" val="2820470733"/>
+                  </a:ext>
+                </a:extLst>
+              </a:tr>
+              <a:tr h="1085850">
+                <a:tc>
+                  <a:txBody>
+                    <a:bodyPr/>
+                    <a:lstStyle/>
+                    <a:p>
+                      <a:pPr algn="ctr" latinLnBrk="1"/>
+                      <a:r>
+                        <a:rPr lang="en-US" altLang="ko-KR" sz="3200" dirty="0"/>
+                        <a:t>3</a:t>
+                      </a:r>
+                      <a:endParaRPr lang="ko-KR" altLang="en-US" sz="3200" dirty="0"/>
+                    </a:p>
+                  </a:txBody>
+                  <a:tcPr anchor="ctr">
+                    <a:solidFill>
+                      <a:schemeClr val="tx2">
+                        <a:lumMod val="20000"/>
+                        <a:lumOff val="80000"/>
+                      </a:schemeClr>
+                    </a:solidFill>
+                  </a:tcPr>
+                </a:tc>
+                <a:tc>
+                  <a:txBody>
+                    <a:bodyPr/>
+                    <a:lstStyle/>
+                    <a:p>
+                      <a:pPr algn="ctr" latinLnBrk="1"/>
+                      <a:r>
+                        <a:rPr lang="ko-KR" altLang="en-US" sz="3200" dirty="0"/>
+                        <a:t>회원가입 탭</a:t>
+                      </a:r>
+                    </a:p>
+                  </a:txBody>
+                  <a:tcPr anchor="ctr"/>
+                </a:tc>
+                <a:extLst>
+                  <a:ext uri="{0D108BD9-81ED-4DB2-BD59-A6C34878D82A}">
+                    <a16:rowId xmlns:a16="http://schemas.microsoft.com/office/drawing/2014/main" val="111030149"/>
+                  </a:ext>
+                </a:extLst>
+              </a:tr>
+              <a:tr h="1085850">
+                <a:tc>
+                  <a:txBody>
+                    <a:bodyPr/>
+                    <a:lstStyle/>
+                    <a:p>
+                      <a:pPr algn="ctr" latinLnBrk="1"/>
+                      <a:r>
+                        <a:rPr lang="en-US" altLang="ko-KR" sz="3200" dirty="0"/>
+                        <a:t>4</a:t>
+                      </a:r>
+                      <a:endParaRPr lang="ko-KR" altLang="en-US" sz="3200" dirty="0"/>
+                    </a:p>
+                  </a:txBody>
+                  <a:tcPr anchor="ctr">
+                    <a:solidFill>
+                      <a:schemeClr val="tx2">
+                        <a:lumMod val="20000"/>
+                        <a:lumOff val="80000"/>
+                      </a:schemeClr>
+                    </a:solidFill>
+                  </a:tcPr>
+                </a:tc>
+                <a:tc>
+                  <a:txBody>
+                    <a:bodyPr/>
+                    <a:lstStyle/>
+                    <a:p>
+                      <a:pPr algn="ctr" latinLnBrk="1"/>
+                      <a:r>
+                        <a:rPr lang="ko-KR" altLang="en-US" sz="3200" dirty="0"/>
+                        <a:t>로그인 버튼</a:t>
+                      </a:r>
+                    </a:p>
+                  </a:txBody>
+                  <a:tcPr anchor="ctr"/>
+                </a:tc>
+                <a:extLst>
+                  <a:ext uri="{0D108BD9-81ED-4DB2-BD59-A6C34878D82A}">
+                    <a16:rowId xmlns:a16="http://schemas.microsoft.com/office/drawing/2014/main" val="1548616452"/>
+                  </a:ext>
+                </a:extLst>
+              </a:tr>
+            </a:tbl>
+          </a:graphicData>
+        </a:graphic>
+      </p:graphicFrame>
+      <p:pic>
+        <p:nvPicPr>
+          <p:cNvPr id="3" name="그림 2">
+            <a:extLst>
+              <a:ext uri="{FF2B5EF4-FFF2-40B4-BE49-F238E27FC236}">
+                <a16:creationId xmlns:a16="http://schemas.microsoft.com/office/drawing/2014/main" id="{90CA5914-2537-515C-977A-CEFC537BAA66}"/>
+              </a:ext>
+            </a:extLst>
+          </p:cNvPr>
+          <p:cNvPicPr>
+            <a:picLocks noChangeAspect="1"/>
+          </p:cNvPicPr>
+          <p:nvPr/>
+        </p:nvPicPr>
+        <p:blipFill>
+          <a:blip r:embed="rId2">
+            <a:extLst>
+              <a:ext uri="{28A0092B-C50C-407E-A947-70E740481C1C}">
+                <a14:useLocalDpi xmlns:a14="http://schemas.microsoft.com/office/drawing/2010/main" val="0"/>
+              </a:ext>
+            </a:extLst>
+          </a:blip>
+          <a:stretch>
+            <a:fillRect/>
+          </a:stretch>
+        </p:blipFill>
+        <p:spPr>
+          <a:xfrm>
+            <a:off x="508684" y="2609256"/>
+            <a:ext cx="17704530" cy="10801943"/>
+          </a:xfrm>
+          <a:prstGeom prst="rect">
+            <a:avLst/>
+          </a:prstGeom>
+        </p:spPr>
+      </p:pic>
+    </p:spTree>
+    <p:extLst>
+      <p:ext uri="{BB962C8B-B14F-4D97-AF65-F5344CB8AC3E}">
+        <p14:creationId xmlns:p14="http://schemas.microsoft.com/office/powerpoint/2010/main" val="2813191377"/>
+      </p:ext>
+    </p:extLst>
+  </p:cSld>
+  <p:clrMapOvr>
+    <a:masterClrMapping/>
+  </p:clrMapOvr>
+</p:sld>
+</file>
+
+<file path=ppt/slides/slide5.xml><?xml version="1.0" encoding="utf-8"?>
+<p:sld xmlns:a="http://schemas.openxmlformats.org/drawingml/2006/main" xmlns:r="http://schemas.openxmlformats.org/officeDocument/2006/relationships" xmlns:p="http://schemas.openxmlformats.org/presentationml/2006/main">
+  <p:cSld>
+    <p:bg>
+      <p:bgPr>
+        <a:solidFill>
+          <a:srgbClr val="F8F7F5"/>
+        </a:solidFill>
+        <a:effectLst/>
+      </p:bgPr>
+    </p:bg>
+    <p:spTree>
+      <p:nvGrpSpPr>
+        <p:cNvPr id="1" name="">
+          <a:extLst>
+            <a:ext uri="{FF2B5EF4-FFF2-40B4-BE49-F238E27FC236}">
+              <a16:creationId xmlns:a16="http://schemas.microsoft.com/office/drawing/2014/main" id="{3503A3EF-0113-9B18-20C9-7EB5C4C3BB83}"/>
+            </a:ext>
+          </a:extLst>
+        </p:cNvPr>
+        <p:cNvGrpSpPr/>
+        <p:nvPr/>
+      </p:nvGrpSpPr>
+      <p:grpSpPr>
+        <a:xfrm>
+          <a:off x="0" y="0"/>
+          <a:ext cx="0" cy="0"/>
+          <a:chOff x="0" y="0"/>
+          <a:chExt cx="0" cy="0"/>
+        </a:xfrm>
+      </p:grpSpPr>
+      <p:graphicFrame>
+        <p:nvGraphicFramePr>
+          <p:cNvPr id="6" name="표 5">
+            <a:extLst>
+              <a:ext uri="{FF2B5EF4-FFF2-40B4-BE49-F238E27FC236}">
+                <a16:creationId xmlns:a16="http://schemas.microsoft.com/office/drawing/2014/main" id="{4F9EE44D-5FD3-97A5-05AF-55F565E3E28C}"/>
+              </a:ext>
+            </a:extLst>
+          </p:cNvPr>
+          <p:cNvGraphicFramePr>
+            <a:graphicFrameLocks noGrp="1"/>
+          </p:cNvGraphicFramePr>
+          <p:nvPr/>
+        </p:nvGraphicFramePr>
+        <p:xfrm>
+          <a:off x="533399" y="304800"/>
+          <a:ext cx="23293602" cy="1981200"/>
+        </p:xfrm>
+        <a:graphic>
+          <a:graphicData uri="http://schemas.openxmlformats.org/drawingml/2006/table">
+            <a:tbl>
+              <a:tblPr firstRow="1" bandRow="1">
+                <a:tableStyleId>{5940675A-B579-460E-94D1-54222C63F5DA}</a:tableStyleId>
+              </a:tblPr>
+              <a:tblGrid>
+                <a:gridCol w="3882267">
+                  <a:extLst>
+                    <a:ext uri="{9D8B030D-6E8A-4147-A177-3AD203B41FA5}">
+                      <a16:colId xmlns:a16="http://schemas.microsoft.com/office/drawing/2014/main" val="3008628612"/>
+                    </a:ext>
+                  </a:extLst>
+                </a:gridCol>
+                <a:gridCol w="3882267">
+                  <a:extLst>
+                    <a:ext uri="{9D8B030D-6E8A-4147-A177-3AD203B41FA5}">
+                      <a16:colId xmlns:a16="http://schemas.microsoft.com/office/drawing/2014/main" val="676787877"/>
+                    </a:ext>
+                  </a:extLst>
+                </a:gridCol>
+                <a:gridCol w="3882267">
+                  <a:extLst>
+                    <a:ext uri="{9D8B030D-6E8A-4147-A177-3AD203B41FA5}">
+                      <a16:colId xmlns:a16="http://schemas.microsoft.com/office/drawing/2014/main" val="4230366021"/>
+                    </a:ext>
+                  </a:extLst>
+                </a:gridCol>
+                <a:gridCol w="3882267">
+                  <a:extLst>
+                    <a:ext uri="{9D8B030D-6E8A-4147-A177-3AD203B41FA5}">
+                      <a16:colId xmlns:a16="http://schemas.microsoft.com/office/drawing/2014/main" val="750898098"/>
+                    </a:ext>
+                  </a:extLst>
+                </a:gridCol>
+                <a:gridCol w="3882267">
+                  <a:extLst>
+                    <a:ext uri="{9D8B030D-6E8A-4147-A177-3AD203B41FA5}">
+                      <a16:colId xmlns:a16="http://schemas.microsoft.com/office/drawing/2014/main" val="1811449162"/>
+                    </a:ext>
+                  </a:extLst>
+                </a:gridCol>
+                <a:gridCol w="3882267">
+                  <a:extLst>
+                    <a:ext uri="{9D8B030D-6E8A-4147-A177-3AD203B41FA5}">
+                      <a16:colId xmlns:a16="http://schemas.microsoft.com/office/drawing/2014/main" val="3001645729"/>
+                    </a:ext>
+                  </a:extLst>
+                </a:gridCol>
+              </a:tblGrid>
+              <a:tr h="990600">
+                <a:tc>
+                  <a:txBody>
+                    <a:bodyPr/>
+                    <a:lstStyle/>
+                    <a:p>
+                      <a:pPr algn="ctr" latinLnBrk="1"/>
+                      <a:r>
+                        <a:rPr lang="ko-KR" altLang="en-US" sz="2800" dirty="0"/>
+                        <a:t>프로젝트 명</a:t>
+                      </a:r>
+                    </a:p>
+                  </a:txBody>
+                  <a:tcPr anchor="ctr">
+                    <a:solidFill>
+                      <a:schemeClr val="tx2">
+                        <a:lumMod val="20000"/>
+                        <a:lumOff val="80000"/>
+                      </a:schemeClr>
+                    </a:solidFill>
+                  </a:tcPr>
+                </a:tc>
+                <a:tc>
+                  <a:txBody>
+                    <a:bodyPr/>
+                    <a:lstStyle/>
+                    <a:p>
+                      <a:pPr algn="ctr" latinLnBrk="1"/>
+                      <a:r>
+                        <a:rPr lang="ko-KR" altLang="en-US" sz="2800" dirty="0"/>
+                        <a:t>식습관 유형 분석</a:t>
+                      </a:r>
+                    </a:p>
+                  </a:txBody>
+                  <a:tcPr anchor="ctr"/>
+                </a:tc>
+                <a:tc>
+                  <a:txBody>
+                    <a:bodyPr/>
+                    <a:lstStyle/>
+                    <a:p>
+                      <a:pPr algn="ctr" latinLnBrk="1"/>
+                      <a:r>
+                        <a:rPr lang="ko-KR" altLang="en-US" sz="2800" dirty="0"/>
+                        <a:t>설명</a:t>
+                      </a:r>
+                    </a:p>
+                  </a:txBody>
+                  <a:tcPr anchor="ctr">
+                    <a:solidFill>
+                      <a:schemeClr val="tx2">
+                        <a:lumMod val="20000"/>
+                        <a:lumOff val="80000"/>
+                      </a:schemeClr>
+                    </a:solidFill>
+                  </a:tcPr>
+                </a:tc>
+                <a:tc>
+                  <a:txBody>
+                    <a:bodyPr/>
+                    <a:lstStyle/>
+                    <a:p>
+                      <a:pPr algn="ctr" latinLnBrk="1"/>
+                      <a:r>
+                        <a:rPr lang="ko-KR" altLang="en-US" sz="2800" dirty="0"/>
+                        <a:t>메인 페이지</a:t>
+                      </a:r>
+                    </a:p>
+                  </a:txBody>
+                  <a:tcPr anchor="ctr"/>
+                </a:tc>
+                <a:tc>
+                  <a:txBody>
+                    <a:bodyPr/>
+                    <a:lstStyle/>
+                    <a:p>
+                      <a:pPr algn="ctr" latinLnBrk="1"/>
+                      <a:r>
+                        <a:rPr lang="ko-KR" altLang="en-US" sz="2800" dirty="0"/>
+                        <a:t>페이지 </a:t>
+                      </a:r>
+                      <a:r>
+                        <a:rPr lang="en-US" altLang="ko-KR" sz="2800" dirty="0"/>
+                        <a:t>#</a:t>
+                      </a:r>
+                      <a:endParaRPr lang="ko-KR" altLang="en-US" sz="2800" dirty="0"/>
+                    </a:p>
+                  </a:txBody>
+                  <a:tcPr anchor="ctr">
+                    <a:solidFill>
+                      <a:schemeClr val="tx2">
+                        <a:lumMod val="20000"/>
+                        <a:lumOff val="80000"/>
+                      </a:schemeClr>
+                    </a:solidFill>
+                  </a:tcPr>
+                </a:tc>
+                <a:tc>
+                  <a:txBody>
+                    <a:bodyPr/>
+                    <a:lstStyle/>
+                    <a:p>
+                      <a:pPr algn="ctr" latinLnBrk="1"/>
+                      <a:r>
+                        <a:rPr lang="en-US" altLang="ko-KR" sz="2800" dirty="0"/>
+                        <a:t>01-1</a:t>
+                      </a:r>
+                      <a:endParaRPr lang="ko-KR" altLang="en-US" sz="2800" dirty="0"/>
+                    </a:p>
+                  </a:txBody>
+                  <a:tcPr anchor="ctr"/>
+                </a:tc>
+                <a:extLst>
+                  <a:ext uri="{0D108BD9-81ED-4DB2-BD59-A6C34878D82A}">
+                    <a16:rowId xmlns:a16="http://schemas.microsoft.com/office/drawing/2014/main" val="566629533"/>
+                  </a:ext>
+                </a:extLst>
+              </a:tr>
+              <a:tr h="990600">
+                <a:tc>
+                  <a:txBody>
+                    <a:bodyPr/>
+                    <a:lstStyle/>
+                    <a:p>
+                      <a:pPr algn="ctr" latinLnBrk="1"/>
+                      <a:r>
+                        <a:rPr lang="ko-KR" altLang="en-US" sz="2800" dirty="0"/>
+                        <a:t>페이지</a:t>
+                      </a:r>
+                    </a:p>
+                  </a:txBody>
+                  <a:tcPr anchor="ctr">
+                    <a:solidFill>
+                      <a:schemeClr val="tx2">
+                        <a:lumMod val="20000"/>
+                        <a:lumOff val="80000"/>
+                      </a:schemeClr>
+                    </a:solidFill>
+                  </a:tcPr>
+                </a:tc>
+                <a:tc gridSpan="5">
+                  <a:txBody>
+                    <a:bodyPr/>
+                    <a:lstStyle/>
+                    <a:p>
+                      <a:pPr algn="ctr" latinLnBrk="1"/>
+                      <a:r>
+                        <a:rPr lang="ko-KR" altLang="en-US" sz="2800" dirty="0"/>
+                        <a:t>메인 페이지</a:t>
+                      </a:r>
+                    </a:p>
+                  </a:txBody>
+                  <a:tcPr anchor="ctr"/>
+                </a:tc>
+                <a:tc hMerge="1">
+                  <a:txBody>
+                    <a:bodyPr/>
+                    <a:lstStyle/>
+                    <a:p>
+                      <a:pPr latinLnBrk="1"/>
+                      <a:endParaRPr lang="ko-KR" altLang="en-US" dirty="0"/>
+                    </a:p>
+                  </a:txBody>
+                  <a:tcPr/>
+                </a:tc>
+                <a:tc hMerge="1">
+                  <a:txBody>
+                    <a:bodyPr/>
+                    <a:lstStyle/>
+                    <a:p>
+                      <a:pPr latinLnBrk="1"/>
+                      <a:endParaRPr lang="ko-KR" altLang="en-US" dirty="0"/>
+                    </a:p>
+                  </a:txBody>
+                  <a:tcPr/>
+                </a:tc>
+                <a:tc hMerge="1">
+                  <a:txBody>
+                    <a:bodyPr/>
+                    <a:lstStyle/>
+                    <a:p>
+                      <a:pPr latinLnBrk="1"/>
+                      <a:endParaRPr lang="ko-KR" altLang="en-US" dirty="0"/>
+                    </a:p>
+                  </a:txBody>
+                  <a:tcPr/>
+                </a:tc>
+                <a:tc hMerge="1">
+                  <a:txBody>
+                    <a:bodyPr/>
+                    <a:lstStyle/>
+                    <a:p>
+                      <a:pPr latinLnBrk="1"/>
+                      <a:endParaRPr lang="ko-KR" altLang="en-US" dirty="0"/>
+                    </a:p>
+                  </a:txBody>
+                  <a:tcPr/>
+                </a:tc>
+                <a:extLst>
+                  <a:ext uri="{0D108BD9-81ED-4DB2-BD59-A6C34878D82A}">
+                    <a16:rowId xmlns:a16="http://schemas.microsoft.com/office/drawing/2014/main" val="2713347330"/>
+                  </a:ext>
+                </a:extLst>
+              </a:tr>
+            </a:tbl>
+          </a:graphicData>
+        </a:graphic>
+      </p:graphicFrame>
+      <p:graphicFrame>
+        <p:nvGraphicFramePr>
+          <p:cNvPr id="12" name="표 11">
+            <a:extLst>
+              <a:ext uri="{FF2B5EF4-FFF2-40B4-BE49-F238E27FC236}">
+                <a16:creationId xmlns:a16="http://schemas.microsoft.com/office/drawing/2014/main" id="{F7D999C8-94D0-A902-4A5F-49E2BE9AD104}"/>
+              </a:ext>
+            </a:extLst>
+          </p:cNvPr>
+          <p:cNvGraphicFramePr>
+            <a:graphicFrameLocks noGrp="1"/>
+          </p:cNvGraphicFramePr>
+          <p:nvPr/>
+        </p:nvGraphicFramePr>
+        <p:xfrm>
+          <a:off x="18490773" y="5547522"/>
+          <a:ext cx="5386602" cy="4343400"/>
+        </p:xfrm>
+        <a:graphic>
+          <a:graphicData uri="http://schemas.openxmlformats.org/drawingml/2006/table">
+            <a:tbl>
+              <a:tblPr firstRow="1" bandRow="1">
+                <a:tableStyleId>{5940675A-B579-460E-94D1-54222C63F5DA}</a:tableStyleId>
+              </a:tblPr>
+              <a:tblGrid>
+                <a:gridCol w="1143001">
+                  <a:extLst>
+                    <a:ext uri="{9D8B030D-6E8A-4147-A177-3AD203B41FA5}">
+                      <a16:colId xmlns:a16="http://schemas.microsoft.com/office/drawing/2014/main" val="3099305099"/>
+                    </a:ext>
+                  </a:extLst>
+                </a:gridCol>
+                <a:gridCol w="4243601">
+                  <a:extLst>
+                    <a:ext uri="{9D8B030D-6E8A-4147-A177-3AD203B41FA5}">
+                      <a16:colId xmlns:a16="http://schemas.microsoft.com/office/drawing/2014/main" val="1372832432"/>
+                    </a:ext>
+                  </a:extLst>
+                </a:gridCol>
+              </a:tblGrid>
+              <a:tr h="1085850">
+                <a:tc>
+                  <a:txBody>
+                    <a:bodyPr/>
+                    <a:lstStyle/>
+                    <a:p>
+                      <a:pPr algn="ctr" latinLnBrk="1"/>
+                      <a:r>
+                        <a:rPr lang="en-US" altLang="ko-KR" sz="3200" dirty="0"/>
+                        <a:t>1</a:t>
+                      </a:r>
+                      <a:endParaRPr lang="ko-KR" altLang="en-US" sz="3200" dirty="0"/>
+                    </a:p>
+                  </a:txBody>
+                  <a:tcPr anchor="ctr">
+                    <a:solidFill>
+                      <a:schemeClr val="tx2">
+                        <a:lumMod val="20000"/>
+                        <a:lumOff val="80000"/>
+                      </a:schemeClr>
+                    </a:solidFill>
+                  </a:tcPr>
+                </a:tc>
+                <a:tc>
+                  <a:txBody>
+                    <a:bodyPr/>
+                    <a:lstStyle/>
+                    <a:p>
+                      <a:pPr algn="ctr" latinLnBrk="1"/>
+                      <a:r>
+                        <a:rPr lang="ko-KR" altLang="en-US" sz="3200" dirty="0"/>
+                        <a:t>제목</a:t>
+                      </a:r>
+                    </a:p>
+                  </a:txBody>
+                  <a:tcPr anchor="ctr"/>
+                </a:tc>
+                <a:extLst>
+                  <a:ext uri="{0D108BD9-81ED-4DB2-BD59-A6C34878D82A}">
+                    <a16:rowId xmlns:a16="http://schemas.microsoft.com/office/drawing/2014/main" val="1335438258"/>
+                  </a:ext>
+                </a:extLst>
+              </a:tr>
+              <a:tr h="1085850">
+                <a:tc>
+                  <a:txBody>
+                    <a:bodyPr/>
+                    <a:lstStyle/>
+                    <a:p>
+                      <a:pPr algn="ctr" latinLnBrk="1"/>
+                      <a:r>
+                        <a:rPr lang="en-US" altLang="ko-KR" sz="3200" dirty="0"/>
+                        <a:t>2</a:t>
+                      </a:r>
+                      <a:endParaRPr lang="ko-KR" altLang="en-US" sz="3200" dirty="0"/>
+                    </a:p>
+                  </a:txBody>
+                  <a:tcPr anchor="ctr">
+                    <a:solidFill>
+                      <a:schemeClr val="tx2">
+                        <a:lumMod val="20000"/>
+                        <a:lumOff val="80000"/>
+                      </a:schemeClr>
+                    </a:solidFill>
+                  </a:tcPr>
+                </a:tc>
+                <a:tc>
+                  <a:txBody>
+                    <a:bodyPr/>
+                    <a:lstStyle/>
+                    <a:p>
+                      <a:pPr algn="ctr" latinLnBrk="1"/>
+                      <a:r>
+                        <a:rPr lang="ko-KR" altLang="en-US" sz="3200" dirty="0"/>
+                        <a:t>로그인 탭</a:t>
+                      </a:r>
+                    </a:p>
+                  </a:txBody>
+                  <a:tcPr anchor="ctr"/>
+                </a:tc>
+                <a:extLst>
+                  <a:ext uri="{0D108BD9-81ED-4DB2-BD59-A6C34878D82A}">
+                    <a16:rowId xmlns:a16="http://schemas.microsoft.com/office/drawing/2014/main" val="2820470733"/>
+                  </a:ext>
+                </a:extLst>
+              </a:tr>
+              <a:tr h="1085850">
+                <a:tc>
+                  <a:txBody>
+                    <a:bodyPr/>
+                    <a:lstStyle/>
+                    <a:p>
+                      <a:pPr algn="ctr" latinLnBrk="1"/>
+                      <a:r>
+                        <a:rPr lang="en-US" altLang="ko-KR" sz="3200" dirty="0"/>
+                        <a:t>3</a:t>
+                      </a:r>
+                      <a:endParaRPr lang="ko-KR" altLang="en-US" sz="3200" dirty="0"/>
+                    </a:p>
+                  </a:txBody>
+                  <a:tcPr anchor="ctr">
+                    <a:solidFill>
+                      <a:schemeClr val="tx2">
+                        <a:lumMod val="20000"/>
+                        <a:lumOff val="80000"/>
+                      </a:schemeClr>
+                    </a:solidFill>
+                  </a:tcPr>
+                </a:tc>
+                <a:tc>
+                  <a:txBody>
+                    <a:bodyPr/>
+                    <a:lstStyle/>
+                    <a:p>
+                      <a:pPr algn="ctr" latinLnBrk="1"/>
+                      <a:r>
+                        <a:rPr lang="ko-KR" altLang="en-US" sz="3200" dirty="0"/>
+                        <a:t>회원가입 탭</a:t>
+                      </a:r>
+                    </a:p>
+                  </a:txBody>
+                  <a:tcPr anchor="ctr"/>
+                </a:tc>
+                <a:extLst>
+                  <a:ext uri="{0D108BD9-81ED-4DB2-BD59-A6C34878D82A}">
+                    <a16:rowId xmlns:a16="http://schemas.microsoft.com/office/drawing/2014/main" val="111030149"/>
+                  </a:ext>
+                </a:extLst>
+              </a:tr>
+              <a:tr h="1085850">
+                <a:tc>
+                  <a:txBody>
+                    <a:bodyPr/>
+                    <a:lstStyle/>
+                    <a:p>
+                      <a:pPr algn="ctr" latinLnBrk="1"/>
+                      <a:r>
+                        <a:rPr lang="en-US" altLang="ko-KR" sz="3200" dirty="0"/>
+                        <a:t>4</a:t>
+                      </a:r>
+                      <a:endParaRPr lang="ko-KR" altLang="en-US" sz="3200" dirty="0"/>
+                    </a:p>
+                  </a:txBody>
+                  <a:tcPr anchor="ctr">
+                    <a:solidFill>
+                      <a:schemeClr val="tx2">
+                        <a:lumMod val="20000"/>
+                        <a:lumOff val="80000"/>
+                      </a:schemeClr>
+                    </a:solidFill>
+                  </a:tcPr>
+                </a:tc>
+                <a:tc>
+                  <a:txBody>
+                    <a:bodyPr/>
+                    <a:lstStyle/>
+                    <a:p>
+                      <a:pPr algn="ctr" latinLnBrk="1"/>
+                      <a:r>
+                        <a:rPr lang="ko-KR" altLang="en-US" sz="3200" dirty="0"/>
+                        <a:t>로그인 버튼</a:t>
+                      </a:r>
+                    </a:p>
+                  </a:txBody>
+                  <a:tcPr anchor="ctr"/>
+                </a:tc>
+                <a:extLst>
+                  <a:ext uri="{0D108BD9-81ED-4DB2-BD59-A6C34878D82A}">
+                    <a16:rowId xmlns:a16="http://schemas.microsoft.com/office/drawing/2014/main" val="1548616452"/>
+                  </a:ext>
+                </a:extLst>
+              </a:tr>
+            </a:tbl>
+          </a:graphicData>
+        </a:graphic>
+      </p:graphicFrame>
+      <p:pic>
+        <p:nvPicPr>
+          <p:cNvPr id="4" name="그림 3">
+            <a:extLst>
+              <a:ext uri="{FF2B5EF4-FFF2-40B4-BE49-F238E27FC236}">
+                <a16:creationId xmlns:a16="http://schemas.microsoft.com/office/drawing/2014/main" id="{7398B513-98C1-20D5-FBD6-46308E7E7042}"/>
+              </a:ext>
+            </a:extLst>
+          </p:cNvPr>
+          <p:cNvPicPr>
+            <a:picLocks noChangeAspect="1"/>
+          </p:cNvPicPr>
+          <p:nvPr/>
+        </p:nvPicPr>
+        <p:blipFill>
+          <a:blip r:embed="rId2">
+            <a:extLst>
+              <a:ext uri="{28A0092B-C50C-407E-A947-70E740481C1C}">
+                <a14:useLocalDpi xmlns:a14="http://schemas.microsoft.com/office/drawing/2010/main" val="0"/>
+              </a:ext>
+            </a:extLst>
+          </a:blip>
+          <a:stretch>
+            <a:fillRect/>
+          </a:stretch>
+        </p:blipFill>
+        <p:spPr>
+          <a:xfrm>
+            <a:off x="506625" y="2628309"/>
+            <a:ext cx="17552775" cy="10560207"/>
+          </a:xfrm>
+          <a:prstGeom prst="rect">
+            <a:avLst/>
+          </a:prstGeom>
+        </p:spPr>
+      </p:pic>
+    </p:spTree>
+    <p:extLst>
+      <p:ext uri="{BB962C8B-B14F-4D97-AF65-F5344CB8AC3E}">
+        <p14:creationId xmlns:p14="http://schemas.microsoft.com/office/powerpoint/2010/main" val="4176162027"/>
       </p:ext>
     </p:extLst>
   </p:cSld>

--- a/1차 프로젝트/3. 화면설계서_박준수.pptx
+++ b/1차 프로젝트/3. 화면설계서_박준수.pptx
@@ -315,7 +315,7 @@
             <a:fld id="{1D8BD707-D9CF-40AE-B4C6-C98DA3205C09}" type="datetimeFigureOut">
               <a:rPr lang="en-US" smtClean="0"/>
               <a:pPr/>
-              <a:t>3/21/2026</a:t>
+              <a:t>3/22/2026</a:t>
             </a:fld>
             <a:endParaRPr lang="en-US"/>
           </a:p>
@@ -480,7 +480,7 @@
             <a:fld id="{1D8BD707-D9CF-40AE-B4C6-C98DA3205C09}" type="datetimeFigureOut">
               <a:rPr lang="en-US" smtClean="0"/>
               <a:pPr/>
-              <a:t>3/21/2026</a:t>
+              <a:t>3/22/2026</a:t>
             </a:fld>
             <a:endParaRPr lang="en-US"/>
           </a:p>
@@ -655,7 +655,7 @@
             <a:fld id="{1D8BD707-D9CF-40AE-B4C6-C98DA3205C09}" type="datetimeFigureOut">
               <a:rPr lang="en-US" smtClean="0"/>
               <a:pPr/>
-              <a:t>3/21/2026</a:t>
+              <a:t>3/22/2026</a:t>
             </a:fld>
             <a:endParaRPr lang="en-US"/>
           </a:p>
@@ -820,7 +820,7 @@
             <a:fld id="{1D8BD707-D9CF-40AE-B4C6-C98DA3205C09}" type="datetimeFigureOut">
               <a:rPr lang="en-US" smtClean="0"/>
               <a:pPr/>
-              <a:t>3/21/2026</a:t>
+              <a:t>3/22/2026</a:t>
             </a:fld>
             <a:endParaRPr lang="en-US"/>
           </a:p>
@@ -1062,7 +1062,7 @@
             <a:fld id="{1D8BD707-D9CF-40AE-B4C6-C98DA3205C09}" type="datetimeFigureOut">
               <a:rPr lang="en-US" smtClean="0"/>
               <a:pPr/>
-              <a:t>3/21/2026</a:t>
+              <a:t>3/22/2026</a:t>
             </a:fld>
             <a:endParaRPr lang="en-US"/>
           </a:p>
@@ -1344,7 +1344,7 @@
             <a:fld id="{1D8BD707-D9CF-40AE-B4C6-C98DA3205C09}" type="datetimeFigureOut">
               <a:rPr lang="en-US" smtClean="0"/>
               <a:pPr/>
-              <a:t>3/21/2026</a:t>
+              <a:t>3/22/2026</a:t>
             </a:fld>
             <a:endParaRPr lang="en-US"/>
           </a:p>
@@ -1760,7 +1760,7 @@
             <a:fld id="{1D8BD707-D9CF-40AE-B4C6-C98DA3205C09}" type="datetimeFigureOut">
               <a:rPr lang="en-US" smtClean="0"/>
               <a:pPr/>
-              <a:t>3/21/2026</a:t>
+              <a:t>3/22/2026</a:t>
             </a:fld>
             <a:endParaRPr lang="en-US"/>
           </a:p>
@@ -1874,7 +1874,7 @@
             <a:fld id="{1D8BD707-D9CF-40AE-B4C6-C98DA3205C09}" type="datetimeFigureOut">
               <a:rPr lang="en-US" smtClean="0"/>
               <a:pPr/>
-              <a:t>3/21/2026</a:t>
+              <a:t>3/22/2026</a:t>
             </a:fld>
             <a:endParaRPr lang="en-US"/>
           </a:p>
@@ -1966,7 +1966,7 @@
             <a:fld id="{1D8BD707-D9CF-40AE-B4C6-C98DA3205C09}" type="datetimeFigureOut">
               <a:rPr lang="en-US" smtClean="0"/>
               <a:pPr/>
-              <a:t>3/21/2026</a:t>
+              <a:t>3/22/2026</a:t>
             </a:fld>
             <a:endParaRPr lang="en-US"/>
           </a:p>
@@ -2238,7 +2238,7 @@
             <a:fld id="{1D8BD707-D9CF-40AE-B4C6-C98DA3205C09}" type="datetimeFigureOut">
               <a:rPr lang="en-US" smtClean="0"/>
               <a:pPr/>
-              <a:t>3/21/2026</a:t>
+              <a:t>3/22/2026</a:t>
             </a:fld>
             <a:endParaRPr lang="en-US"/>
           </a:p>
@@ -2487,7 +2487,7 @@
             <a:fld id="{1D8BD707-D9CF-40AE-B4C6-C98DA3205C09}" type="datetimeFigureOut">
               <a:rPr lang="en-US" smtClean="0"/>
               <a:pPr/>
-              <a:t>3/21/2026</a:t>
+              <a:t>3/22/2026</a:t>
             </a:fld>
             <a:endParaRPr lang="en-US"/>
           </a:p>
@@ -2695,7 +2695,7 @@
             <a:fld id="{1D8BD707-D9CF-40AE-B4C6-C98DA3205C09}" type="datetimeFigureOut">
               <a:rPr lang="en-US" smtClean="0"/>
               <a:pPr/>
-              <a:t>3/21/2026</a:t>
+              <a:t>3/22/2026</a:t>
             </a:fld>
             <a:endParaRPr lang="en-US"/>
           </a:p>
@@ -3584,7 +3584,7 @@
             <a:pPr algn="ctr"/>
             <a:r>
               <a:rPr lang="en-US" altLang="ko-KR" sz="4800" dirty="0"/>
-              <a:t>4</a:t>
+              <a:t>5</a:t>
             </a:r>
             <a:endParaRPr lang="ko-KR" altLang="en-US" sz="4800" dirty="0"/>
           </a:p>
@@ -3605,14 +3605,14 @@
           <p:nvPr>
             <p:extLst>
               <p:ext uri="{D42A27DB-BD31-4B8C-83A1-F6EECF244321}">
-                <p14:modId xmlns:p14="http://schemas.microsoft.com/office/powerpoint/2010/main" val="1590237555"/>
+                <p14:modId xmlns:p14="http://schemas.microsoft.com/office/powerpoint/2010/main" val="2615705420"/>
               </p:ext>
             </p:extLst>
           </p:nvPr>
         </p:nvGraphicFramePr>
         <p:xfrm>
           <a:off x="18490773" y="5547522"/>
-          <a:ext cx="5386602" cy="4343400"/>
+          <a:ext cx="5386602" cy="6515100"/>
         </p:xfrm>
         <a:graphic>
           <a:graphicData uri="http://schemas.openxmlformats.org/drawingml/2006/table">
@@ -3645,7 +3645,7 @@
                       <a:pPr algn="ctr" latinLnBrk="1"/>
                       <a:r>
                         <a:rPr lang="en-US" altLang="ko-KR" sz="3200" dirty="0"/>
-                        <a:t>1</a:t>
+                        <a:t>No.</a:t>
                       </a:r>
                       <a:endParaRPr lang="ko-KR" altLang="en-US" sz="3200" dirty="0"/>
                     </a:p>
@@ -3667,30 +3667,8 @@
                       <a:pPr algn="ctr" latinLnBrk="1"/>
                       <a:r>
                         <a:rPr lang="ko-KR" altLang="en-US" sz="3200" dirty="0"/>
-                        <a:t>제목</a:t>
-                      </a:r>
-                    </a:p>
-                  </a:txBody>
-                  <a:tcPr anchor="ctr"/>
-                </a:tc>
-                <a:extLst>
-                  <a:ext uri="{0D108BD9-81ED-4DB2-BD59-A6C34878D82A}">
-                    <a16:rowId xmlns:a16="http://schemas.microsoft.com/office/drawing/2014/main" val="1335438258"/>
-                  </a:ext>
-                </a:extLst>
-              </a:tr>
-              <a:tr h="1085850">
-                <a:tc>
-                  <a:txBody>
-                    <a:bodyPr/>
-                    <a:lstStyle/>
-                    <a:p>
-                      <a:pPr algn="ctr" latinLnBrk="1"/>
-                      <a:r>
-                        <a:rPr lang="en-US" altLang="ko-KR" sz="3200" dirty="0"/>
-                        <a:t>2</a:t>
-                      </a:r>
-                      <a:endParaRPr lang="ko-KR" altLang="en-US" sz="3200" dirty="0"/>
+                        <a:t>설명</a:t>
+                      </a:r>
                     </a:p>
                   </a:txBody>
                   <a:tcPr anchor="ctr">
@@ -3702,23 +3680,9 @@
                     </a:solidFill>
                   </a:tcPr>
                 </a:tc>
-                <a:tc>
-                  <a:txBody>
-                    <a:bodyPr/>
-                    <a:lstStyle/>
-                    <a:p>
-                      <a:pPr algn="ctr" latinLnBrk="1"/>
-                      <a:r>
-                        <a:rPr lang="ko-KR" altLang="en-US" sz="3200" dirty="0"/>
-                        <a:t>로그인 탭</a:t>
-                      </a:r>
-                    </a:p>
-                  </a:txBody>
-                  <a:tcPr anchor="ctr"/>
-                </a:tc>
                 <a:extLst>
                   <a:ext uri="{0D108BD9-81ED-4DB2-BD59-A6C34878D82A}">
-                    <a16:rowId xmlns:a16="http://schemas.microsoft.com/office/drawing/2014/main" val="2820470733"/>
+                    <a16:rowId xmlns:a16="http://schemas.microsoft.com/office/drawing/2014/main" val="3448051379"/>
                   </a:ext>
                 </a:extLst>
               </a:tr>
@@ -3731,7 +3695,7 @@
                       <a:pPr algn="ctr" latinLnBrk="1"/>
                       <a:r>
                         <a:rPr lang="en-US" altLang="ko-KR" sz="3200" dirty="0"/>
-                        <a:t>3</a:t>
+                        <a:t>1</a:t>
                       </a:r>
                       <a:endParaRPr lang="ko-KR" altLang="en-US" sz="3200" dirty="0"/>
                     </a:p>
@@ -3752,8 +3716,8 @@
                     <a:p>
                       <a:pPr algn="ctr" latinLnBrk="1"/>
                       <a:r>
-                        <a:rPr lang="ko-KR" altLang="en-US" sz="3200" dirty="0"/>
-                        <a:t>회원가입 탭</a:t>
+                        <a:rPr lang="ko-KR" altLang="en-US" sz="2400" dirty="0"/>
+                        <a:t>타이틀</a:t>
                       </a:r>
                     </a:p>
                   </a:txBody>
@@ -3761,7 +3725,7 @@
                 </a:tc>
                 <a:extLst>
                   <a:ext uri="{0D108BD9-81ED-4DB2-BD59-A6C34878D82A}">
-                    <a16:rowId xmlns:a16="http://schemas.microsoft.com/office/drawing/2014/main" val="111030149"/>
+                    <a16:rowId xmlns:a16="http://schemas.microsoft.com/office/drawing/2014/main" val="1335438258"/>
                   </a:ext>
                 </a:extLst>
               </a:tr>
@@ -3774,7 +3738,7 @@
                       <a:pPr algn="ctr" latinLnBrk="1"/>
                       <a:r>
                         <a:rPr lang="en-US" altLang="ko-KR" sz="3200" dirty="0"/>
-                        <a:t>4</a:t>
+                        <a:t>2</a:t>
                       </a:r>
                       <a:endParaRPr lang="ko-KR" altLang="en-US" sz="3200" dirty="0"/>
                     </a:p>
@@ -3795,8 +3759,102 @@
                     <a:p>
                       <a:pPr algn="ctr" latinLnBrk="1"/>
                       <a:r>
-                        <a:rPr lang="ko-KR" altLang="en-US" sz="3200" dirty="0"/>
-                        <a:t>로그인 버튼</a:t>
+                        <a:rPr lang="ko-KR" altLang="en-US" sz="2400" dirty="0"/>
+                        <a:t>로그인 탭 클릭 시 로그인 폼</a:t>
+                      </a:r>
+                    </a:p>
+                  </a:txBody>
+                  <a:tcPr anchor="ctr"/>
+                </a:tc>
+                <a:extLst>
+                  <a:ext uri="{0D108BD9-81ED-4DB2-BD59-A6C34878D82A}">
+                    <a16:rowId xmlns:a16="http://schemas.microsoft.com/office/drawing/2014/main" val="2820470733"/>
+                  </a:ext>
+                </a:extLst>
+              </a:tr>
+              <a:tr h="1085850">
+                <a:tc>
+                  <a:txBody>
+                    <a:bodyPr/>
+                    <a:lstStyle/>
+                    <a:p>
+                      <a:pPr algn="ctr" latinLnBrk="1"/>
+                      <a:r>
+                        <a:rPr lang="en-US" altLang="ko-KR" sz="3200" dirty="0"/>
+                        <a:t>3</a:t>
+                      </a:r>
+                      <a:endParaRPr lang="ko-KR" altLang="en-US" sz="3200" dirty="0"/>
+                    </a:p>
+                  </a:txBody>
+                  <a:tcPr anchor="ctr">
+                    <a:solidFill>
+                      <a:schemeClr val="tx2">
+                        <a:lumMod val="20000"/>
+                        <a:lumOff val="80000"/>
+                      </a:schemeClr>
+                    </a:solidFill>
+                  </a:tcPr>
+                </a:tc>
+                <a:tc>
+                  <a:txBody>
+                    <a:bodyPr/>
+                    <a:lstStyle/>
+                    <a:p>
+                      <a:pPr algn="ctr" latinLnBrk="1"/>
+                      <a:r>
+                        <a:rPr lang="ko-KR" altLang="en-US" sz="2400" dirty="0"/>
+                        <a:t>회원가입 탭 클릭 시 회원가입 화면으로 전환</a:t>
+                      </a:r>
+                    </a:p>
+                  </a:txBody>
+                  <a:tcPr anchor="ctr"/>
+                </a:tc>
+                <a:extLst>
+                  <a:ext uri="{0D108BD9-81ED-4DB2-BD59-A6C34878D82A}">
+                    <a16:rowId xmlns:a16="http://schemas.microsoft.com/office/drawing/2014/main" val="111030149"/>
+                  </a:ext>
+                </a:extLst>
+              </a:tr>
+              <a:tr h="1085850">
+                <a:tc>
+                  <a:txBody>
+                    <a:bodyPr/>
+                    <a:lstStyle/>
+                    <a:p>
+                      <a:pPr algn="ctr" latinLnBrk="1"/>
+                      <a:r>
+                        <a:rPr lang="en-US" altLang="ko-KR" sz="3200" dirty="0"/>
+                        <a:t>4</a:t>
+                      </a:r>
+                      <a:endParaRPr lang="ko-KR" altLang="en-US" sz="3200" dirty="0"/>
+                    </a:p>
+                  </a:txBody>
+                  <a:tcPr anchor="ctr">
+                    <a:solidFill>
+                      <a:schemeClr val="tx2">
+                        <a:lumMod val="20000"/>
+                        <a:lumOff val="80000"/>
+                      </a:schemeClr>
+                    </a:solidFill>
+                  </a:tcPr>
+                </a:tc>
+                <a:tc>
+                  <a:txBody>
+                    <a:bodyPr/>
+                    <a:lstStyle/>
+                    <a:p>
+                      <a:pPr algn="ctr" latinLnBrk="1"/>
+                      <a:r>
+                        <a:rPr lang="ko-KR" altLang="en-US" sz="2400" dirty="0"/>
+                        <a:t>로그인 폼의 이메일</a:t>
+                      </a:r>
+                      <a:r>
+                        <a:rPr lang="en-US" altLang="ko-KR" sz="2400" dirty="0"/>
+                        <a:t>, </a:t>
+                      </a:r>
+                      <a:r>
+                        <a:rPr lang="ko-KR" altLang="en-US" sz="2400" dirty="0"/>
+                        <a:t>비밀번호 입력 필드</a:t>
                       </a:r>
                     </a:p>
                   </a:txBody>
@@ -3805,6 +3863,49 @@
                 <a:extLst>
                   <a:ext uri="{0D108BD9-81ED-4DB2-BD59-A6C34878D82A}">
                     <a16:rowId xmlns:a16="http://schemas.microsoft.com/office/drawing/2014/main" val="1548616452"/>
+                  </a:ext>
+                </a:extLst>
+              </a:tr>
+              <a:tr h="1085850">
+                <a:tc>
+                  <a:txBody>
+                    <a:bodyPr/>
+                    <a:lstStyle/>
+                    <a:p>
+                      <a:pPr algn="ctr" latinLnBrk="1"/>
+                      <a:r>
+                        <a:rPr lang="en-US" altLang="ko-KR" sz="3200" dirty="0"/>
+                        <a:t>5</a:t>
+                      </a:r>
+                      <a:endParaRPr lang="ko-KR" altLang="en-US" sz="3200" dirty="0"/>
+                    </a:p>
+                  </a:txBody>
+                  <a:tcPr anchor="ctr">
+                    <a:solidFill>
+                      <a:schemeClr val="tx2">
+                        <a:lumMod val="20000"/>
+                        <a:lumOff val="80000"/>
+                      </a:schemeClr>
+                    </a:solidFill>
+                  </a:tcPr>
+                </a:tc>
+                <a:tc>
+                  <a:txBody>
+                    <a:bodyPr/>
+                    <a:lstStyle/>
+                    <a:p>
+                      <a:pPr algn="ctr" latinLnBrk="1"/>
+                      <a:r>
+                        <a:rPr lang="ko-KR" altLang="en-US" sz="2400" dirty="0"/>
+                        <a:t>로그인 버튼</a:t>
+                      </a:r>
+                    </a:p>
+                  </a:txBody>
+                  <a:tcPr anchor="ctr"/>
+                </a:tc>
+                <a:extLst>
+                  <a:ext uri="{0D108BD9-81ED-4DB2-BD59-A6C34878D82A}">
+                    <a16:rowId xmlns:a16="http://schemas.microsoft.com/office/drawing/2014/main" val="1303699936"/>
                   </a:ext>
                 </a:extLst>
               </a:tr>
@@ -3812,6 +3913,54 @@
           </a:graphicData>
         </a:graphic>
       </p:graphicFrame>
+      <p:sp>
+        <p:nvSpPr>
+          <p:cNvPr id="2" name="타원 1">
+            <a:extLst>
+              <a:ext uri="{FF2B5EF4-FFF2-40B4-BE49-F238E27FC236}">
+                <a16:creationId xmlns:a16="http://schemas.microsoft.com/office/drawing/2014/main" id="{B60AAFF6-1126-EAC6-742D-56155C44296C}"/>
+              </a:ext>
+            </a:extLst>
+          </p:cNvPr>
+          <p:cNvSpPr/>
+          <p:nvPr/>
+        </p:nvSpPr>
+        <p:spPr>
+          <a:xfrm>
+            <a:off x="6240162" y="7338222"/>
+            <a:ext cx="762000" cy="762000"/>
+          </a:xfrm>
+          <a:prstGeom prst="ellipse">
+            <a:avLst/>
+          </a:prstGeom>
+        </p:spPr>
+        <p:style>
+          <a:lnRef idx="3">
+            <a:schemeClr val="lt1"/>
+          </a:lnRef>
+          <a:fillRef idx="1">
+            <a:schemeClr val="accent6"/>
+          </a:fillRef>
+          <a:effectRef idx="1">
+            <a:schemeClr val="accent6"/>
+          </a:effectRef>
+          <a:fontRef idx="minor">
+            <a:schemeClr val="lt1"/>
+          </a:fontRef>
+        </p:style>
+        <p:txBody>
+          <a:bodyPr rtlCol="0" anchor="ctr"/>
+          <a:lstStyle/>
+          <a:p>
+            <a:pPr algn="ctr"/>
+            <a:r>
+              <a:rPr lang="en-US" altLang="ko-KR" sz="4800" dirty="0"/>
+              <a:t>4</a:t>
+            </a:r>
+            <a:endParaRPr lang="ko-KR" altLang="en-US" sz="4800" dirty="0"/>
+          </a:p>
+        </p:txBody>
+      </p:sp>
     </p:spTree>
     <p:extLst>
       <p:ext uri="{BB962C8B-B14F-4D97-AF65-F5344CB8AC3E}">
@@ -3856,12 +4005,48 @@
           <a:chExt cx="0" cy="0"/>
         </a:xfrm>
       </p:grpSpPr>
+      <p:pic>
+        <p:nvPicPr>
+          <p:cNvPr id="10" name="그림 9">
+            <a:extLst>
+              <a:ext uri="{FF2B5EF4-FFF2-40B4-BE49-F238E27FC236}">
+                <a16:creationId xmlns:a16="http://schemas.microsoft.com/office/drawing/2014/main" id="{9622CB15-3CCB-E07F-0D6C-4B6A492D02EE}"/>
+              </a:ext>
+            </a:extLst>
+          </p:cNvPr>
+          <p:cNvPicPr>
+            <a:picLocks noChangeAspect="1"/>
+          </p:cNvPicPr>
+          <p:nvPr/>
+        </p:nvPicPr>
+        <p:blipFill>
+          <a:blip r:embed="rId2">
+            <a:extLst>
+              <a:ext uri="{28A0092B-C50C-407E-A947-70E740481C1C}">
+                <a14:useLocalDpi xmlns:a14="http://schemas.microsoft.com/office/drawing/2010/main" val="0"/>
+              </a:ext>
+            </a:extLst>
+          </a:blip>
+          <a:stretch>
+            <a:fillRect/>
+          </a:stretch>
+        </p:blipFill>
+        <p:spPr>
+          <a:xfrm>
+            <a:off x="565237" y="2743200"/>
+            <a:ext cx="17642660" cy="10363200"/>
+          </a:xfrm>
+          <a:prstGeom prst="rect">
+            <a:avLst/>
+          </a:prstGeom>
+        </p:spPr>
+      </p:pic>
       <p:graphicFrame>
         <p:nvGraphicFramePr>
-          <p:cNvPr id="6" name="표 5">
+          <p:cNvPr id="2" name="표 1">
             <a:extLst>
               <a:ext uri="{FF2B5EF4-FFF2-40B4-BE49-F238E27FC236}">
-                <a16:creationId xmlns:a16="http://schemas.microsoft.com/office/drawing/2014/main" id="{8E23524C-3D36-6C15-7527-EB61091FD503}"/>
+                <a16:creationId xmlns:a16="http://schemas.microsoft.com/office/drawing/2014/main" id="{55F97B4B-661B-66D3-6E99-CFF097F34C8C}"/>
               </a:ext>
             </a:extLst>
           </p:cNvPr>
@@ -3871,7 +4056,7 @@
           <p:nvPr>
             <p:extLst>
               <p:ext uri="{D42A27DB-BD31-4B8C-83A1-F6EECF244321}">
-                <p14:modId xmlns:p14="http://schemas.microsoft.com/office/powerpoint/2010/main" val="235967404"/>
+                <p14:modId xmlns:p14="http://schemas.microsoft.com/office/powerpoint/2010/main" val="2895181975"/>
               </p:ext>
             </p:extLst>
           </p:nvPr>
@@ -3943,15 +4128,25 @@
                       </a:r>
                     </a:p>
                   </a:txBody>
-                  <a:tcPr anchor="ctr"/>
-                </a:tc>
-                <a:tc>
-                  <a:txBody>
-                    <a:bodyPr/>
-                    <a:lstStyle/>
-                    <a:p>
-                      <a:pPr algn="ctr" latinLnBrk="1"/>
-                      <a:endParaRPr lang="ko-KR" altLang="en-US" sz="2800" dirty="0"/>
+                  <a:tcPr anchor="ctr">
+                    <a:solidFill>
+                      <a:schemeClr val="tx2">
+                        <a:lumMod val="20000"/>
+                        <a:lumOff val="80000"/>
+                      </a:schemeClr>
+                    </a:solidFill>
+                  </a:tcPr>
+                </a:tc>
+                <a:tc>
+                  <a:txBody>
+                    <a:bodyPr/>
+                    <a:lstStyle/>
+                    <a:p>
+                      <a:pPr algn="ctr" latinLnBrk="1"/>
+                      <a:r>
+                        <a:rPr lang="ko-KR" altLang="en-US" sz="2800" dirty="0"/>
+                        <a:t>식습관 유형 분석</a:t>
+                      </a:r>
                     </a:p>
                   </a:txBody>
                   <a:tcPr anchor="ctr"/>
@@ -3968,7 +4163,14 @@
                       </a:r>
                     </a:p>
                   </a:txBody>
-                  <a:tcPr anchor="ctr"/>
+                  <a:tcPr anchor="ctr">
+                    <a:solidFill>
+                      <a:schemeClr val="tx2">
+                        <a:lumMod val="20000"/>
+                        <a:lumOff val="80000"/>
+                      </a:schemeClr>
+                    </a:solidFill>
+                  </a:tcPr>
                 </a:tc>
                 <a:tc>
                   <a:txBody>
@@ -3978,7 +4180,7 @@
                       <a:pPr algn="ctr" latinLnBrk="1"/>
                       <a:r>
                         <a:rPr lang="ko-KR" altLang="en-US" sz="2800" dirty="0"/>
-                        <a:t>메인 페이지</a:t>
+                        <a:t>기본 정보 입력</a:t>
                       </a:r>
                     </a:p>
                   </a:txBody>
@@ -4001,7 +4203,14 @@
                       <a:endParaRPr lang="ko-KR" altLang="en-US" sz="2800" dirty="0"/>
                     </a:p>
                   </a:txBody>
-                  <a:tcPr anchor="ctr"/>
+                  <a:tcPr anchor="ctr">
+                    <a:solidFill>
+                      <a:schemeClr val="tx2">
+                        <a:lumMod val="20000"/>
+                        <a:lumOff val="80000"/>
+                      </a:schemeClr>
+                    </a:solidFill>
+                  </a:tcPr>
                 </a:tc>
                 <a:tc>
                   <a:txBody>
@@ -4011,7 +4220,7 @@
                       <a:pPr algn="ctr" latinLnBrk="1"/>
                       <a:r>
                         <a:rPr lang="en-US" altLang="ko-KR" sz="2800" dirty="0"/>
-                        <a:t>01-1</a:t>
+                        <a:t>02-1</a:t>
                       </a:r>
                       <a:endParaRPr lang="ko-KR" altLang="en-US" sz="2800" dirty="0"/>
                     </a:p>
@@ -4037,7 +4246,14 @@
                       </a:r>
                     </a:p>
                   </a:txBody>
-                  <a:tcPr anchor="ctr"/>
+                  <a:tcPr anchor="ctr">
+                    <a:solidFill>
+                      <a:schemeClr val="tx2">
+                        <a:lumMod val="20000"/>
+                        <a:lumOff val="80000"/>
+                      </a:schemeClr>
+                    </a:solidFill>
+                  </a:tcPr>
                 </a:tc>
                 <a:tc gridSpan="5">
                   <a:txBody>
@@ -4047,8 +4263,13 @@
                       <a:pPr algn="ctr" latinLnBrk="1"/>
                       <a:r>
                         <a:rPr lang="ko-KR" altLang="en-US" sz="2800" dirty="0"/>
-                        <a:t>메인 페이지</a:t>
-                      </a:r>
+                        <a:t>데이터 입력 페이지</a:t>
+                      </a:r>
+                      <a:r>
+                        <a:rPr lang="en-US" altLang="ko-KR" sz="2800" dirty="0"/>
+                        <a:t>_1</a:t>
+                      </a:r>
+                      <a:endParaRPr lang="ko-KR" altLang="en-US" sz="2800" dirty="0"/>
                     </a:p>
                   </a:txBody>
                   <a:tcPr anchor="ctr"/>
@@ -4107,42 +4328,470 @@
           </a:graphicData>
         </a:graphic>
       </p:graphicFrame>
-      <p:pic>
-        <p:nvPicPr>
-          <p:cNvPr id="10" name="그림 9">
+      <p:graphicFrame>
+        <p:nvGraphicFramePr>
+          <p:cNvPr id="3" name="표 2">
             <a:extLst>
               <a:ext uri="{FF2B5EF4-FFF2-40B4-BE49-F238E27FC236}">
-                <a16:creationId xmlns:a16="http://schemas.microsoft.com/office/drawing/2014/main" id="{9622CB15-3CCB-E07F-0D6C-4B6A492D02EE}"/>
+                <a16:creationId xmlns:a16="http://schemas.microsoft.com/office/drawing/2014/main" id="{9CBBFD8E-882D-BDE7-27A8-BEED2EB44E65}"/>
               </a:ext>
             </a:extLst>
           </p:cNvPr>
-          <p:cNvPicPr>
-            <a:picLocks noChangeAspect="1"/>
-          </p:cNvPicPr>
-          <p:nvPr/>
-        </p:nvPicPr>
-        <p:blipFill>
-          <a:blip r:embed="rId2">
+          <p:cNvGraphicFramePr>
+            <a:graphicFrameLocks noGrp="1"/>
+          </p:cNvGraphicFramePr>
+          <p:nvPr>
+            <p:extLst>
+              <p:ext uri="{D42A27DB-BD31-4B8C-83A1-F6EECF244321}">
+                <p14:modId xmlns:p14="http://schemas.microsoft.com/office/powerpoint/2010/main" val="780299609"/>
+              </p:ext>
+            </p:extLst>
+          </p:nvPr>
+        </p:nvGraphicFramePr>
+        <p:xfrm>
+          <a:off x="18490773" y="5547522"/>
+          <a:ext cx="5386602" cy="5429250"/>
+        </p:xfrm>
+        <a:graphic>
+          <a:graphicData uri="http://schemas.openxmlformats.org/drawingml/2006/table">
+            <a:tbl>
+              <a:tblPr firstRow="1" bandRow="1">
+                <a:tableStyleId>{5940675A-B579-460E-94D1-54222C63F5DA}</a:tableStyleId>
+              </a:tblPr>
+              <a:tblGrid>
+                <a:gridCol w="1143001">
+                  <a:extLst>
+                    <a:ext uri="{9D8B030D-6E8A-4147-A177-3AD203B41FA5}">
+                      <a16:colId xmlns:a16="http://schemas.microsoft.com/office/drawing/2014/main" val="3099305099"/>
+                    </a:ext>
+                  </a:extLst>
+                </a:gridCol>
+                <a:gridCol w="4243601">
+                  <a:extLst>
+                    <a:ext uri="{9D8B030D-6E8A-4147-A177-3AD203B41FA5}">
+                      <a16:colId xmlns:a16="http://schemas.microsoft.com/office/drawing/2014/main" val="1372832432"/>
+                    </a:ext>
+                  </a:extLst>
+                </a:gridCol>
+              </a:tblGrid>
+              <a:tr h="1085850">
+                <a:tc>
+                  <a:txBody>
+                    <a:bodyPr/>
+                    <a:lstStyle/>
+                    <a:p>
+                      <a:pPr algn="ctr" latinLnBrk="1"/>
+                      <a:r>
+                        <a:rPr lang="en-US" altLang="ko-KR" sz="3200" dirty="0"/>
+                        <a:t>No.</a:t>
+                      </a:r>
+                      <a:endParaRPr lang="ko-KR" altLang="en-US" sz="3200" dirty="0"/>
+                    </a:p>
+                  </a:txBody>
+                  <a:tcPr anchor="ctr">
+                    <a:solidFill>
+                      <a:schemeClr val="tx2">
+                        <a:lumMod val="20000"/>
+                        <a:lumOff val="80000"/>
+                      </a:schemeClr>
+                    </a:solidFill>
+                  </a:tcPr>
+                </a:tc>
+                <a:tc>
+                  <a:txBody>
+                    <a:bodyPr/>
+                    <a:lstStyle/>
+                    <a:p>
+                      <a:pPr algn="ctr" latinLnBrk="1"/>
+                      <a:r>
+                        <a:rPr lang="ko-KR" altLang="en-US" sz="3200" dirty="0"/>
+                        <a:t>설명</a:t>
+                      </a:r>
+                    </a:p>
+                  </a:txBody>
+                  <a:tcPr anchor="ctr">
+                    <a:solidFill>
+                      <a:schemeClr val="tx2">
+                        <a:lumMod val="20000"/>
+                        <a:lumOff val="80000"/>
+                      </a:schemeClr>
+                    </a:solidFill>
+                  </a:tcPr>
+                </a:tc>
+                <a:extLst>
+                  <a:ext uri="{0D108BD9-81ED-4DB2-BD59-A6C34878D82A}">
+                    <a16:rowId xmlns:a16="http://schemas.microsoft.com/office/drawing/2014/main" val="555083959"/>
+                  </a:ext>
+                </a:extLst>
+              </a:tr>
+              <a:tr h="1085850">
+                <a:tc>
+                  <a:txBody>
+                    <a:bodyPr/>
+                    <a:lstStyle/>
+                    <a:p>
+                      <a:pPr algn="ctr" latinLnBrk="1"/>
+                      <a:r>
+                        <a:rPr lang="en-US" altLang="ko-KR" sz="3200" dirty="0"/>
+                        <a:t>1</a:t>
+                      </a:r>
+                      <a:endParaRPr lang="ko-KR" altLang="en-US" sz="3200" dirty="0"/>
+                    </a:p>
+                  </a:txBody>
+                  <a:tcPr anchor="ctr">
+                    <a:solidFill>
+                      <a:schemeClr val="tx2">
+                        <a:lumMod val="20000"/>
+                        <a:lumOff val="80000"/>
+                      </a:schemeClr>
+                    </a:solidFill>
+                  </a:tcPr>
+                </a:tc>
+                <a:tc>
+                  <a:txBody>
+                    <a:bodyPr/>
+                    <a:lstStyle/>
+                    <a:p>
+                      <a:pPr algn="ctr" latinLnBrk="1"/>
+                      <a:r>
+                        <a:rPr lang="ko-KR" altLang="en-US" sz="2400" dirty="0"/>
+                        <a:t>홈으로 클릭 시 초기화면 이동</a:t>
+                      </a:r>
+                    </a:p>
+                  </a:txBody>
+                  <a:tcPr anchor="ctr"/>
+                </a:tc>
+                <a:extLst>
+                  <a:ext uri="{0D108BD9-81ED-4DB2-BD59-A6C34878D82A}">
+                    <a16:rowId xmlns:a16="http://schemas.microsoft.com/office/drawing/2014/main" val="1335438258"/>
+                  </a:ext>
+                </a:extLst>
+              </a:tr>
+              <a:tr h="1085850">
+                <a:tc>
+                  <a:txBody>
+                    <a:bodyPr/>
+                    <a:lstStyle/>
+                    <a:p>
+                      <a:pPr algn="ctr" latinLnBrk="1"/>
+                      <a:r>
+                        <a:rPr lang="en-US" altLang="ko-KR" sz="3200" dirty="0"/>
+                        <a:t>2</a:t>
+                      </a:r>
+                      <a:endParaRPr lang="ko-KR" altLang="en-US" sz="3200" dirty="0"/>
+                    </a:p>
+                  </a:txBody>
+                  <a:tcPr anchor="ctr">
+                    <a:solidFill>
+                      <a:schemeClr val="tx2">
+                        <a:lumMod val="20000"/>
+                        <a:lumOff val="80000"/>
+                      </a:schemeClr>
+                    </a:solidFill>
+                  </a:tcPr>
+                </a:tc>
+                <a:tc>
+                  <a:txBody>
+                    <a:bodyPr/>
+                    <a:lstStyle/>
+                    <a:p>
+                      <a:pPr algn="ctr" latinLnBrk="1"/>
+                      <a:r>
+                        <a:rPr lang="ko-KR" altLang="en-US" sz="2400" dirty="0"/>
+                        <a:t>진행 단계 바</a:t>
+                      </a:r>
+                    </a:p>
+                  </a:txBody>
+                  <a:tcPr anchor="ctr"/>
+                </a:tc>
+                <a:extLst>
+                  <a:ext uri="{0D108BD9-81ED-4DB2-BD59-A6C34878D82A}">
+                    <a16:rowId xmlns:a16="http://schemas.microsoft.com/office/drawing/2014/main" val="2820470733"/>
+                  </a:ext>
+                </a:extLst>
+              </a:tr>
+              <a:tr h="1085850">
+                <a:tc>
+                  <a:txBody>
+                    <a:bodyPr/>
+                    <a:lstStyle/>
+                    <a:p>
+                      <a:pPr algn="ctr" latinLnBrk="1"/>
+                      <a:r>
+                        <a:rPr lang="en-US" altLang="ko-KR" sz="3200" dirty="0"/>
+                        <a:t>3</a:t>
+                      </a:r>
+                      <a:endParaRPr lang="ko-KR" altLang="en-US" sz="3200" dirty="0"/>
+                    </a:p>
+                  </a:txBody>
+                  <a:tcPr anchor="ctr">
+                    <a:solidFill>
+                      <a:schemeClr val="tx2">
+                        <a:lumMod val="20000"/>
+                        <a:lumOff val="80000"/>
+                      </a:schemeClr>
+                    </a:solidFill>
+                  </a:tcPr>
+                </a:tc>
+                <a:tc>
+                  <a:txBody>
+                    <a:bodyPr/>
+                    <a:lstStyle/>
+                    <a:p>
+                      <a:pPr algn="ctr" latinLnBrk="1"/>
+                      <a:r>
+                        <a:rPr lang="ko-KR" altLang="en-US" sz="2400" dirty="0"/>
+                        <a:t>개인 정보 입력 필드</a:t>
+                      </a:r>
+                    </a:p>
+                  </a:txBody>
+                  <a:tcPr anchor="ctr"/>
+                </a:tc>
+                <a:extLst>
+                  <a:ext uri="{0D108BD9-81ED-4DB2-BD59-A6C34878D82A}">
+                    <a16:rowId xmlns:a16="http://schemas.microsoft.com/office/drawing/2014/main" val="111030149"/>
+                  </a:ext>
+                </a:extLst>
+              </a:tr>
+              <a:tr h="1085850">
+                <a:tc>
+                  <a:txBody>
+                    <a:bodyPr/>
+                    <a:lstStyle/>
+                    <a:p>
+                      <a:pPr algn="ctr" latinLnBrk="1"/>
+                      <a:r>
+                        <a:rPr lang="en-US" altLang="ko-KR" sz="3200" dirty="0"/>
+                        <a:t>4</a:t>
+                      </a:r>
+                      <a:endParaRPr lang="ko-KR" altLang="en-US" sz="3200" dirty="0"/>
+                    </a:p>
+                  </a:txBody>
+                  <a:tcPr anchor="ctr">
+                    <a:solidFill>
+                      <a:schemeClr val="tx2">
+                        <a:lumMod val="20000"/>
+                        <a:lumOff val="80000"/>
+                      </a:schemeClr>
+                    </a:solidFill>
+                  </a:tcPr>
+                </a:tc>
+                <a:tc>
+                  <a:txBody>
+                    <a:bodyPr/>
+                    <a:lstStyle/>
+                    <a:p>
+                      <a:pPr algn="ctr" latinLnBrk="1"/>
+                      <a:r>
+                        <a:rPr lang="ko-KR" altLang="en-US" sz="2400" dirty="0"/>
+                        <a:t>다음 클릭 시 영양소 정보 폼으로 이동</a:t>
+                      </a:r>
+                    </a:p>
+                  </a:txBody>
+                  <a:tcPr anchor="ctr"/>
+                </a:tc>
+                <a:extLst>
+                  <a:ext uri="{0D108BD9-81ED-4DB2-BD59-A6C34878D82A}">
+                    <a16:rowId xmlns:a16="http://schemas.microsoft.com/office/drawing/2014/main" val="1548616452"/>
+                  </a:ext>
+                </a:extLst>
+              </a:tr>
+            </a:tbl>
+          </a:graphicData>
+        </a:graphic>
+      </p:graphicFrame>
+      <p:sp>
+        <p:nvSpPr>
+          <p:cNvPr id="4" name="타원 3">
             <a:extLst>
-              <a:ext uri="{28A0092B-C50C-407E-A947-70E740481C1C}">
-                <a14:useLocalDpi xmlns:a14="http://schemas.microsoft.com/office/drawing/2010/main" val="0"/>
+              <a:ext uri="{FF2B5EF4-FFF2-40B4-BE49-F238E27FC236}">
+                <a16:creationId xmlns:a16="http://schemas.microsoft.com/office/drawing/2014/main" id="{15E6854F-3DB3-D0D5-9BC6-B13B7F1CE12C}"/>
               </a:ext>
             </a:extLst>
-          </a:blip>
-          <a:stretch>
-            <a:fillRect/>
-          </a:stretch>
-        </p:blipFill>
+          </p:cNvPr>
+          <p:cNvSpPr/>
+          <p:nvPr/>
+        </p:nvSpPr>
         <p:spPr>
           <a:xfrm>
-            <a:off x="565237" y="2743200"/>
-            <a:ext cx="17642660" cy="10363200"/>
+            <a:off x="4724400" y="2971800"/>
+            <a:ext cx="762000" cy="762000"/>
           </a:xfrm>
-          <a:prstGeom prst="rect">
+          <a:prstGeom prst="ellipse">
             <a:avLst/>
           </a:prstGeom>
         </p:spPr>
-      </p:pic>
+        <p:style>
+          <a:lnRef idx="3">
+            <a:schemeClr val="lt1"/>
+          </a:lnRef>
+          <a:fillRef idx="1">
+            <a:schemeClr val="accent6"/>
+          </a:fillRef>
+          <a:effectRef idx="1">
+            <a:schemeClr val="accent6"/>
+          </a:effectRef>
+          <a:fontRef idx="minor">
+            <a:schemeClr val="lt1"/>
+          </a:fontRef>
+        </p:style>
+        <p:txBody>
+          <a:bodyPr rtlCol="0" anchor="ctr"/>
+          <a:lstStyle/>
+          <a:p>
+            <a:pPr algn="ctr"/>
+            <a:r>
+              <a:rPr lang="en-US" altLang="ko-KR" sz="4800" dirty="0"/>
+              <a:t>1</a:t>
+            </a:r>
+            <a:endParaRPr lang="ko-KR" altLang="en-US" sz="4800" dirty="0"/>
+          </a:p>
+        </p:txBody>
+      </p:sp>
+      <p:sp>
+        <p:nvSpPr>
+          <p:cNvPr id="5" name="타원 4">
+            <a:extLst>
+              <a:ext uri="{FF2B5EF4-FFF2-40B4-BE49-F238E27FC236}">
+                <a16:creationId xmlns:a16="http://schemas.microsoft.com/office/drawing/2014/main" id="{72C836E9-B782-FD01-95F9-C5FAB30D54B2}"/>
+              </a:ext>
+            </a:extLst>
+          </p:cNvPr>
+          <p:cNvSpPr/>
+          <p:nvPr/>
+        </p:nvSpPr>
+        <p:spPr>
+          <a:xfrm>
+            <a:off x="4709984" y="4814649"/>
+            <a:ext cx="762000" cy="762000"/>
+          </a:xfrm>
+          <a:prstGeom prst="ellipse">
+            <a:avLst/>
+          </a:prstGeom>
+        </p:spPr>
+        <p:style>
+          <a:lnRef idx="3">
+            <a:schemeClr val="lt1"/>
+          </a:lnRef>
+          <a:fillRef idx="1">
+            <a:schemeClr val="accent6"/>
+          </a:fillRef>
+          <a:effectRef idx="1">
+            <a:schemeClr val="accent6"/>
+          </a:effectRef>
+          <a:fontRef idx="minor">
+            <a:schemeClr val="lt1"/>
+          </a:fontRef>
+        </p:style>
+        <p:txBody>
+          <a:bodyPr rtlCol="0" anchor="ctr"/>
+          <a:lstStyle/>
+          <a:p>
+            <a:pPr algn="ctr"/>
+            <a:r>
+              <a:rPr lang="en-US" altLang="ko-KR" sz="4800" dirty="0"/>
+              <a:t>2</a:t>
+            </a:r>
+            <a:endParaRPr lang="ko-KR" altLang="en-US" sz="4800" dirty="0"/>
+          </a:p>
+        </p:txBody>
+      </p:sp>
+      <p:sp>
+        <p:nvSpPr>
+          <p:cNvPr id="7" name="타원 6">
+            <a:extLst>
+              <a:ext uri="{FF2B5EF4-FFF2-40B4-BE49-F238E27FC236}">
+                <a16:creationId xmlns:a16="http://schemas.microsoft.com/office/drawing/2014/main" id="{E95B702A-B83F-F195-BEFE-B2F9550E3EFC}"/>
+              </a:ext>
+            </a:extLst>
+          </p:cNvPr>
+          <p:cNvSpPr/>
+          <p:nvPr/>
+        </p:nvSpPr>
+        <p:spPr>
+          <a:xfrm>
+            <a:off x="4701747" y="5829300"/>
+            <a:ext cx="762000" cy="762000"/>
+          </a:xfrm>
+          <a:prstGeom prst="ellipse">
+            <a:avLst/>
+          </a:prstGeom>
+        </p:spPr>
+        <p:style>
+          <a:lnRef idx="3">
+            <a:schemeClr val="lt1"/>
+          </a:lnRef>
+          <a:fillRef idx="1">
+            <a:schemeClr val="accent6"/>
+          </a:fillRef>
+          <a:effectRef idx="1">
+            <a:schemeClr val="accent6"/>
+          </a:effectRef>
+          <a:fontRef idx="minor">
+            <a:schemeClr val="lt1"/>
+          </a:fontRef>
+        </p:style>
+        <p:txBody>
+          <a:bodyPr rtlCol="0" anchor="ctr"/>
+          <a:lstStyle/>
+          <a:p>
+            <a:pPr algn="ctr"/>
+            <a:r>
+              <a:rPr lang="en-US" altLang="ko-KR" sz="4800" dirty="0"/>
+              <a:t>3</a:t>
+            </a:r>
+            <a:endParaRPr lang="ko-KR" altLang="en-US" sz="4800" dirty="0"/>
+          </a:p>
+        </p:txBody>
+      </p:sp>
+      <p:sp>
+        <p:nvSpPr>
+          <p:cNvPr id="8" name="타원 7">
+            <a:extLst>
+              <a:ext uri="{FF2B5EF4-FFF2-40B4-BE49-F238E27FC236}">
+                <a16:creationId xmlns:a16="http://schemas.microsoft.com/office/drawing/2014/main" id="{BC17E823-9007-CB0D-2E50-A49CC95B6EC6}"/>
+              </a:ext>
+            </a:extLst>
+          </p:cNvPr>
+          <p:cNvSpPr/>
+          <p:nvPr/>
+        </p:nvSpPr>
+        <p:spPr>
+          <a:xfrm>
+            <a:off x="4701747" y="9890922"/>
+            <a:ext cx="762000" cy="762000"/>
+          </a:xfrm>
+          <a:prstGeom prst="ellipse">
+            <a:avLst/>
+          </a:prstGeom>
+        </p:spPr>
+        <p:style>
+          <a:lnRef idx="3">
+            <a:schemeClr val="lt1"/>
+          </a:lnRef>
+          <a:fillRef idx="1">
+            <a:schemeClr val="accent6"/>
+          </a:fillRef>
+          <a:effectRef idx="1">
+            <a:schemeClr val="accent6"/>
+          </a:effectRef>
+          <a:fontRef idx="minor">
+            <a:schemeClr val="lt1"/>
+          </a:fontRef>
+        </p:style>
+        <p:txBody>
+          <a:bodyPr rtlCol="0" anchor="ctr"/>
+          <a:lstStyle/>
+          <a:p>
+            <a:pPr algn="ctr"/>
+            <a:r>
+              <a:rPr lang="en-US" altLang="ko-KR" sz="4800" dirty="0"/>
+              <a:t>4</a:t>
+            </a:r>
+            <a:endParaRPr lang="ko-KR" altLang="en-US" sz="4800" dirty="0"/>
+          </a:p>
+        </p:txBody>
+      </p:sp>
     </p:spTree>
     <p:extLst>
       <p:ext uri="{BB962C8B-B14F-4D97-AF65-F5344CB8AC3E}">
@@ -4199,7 +4848,13 @@
           <p:cNvGraphicFramePr>
             <a:graphicFrameLocks noGrp="1"/>
           </p:cNvGraphicFramePr>
-          <p:nvPr/>
+          <p:nvPr>
+            <p:extLst>
+              <p:ext uri="{D42A27DB-BD31-4B8C-83A1-F6EECF244321}">
+                <p14:modId xmlns:p14="http://schemas.microsoft.com/office/powerpoint/2010/main" val="1373303996"/>
+              </p:ext>
+            </p:extLst>
+          </p:nvPr>
         </p:nvGraphicFramePr>
         <p:xfrm>
           <a:off x="533399" y="304800"/>
@@ -4320,7 +4975,7 @@
                       <a:pPr algn="ctr" latinLnBrk="1"/>
                       <a:r>
                         <a:rPr lang="ko-KR" altLang="en-US" sz="2800" dirty="0"/>
-                        <a:t>메인 페이지</a:t>
+                        <a:t>영양소 정보 입력</a:t>
                       </a:r>
                     </a:p>
                   </a:txBody>
@@ -4360,7 +5015,7 @@
                       <a:pPr algn="ctr" latinLnBrk="1"/>
                       <a:r>
                         <a:rPr lang="en-US" altLang="ko-KR" sz="2800" dirty="0"/>
-                        <a:t>01-1</a:t>
+                        <a:t>02-1</a:t>
                       </a:r>
                       <a:endParaRPr lang="ko-KR" altLang="en-US" sz="2800" dirty="0"/>
                     </a:p>
@@ -4403,7 +5058,7 @@
                       <a:pPr algn="ctr" latinLnBrk="1"/>
                       <a:r>
                         <a:rPr lang="ko-KR" altLang="en-US" sz="2800" dirty="0"/>
-                        <a:t>메인 페이지</a:t>
+                        <a:t>데이터 입력 페이지</a:t>
                       </a:r>
                     </a:p>
                   </a:txBody>
@@ -4456,222 +5111,6 @@
                 <a:extLst>
                   <a:ext uri="{0D108BD9-81ED-4DB2-BD59-A6C34878D82A}">
                     <a16:rowId xmlns:a16="http://schemas.microsoft.com/office/drawing/2014/main" val="2713347330"/>
-                  </a:ext>
-                </a:extLst>
-              </a:tr>
-            </a:tbl>
-          </a:graphicData>
-        </a:graphic>
-      </p:graphicFrame>
-      <p:graphicFrame>
-        <p:nvGraphicFramePr>
-          <p:cNvPr id="12" name="표 11">
-            <a:extLst>
-              <a:ext uri="{FF2B5EF4-FFF2-40B4-BE49-F238E27FC236}">
-                <a16:creationId xmlns:a16="http://schemas.microsoft.com/office/drawing/2014/main" id="{F798484B-2407-D9BB-E387-2E959E9DE8C7}"/>
-              </a:ext>
-            </a:extLst>
-          </p:cNvPr>
-          <p:cNvGraphicFramePr>
-            <a:graphicFrameLocks noGrp="1"/>
-          </p:cNvGraphicFramePr>
-          <p:nvPr/>
-        </p:nvGraphicFramePr>
-        <p:xfrm>
-          <a:off x="18490773" y="5547522"/>
-          <a:ext cx="5386602" cy="4343400"/>
-        </p:xfrm>
-        <a:graphic>
-          <a:graphicData uri="http://schemas.openxmlformats.org/drawingml/2006/table">
-            <a:tbl>
-              <a:tblPr firstRow="1" bandRow="1">
-                <a:tableStyleId>{5940675A-B579-460E-94D1-54222C63F5DA}</a:tableStyleId>
-              </a:tblPr>
-              <a:tblGrid>
-                <a:gridCol w="1143001">
-                  <a:extLst>
-                    <a:ext uri="{9D8B030D-6E8A-4147-A177-3AD203B41FA5}">
-                      <a16:colId xmlns:a16="http://schemas.microsoft.com/office/drawing/2014/main" val="3099305099"/>
-                    </a:ext>
-                  </a:extLst>
-                </a:gridCol>
-                <a:gridCol w="4243601">
-                  <a:extLst>
-                    <a:ext uri="{9D8B030D-6E8A-4147-A177-3AD203B41FA5}">
-                      <a16:colId xmlns:a16="http://schemas.microsoft.com/office/drawing/2014/main" val="1372832432"/>
-                    </a:ext>
-                  </a:extLst>
-                </a:gridCol>
-              </a:tblGrid>
-              <a:tr h="1085850">
-                <a:tc>
-                  <a:txBody>
-                    <a:bodyPr/>
-                    <a:lstStyle/>
-                    <a:p>
-                      <a:pPr algn="ctr" latinLnBrk="1"/>
-                      <a:r>
-                        <a:rPr lang="en-US" altLang="ko-KR" sz="3200" dirty="0"/>
-                        <a:t>1</a:t>
-                      </a:r>
-                      <a:endParaRPr lang="ko-KR" altLang="en-US" sz="3200" dirty="0"/>
-                    </a:p>
-                  </a:txBody>
-                  <a:tcPr anchor="ctr">
-                    <a:solidFill>
-                      <a:schemeClr val="tx2">
-                        <a:lumMod val="20000"/>
-                        <a:lumOff val="80000"/>
-                      </a:schemeClr>
-                    </a:solidFill>
-                  </a:tcPr>
-                </a:tc>
-                <a:tc>
-                  <a:txBody>
-                    <a:bodyPr/>
-                    <a:lstStyle/>
-                    <a:p>
-                      <a:pPr algn="ctr" latinLnBrk="1"/>
-                      <a:r>
-                        <a:rPr lang="ko-KR" altLang="en-US" sz="3200" dirty="0"/>
-                        <a:t>제목</a:t>
-                      </a:r>
-                    </a:p>
-                  </a:txBody>
-                  <a:tcPr anchor="ctr"/>
-                </a:tc>
-                <a:extLst>
-                  <a:ext uri="{0D108BD9-81ED-4DB2-BD59-A6C34878D82A}">
-                    <a16:rowId xmlns:a16="http://schemas.microsoft.com/office/drawing/2014/main" val="1335438258"/>
-                  </a:ext>
-                </a:extLst>
-              </a:tr>
-              <a:tr h="1085850">
-                <a:tc>
-                  <a:txBody>
-                    <a:bodyPr/>
-                    <a:lstStyle/>
-                    <a:p>
-                      <a:pPr algn="ctr" latinLnBrk="1"/>
-                      <a:r>
-                        <a:rPr lang="en-US" altLang="ko-KR" sz="3200" dirty="0"/>
-                        <a:t>2</a:t>
-                      </a:r>
-                      <a:endParaRPr lang="ko-KR" altLang="en-US" sz="3200" dirty="0"/>
-                    </a:p>
-                  </a:txBody>
-                  <a:tcPr anchor="ctr">
-                    <a:solidFill>
-                      <a:schemeClr val="tx2">
-                        <a:lumMod val="20000"/>
-                        <a:lumOff val="80000"/>
-                      </a:schemeClr>
-                    </a:solidFill>
-                  </a:tcPr>
-                </a:tc>
-                <a:tc>
-                  <a:txBody>
-                    <a:bodyPr/>
-                    <a:lstStyle/>
-                    <a:p>
-                      <a:pPr algn="ctr" latinLnBrk="1"/>
-                      <a:r>
-                        <a:rPr lang="ko-KR" altLang="en-US" sz="3200" dirty="0"/>
-                        <a:t>로그인 탭</a:t>
-                      </a:r>
-                    </a:p>
-                  </a:txBody>
-                  <a:tcPr anchor="ctr"/>
-                </a:tc>
-                <a:extLst>
-                  <a:ext uri="{0D108BD9-81ED-4DB2-BD59-A6C34878D82A}">
-                    <a16:rowId xmlns:a16="http://schemas.microsoft.com/office/drawing/2014/main" val="2820470733"/>
-                  </a:ext>
-                </a:extLst>
-              </a:tr>
-              <a:tr h="1085850">
-                <a:tc>
-                  <a:txBody>
-                    <a:bodyPr/>
-                    <a:lstStyle/>
-                    <a:p>
-                      <a:pPr algn="ctr" latinLnBrk="1"/>
-                      <a:r>
-                        <a:rPr lang="en-US" altLang="ko-KR" sz="3200" dirty="0"/>
-                        <a:t>3</a:t>
-                      </a:r>
-                      <a:endParaRPr lang="ko-KR" altLang="en-US" sz="3200" dirty="0"/>
-                    </a:p>
-                  </a:txBody>
-                  <a:tcPr anchor="ctr">
-                    <a:solidFill>
-                      <a:schemeClr val="tx2">
-                        <a:lumMod val="20000"/>
-                        <a:lumOff val="80000"/>
-                      </a:schemeClr>
-                    </a:solidFill>
-                  </a:tcPr>
-                </a:tc>
-                <a:tc>
-                  <a:txBody>
-                    <a:bodyPr/>
-                    <a:lstStyle/>
-                    <a:p>
-                      <a:pPr algn="ctr" latinLnBrk="1"/>
-                      <a:r>
-                        <a:rPr lang="ko-KR" altLang="en-US" sz="3200" dirty="0"/>
-                        <a:t>회원가입 탭</a:t>
-                      </a:r>
-                    </a:p>
-                  </a:txBody>
-                  <a:tcPr anchor="ctr"/>
-                </a:tc>
-                <a:extLst>
-                  <a:ext uri="{0D108BD9-81ED-4DB2-BD59-A6C34878D82A}">
-                    <a16:rowId xmlns:a16="http://schemas.microsoft.com/office/drawing/2014/main" val="111030149"/>
-                  </a:ext>
-                </a:extLst>
-              </a:tr>
-              <a:tr h="1085850">
-                <a:tc>
-                  <a:txBody>
-                    <a:bodyPr/>
-                    <a:lstStyle/>
-                    <a:p>
-                      <a:pPr algn="ctr" latinLnBrk="1"/>
-                      <a:r>
-                        <a:rPr lang="en-US" altLang="ko-KR" sz="3200" dirty="0"/>
-                        <a:t>4</a:t>
-                      </a:r>
-                      <a:endParaRPr lang="ko-KR" altLang="en-US" sz="3200" dirty="0"/>
-                    </a:p>
-                  </a:txBody>
-                  <a:tcPr anchor="ctr">
-                    <a:solidFill>
-                      <a:schemeClr val="tx2">
-                        <a:lumMod val="20000"/>
-                        <a:lumOff val="80000"/>
-                      </a:schemeClr>
-                    </a:solidFill>
-                  </a:tcPr>
-                </a:tc>
-                <a:tc>
-                  <a:txBody>
-                    <a:bodyPr/>
-                    <a:lstStyle/>
-                    <a:p>
-                      <a:pPr algn="ctr" latinLnBrk="1"/>
-                      <a:r>
-                        <a:rPr lang="ko-KR" altLang="en-US" sz="3200" dirty="0"/>
-                        <a:t>로그인 버튼</a:t>
-                      </a:r>
-                    </a:p>
-                  </a:txBody>
-                  <a:tcPr anchor="ctr"/>
-                </a:tc>
-                <a:extLst>
-                  <a:ext uri="{0D108BD9-81ED-4DB2-BD59-A6C34878D82A}">
-                    <a16:rowId xmlns:a16="http://schemas.microsoft.com/office/drawing/2014/main" val="1548616452"/>
                   </a:ext>
                 </a:extLst>
               </a:tr>
@@ -4715,6 +5154,478 @@
           </a:prstGeom>
         </p:spPr>
       </p:pic>
+      <p:sp>
+        <p:nvSpPr>
+          <p:cNvPr id="3" name="타원 2">
+            <a:extLst>
+              <a:ext uri="{FF2B5EF4-FFF2-40B4-BE49-F238E27FC236}">
+                <a16:creationId xmlns:a16="http://schemas.microsoft.com/office/drawing/2014/main" id="{B5523B28-ADFB-6C5A-A146-93237215FA27}"/>
+              </a:ext>
+            </a:extLst>
+          </p:cNvPr>
+          <p:cNvSpPr/>
+          <p:nvPr/>
+        </p:nvSpPr>
+        <p:spPr>
+          <a:xfrm>
+            <a:off x="4709984" y="2798523"/>
+            <a:ext cx="762000" cy="762000"/>
+          </a:xfrm>
+          <a:prstGeom prst="ellipse">
+            <a:avLst/>
+          </a:prstGeom>
+        </p:spPr>
+        <p:style>
+          <a:lnRef idx="3">
+            <a:schemeClr val="lt1"/>
+          </a:lnRef>
+          <a:fillRef idx="1">
+            <a:schemeClr val="accent6"/>
+          </a:fillRef>
+          <a:effectRef idx="1">
+            <a:schemeClr val="accent6"/>
+          </a:effectRef>
+          <a:fontRef idx="minor">
+            <a:schemeClr val="lt1"/>
+          </a:fontRef>
+        </p:style>
+        <p:txBody>
+          <a:bodyPr rtlCol="0" anchor="ctr"/>
+          <a:lstStyle/>
+          <a:p>
+            <a:pPr algn="ctr"/>
+            <a:r>
+              <a:rPr lang="en-US" altLang="ko-KR" sz="4800" dirty="0"/>
+              <a:t>1</a:t>
+            </a:r>
+            <a:endParaRPr lang="ko-KR" altLang="en-US" sz="4800" dirty="0"/>
+          </a:p>
+        </p:txBody>
+      </p:sp>
+      <p:sp>
+        <p:nvSpPr>
+          <p:cNvPr id="4" name="타원 3">
+            <a:extLst>
+              <a:ext uri="{FF2B5EF4-FFF2-40B4-BE49-F238E27FC236}">
+                <a16:creationId xmlns:a16="http://schemas.microsoft.com/office/drawing/2014/main" id="{97AF186E-C079-D715-FCC2-BD718A872765}"/>
+              </a:ext>
+            </a:extLst>
+          </p:cNvPr>
+          <p:cNvSpPr/>
+          <p:nvPr/>
+        </p:nvSpPr>
+        <p:spPr>
+          <a:xfrm>
+            <a:off x="4718221" y="4558014"/>
+            <a:ext cx="753763" cy="762000"/>
+          </a:xfrm>
+          <a:prstGeom prst="ellipse">
+            <a:avLst/>
+          </a:prstGeom>
+        </p:spPr>
+        <p:style>
+          <a:lnRef idx="3">
+            <a:schemeClr val="lt1"/>
+          </a:lnRef>
+          <a:fillRef idx="1">
+            <a:schemeClr val="accent6"/>
+          </a:fillRef>
+          <a:effectRef idx="1">
+            <a:schemeClr val="accent6"/>
+          </a:effectRef>
+          <a:fontRef idx="minor">
+            <a:schemeClr val="lt1"/>
+          </a:fontRef>
+        </p:style>
+        <p:txBody>
+          <a:bodyPr rtlCol="0" anchor="ctr"/>
+          <a:lstStyle/>
+          <a:p>
+            <a:pPr algn="ctr"/>
+            <a:r>
+              <a:rPr lang="en-US" altLang="ko-KR" sz="4800" dirty="0"/>
+              <a:t>2</a:t>
+            </a:r>
+            <a:endParaRPr lang="ko-KR" altLang="en-US" sz="4800" dirty="0"/>
+          </a:p>
+        </p:txBody>
+      </p:sp>
+      <p:sp>
+        <p:nvSpPr>
+          <p:cNvPr id="5" name="타원 4">
+            <a:extLst>
+              <a:ext uri="{FF2B5EF4-FFF2-40B4-BE49-F238E27FC236}">
+                <a16:creationId xmlns:a16="http://schemas.microsoft.com/office/drawing/2014/main" id="{7CE24BC3-4B65-8711-AB50-841AB30A1B66}"/>
+              </a:ext>
+            </a:extLst>
+          </p:cNvPr>
+          <p:cNvSpPr/>
+          <p:nvPr/>
+        </p:nvSpPr>
+        <p:spPr>
+          <a:xfrm>
+            <a:off x="4718221" y="5582722"/>
+            <a:ext cx="762000" cy="762000"/>
+          </a:xfrm>
+          <a:prstGeom prst="ellipse">
+            <a:avLst/>
+          </a:prstGeom>
+        </p:spPr>
+        <p:style>
+          <a:lnRef idx="3">
+            <a:schemeClr val="lt1"/>
+          </a:lnRef>
+          <a:fillRef idx="1">
+            <a:schemeClr val="accent6"/>
+          </a:fillRef>
+          <a:effectRef idx="1">
+            <a:schemeClr val="accent6"/>
+          </a:effectRef>
+          <a:fontRef idx="minor">
+            <a:schemeClr val="lt1"/>
+          </a:fontRef>
+        </p:style>
+        <p:txBody>
+          <a:bodyPr rtlCol="0" anchor="ctr"/>
+          <a:lstStyle/>
+          <a:p>
+            <a:pPr algn="ctr"/>
+            <a:r>
+              <a:rPr lang="en-US" altLang="ko-KR" sz="4800" dirty="0"/>
+              <a:t>3</a:t>
+            </a:r>
+            <a:endParaRPr lang="ko-KR" altLang="en-US" sz="4800" dirty="0"/>
+          </a:p>
+        </p:txBody>
+      </p:sp>
+      <p:sp>
+        <p:nvSpPr>
+          <p:cNvPr id="8" name="타원 7">
+            <a:extLst>
+              <a:ext uri="{FF2B5EF4-FFF2-40B4-BE49-F238E27FC236}">
+                <a16:creationId xmlns:a16="http://schemas.microsoft.com/office/drawing/2014/main" id="{AD34C74F-D81F-ADBC-379B-0E2F1A4CBFB1}"/>
+              </a:ext>
+            </a:extLst>
+          </p:cNvPr>
+          <p:cNvSpPr/>
+          <p:nvPr/>
+        </p:nvSpPr>
+        <p:spPr>
+          <a:xfrm>
+            <a:off x="4709984" y="11200201"/>
+            <a:ext cx="762000" cy="762000"/>
+          </a:xfrm>
+          <a:prstGeom prst="ellipse">
+            <a:avLst/>
+          </a:prstGeom>
+        </p:spPr>
+        <p:style>
+          <a:lnRef idx="3">
+            <a:schemeClr val="lt1"/>
+          </a:lnRef>
+          <a:fillRef idx="1">
+            <a:schemeClr val="accent6"/>
+          </a:fillRef>
+          <a:effectRef idx="1">
+            <a:schemeClr val="accent6"/>
+          </a:effectRef>
+          <a:fontRef idx="minor">
+            <a:schemeClr val="lt1"/>
+          </a:fontRef>
+        </p:style>
+        <p:txBody>
+          <a:bodyPr rtlCol="0" anchor="ctr"/>
+          <a:lstStyle/>
+          <a:p>
+            <a:pPr algn="ctr"/>
+            <a:r>
+              <a:rPr lang="en-US" altLang="ko-KR" sz="4800" dirty="0"/>
+              <a:t>4</a:t>
+            </a:r>
+            <a:endParaRPr lang="ko-KR" altLang="en-US" sz="4800" dirty="0"/>
+          </a:p>
+        </p:txBody>
+      </p:sp>
+      <p:graphicFrame>
+        <p:nvGraphicFramePr>
+          <p:cNvPr id="9" name="표 8">
+            <a:extLst>
+              <a:ext uri="{FF2B5EF4-FFF2-40B4-BE49-F238E27FC236}">
+                <a16:creationId xmlns:a16="http://schemas.microsoft.com/office/drawing/2014/main" id="{EFCFA38B-8D5A-8E9E-0D8E-1DE906EB1CD9}"/>
+              </a:ext>
+            </a:extLst>
+          </p:cNvPr>
+          <p:cNvGraphicFramePr>
+            <a:graphicFrameLocks noGrp="1"/>
+          </p:cNvGraphicFramePr>
+          <p:nvPr>
+            <p:extLst>
+              <p:ext uri="{D42A27DB-BD31-4B8C-83A1-F6EECF244321}">
+                <p14:modId xmlns:p14="http://schemas.microsoft.com/office/powerpoint/2010/main" val="3952461030"/>
+              </p:ext>
+            </p:extLst>
+          </p:nvPr>
+        </p:nvGraphicFramePr>
+        <p:xfrm>
+          <a:off x="18490773" y="5547522"/>
+          <a:ext cx="5386602" cy="5429250"/>
+        </p:xfrm>
+        <a:graphic>
+          <a:graphicData uri="http://schemas.openxmlformats.org/drawingml/2006/table">
+            <a:tbl>
+              <a:tblPr firstRow="1" bandRow="1">
+                <a:tableStyleId>{5940675A-B579-460E-94D1-54222C63F5DA}</a:tableStyleId>
+              </a:tblPr>
+              <a:tblGrid>
+                <a:gridCol w="1143001">
+                  <a:extLst>
+                    <a:ext uri="{9D8B030D-6E8A-4147-A177-3AD203B41FA5}">
+                      <a16:colId xmlns:a16="http://schemas.microsoft.com/office/drawing/2014/main" val="3099305099"/>
+                    </a:ext>
+                  </a:extLst>
+                </a:gridCol>
+                <a:gridCol w="4243601">
+                  <a:extLst>
+                    <a:ext uri="{9D8B030D-6E8A-4147-A177-3AD203B41FA5}">
+                      <a16:colId xmlns:a16="http://schemas.microsoft.com/office/drawing/2014/main" val="1372832432"/>
+                    </a:ext>
+                  </a:extLst>
+                </a:gridCol>
+              </a:tblGrid>
+              <a:tr h="1085850">
+                <a:tc>
+                  <a:txBody>
+                    <a:bodyPr/>
+                    <a:lstStyle/>
+                    <a:p>
+                      <a:pPr algn="ctr" latinLnBrk="1"/>
+                      <a:r>
+                        <a:rPr lang="en-US" altLang="ko-KR" sz="3200" dirty="0"/>
+                        <a:t>No.</a:t>
+                      </a:r>
+                      <a:endParaRPr lang="ko-KR" altLang="en-US" sz="3200" dirty="0"/>
+                    </a:p>
+                  </a:txBody>
+                  <a:tcPr anchor="ctr">
+                    <a:solidFill>
+                      <a:schemeClr val="tx2">
+                        <a:lumMod val="20000"/>
+                        <a:lumOff val="80000"/>
+                      </a:schemeClr>
+                    </a:solidFill>
+                  </a:tcPr>
+                </a:tc>
+                <a:tc>
+                  <a:txBody>
+                    <a:bodyPr/>
+                    <a:lstStyle/>
+                    <a:p>
+                      <a:pPr algn="ctr" latinLnBrk="1"/>
+                      <a:r>
+                        <a:rPr lang="ko-KR" altLang="en-US" sz="3200" dirty="0"/>
+                        <a:t>설명</a:t>
+                      </a:r>
+                    </a:p>
+                  </a:txBody>
+                  <a:tcPr anchor="ctr">
+                    <a:solidFill>
+                      <a:schemeClr val="tx2">
+                        <a:lumMod val="20000"/>
+                        <a:lumOff val="80000"/>
+                      </a:schemeClr>
+                    </a:solidFill>
+                  </a:tcPr>
+                </a:tc>
+                <a:extLst>
+                  <a:ext uri="{0D108BD9-81ED-4DB2-BD59-A6C34878D82A}">
+                    <a16:rowId xmlns:a16="http://schemas.microsoft.com/office/drawing/2014/main" val="555083959"/>
+                  </a:ext>
+                </a:extLst>
+              </a:tr>
+              <a:tr h="1085850">
+                <a:tc>
+                  <a:txBody>
+                    <a:bodyPr/>
+                    <a:lstStyle/>
+                    <a:p>
+                      <a:pPr algn="ctr" latinLnBrk="1"/>
+                      <a:r>
+                        <a:rPr lang="en-US" altLang="ko-KR" sz="3200" dirty="0"/>
+                        <a:t>1</a:t>
+                      </a:r>
+                      <a:endParaRPr lang="ko-KR" altLang="en-US" sz="3200" dirty="0"/>
+                    </a:p>
+                  </a:txBody>
+                  <a:tcPr anchor="ctr">
+                    <a:solidFill>
+                      <a:schemeClr val="tx2">
+                        <a:lumMod val="20000"/>
+                        <a:lumOff val="80000"/>
+                      </a:schemeClr>
+                    </a:solidFill>
+                  </a:tcPr>
+                </a:tc>
+                <a:tc>
+                  <a:txBody>
+                    <a:bodyPr/>
+                    <a:lstStyle/>
+                    <a:p>
+                      <a:pPr algn="ctr" latinLnBrk="1"/>
+                      <a:r>
+                        <a:rPr lang="ko-KR" altLang="en-US" sz="2400" dirty="0"/>
+                        <a:t>이전 클릭 시 초기화면 이동</a:t>
+                      </a:r>
+                    </a:p>
+                  </a:txBody>
+                  <a:tcPr anchor="ctr"/>
+                </a:tc>
+                <a:extLst>
+                  <a:ext uri="{0D108BD9-81ED-4DB2-BD59-A6C34878D82A}">
+                    <a16:rowId xmlns:a16="http://schemas.microsoft.com/office/drawing/2014/main" val="1335438258"/>
+                  </a:ext>
+                </a:extLst>
+              </a:tr>
+              <a:tr h="1085850">
+                <a:tc>
+                  <a:txBody>
+                    <a:bodyPr/>
+                    <a:lstStyle/>
+                    <a:p>
+                      <a:pPr algn="ctr" latinLnBrk="1"/>
+                      <a:r>
+                        <a:rPr lang="en-US" altLang="ko-KR" sz="3200" dirty="0"/>
+                        <a:t>2</a:t>
+                      </a:r>
+                      <a:endParaRPr lang="ko-KR" altLang="en-US" sz="3200" dirty="0"/>
+                    </a:p>
+                  </a:txBody>
+                  <a:tcPr anchor="ctr">
+                    <a:solidFill>
+                      <a:schemeClr val="tx2">
+                        <a:lumMod val="20000"/>
+                        <a:lumOff val="80000"/>
+                      </a:schemeClr>
+                    </a:solidFill>
+                  </a:tcPr>
+                </a:tc>
+                <a:tc>
+                  <a:txBody>
+                    <a:bodyPr/>
+                    <a:lstStyle/>
+                    <a:p>
+                      <a:pPr algn="ctr" latinLnBrk="1"/>
+                      <a:r>
+                        <a:rPr lang="ko-KR" altLang="en-US" sz="2400" dirty="0"/>
+                        <a:t>진행 단계 바</a:t>
+                      </a:r>
+                    </a:p>
+                  </a:txBody>
+                  <a:tcPr anchor="ctr"/>
+                </a:tc>
+                <a:extLst>
+                  <a:ext uri="{0D108BD9-81ED-4DB2-BD59-A6C34878D82A}">
+                    <a16:rowId xmlns:a16="http://schemas.microsoft.com/office/drawing/2014/main" val="2820470733"/>
+                  </a:ext>
+                </a:extLst>
+              </a:tr>
+              <a:tr h="1085850">
+                <a:tc>
+                  <a:txBody>
+                    <a:bodyPr/>
+                    <a:lstStyle/>
+                    <a:p>
+                      <a:pPr algn="ctr" latinLnBrk="1"/>
+                      <a:r>
+                        <a:rPr lang="en-US" altLang="ko-KR" sz="3200" dirty="0"/>
+                        <a:t>3</a:t>
+                      </a:r>
+                      <a:endParaRPr lang="ko-KR" altLang="en-US" sz="3200" dirty="0"/>
+                    </a:p>
+                  </a:txBody>
+                  <a:tcPr anchor="ctr">
+                    <a:solidFill>
+                      <a:schemeClr val="tx2">
+                        <a:lumMod val="20000"/>
+                        <a:lumOff val="80000"/>
+                      </a:schemeClr>
+                    </a:solidFill>
+                  </a:tcPr>
+                </a:tc>
+                <a:tc>
+                  <a:txBody>
+                    <a:bodyPr/>
+                    <a:lstStyle/>
+                    <a:p>
+                      <a:pPr algn="ctr" latinLnBrk="1"/>
+                      <a:r>
+                        <a:rPr lang="ko-KR" altLang="en-US" sz="2400" dirty="0"/>
+                        <a:t>각종 영양소 입력 필드</a:t>
+                      </a:r>
+                    </a:p>
+                  </a:txBody>
+                  <a:tcPr anchor="ctr"/>
+                </a:tc>
+                <a:extLst>
+                  <a:ext uri="{0D108BD9-81ED-4DB2-BD59-A6C34878D82A}">
+                    <a16:rowId xmlns:a16="http://schemas.microsoft.com/office/drawing/2014/main" val="111030149"/>
+                  </a:ext>
+                </a:extLst>
+              </a:tr>
+              <a:tr h="1085850">
+                <a:tc>
+                  <a:txBody>
+                    <a:bodyPr/>
+                    <a:lstStyle/>
+                    <a:p>
+                      <a:pPr algn="ctr" latinLnBrk="1"/>
+                      <a:r>
+                        <a:rPr lang="en-US" altLang="ko-KR" sz="3200" dirty="0"/>
+                        <a:t>4</a:t>
+                      </a:r>
+                      <a:endParaRPr lang="ko-KR" altLang="en-US" sz="3200" dirty="0"/>
+                    </a:p>
+                  </a:txBody>
+                  <a:tcPr anchor="ctr">
+                    <a:solidFill>
+                      <a:schemeClr val="tx2">
+                        <a:lumMod val="20000"/>
+                        <a:lumOff val="80000"/>
+                      </a:schemeClr>
+                    </a:solidFill>
+                  </a:tcPr>
+                </a:tc>
+                <a:tc>
+                  <a:txBody>
+                    <a:bodyPr/>
+                    <a:lstStyle/>
+                    <a:p>
+                      <a:pPr algn="ctr" latinLnBrk="1"/>
+                      <a:r>
+                        <a:rPr lang="ko-KR" altLang="en-US" sz="2400" dirty="0"/>
+                        <a:t>분석 결과 보기</a:t>
+                      </a:r>
+                      <a:r>
+                        <a:rPr lang="en-US" altLang="ko-KR" sz="2400" dirty="0"/>
+                        <a:t> </a:t>
+                      </a:r>
+                      <a:r>
+                        <a:rPr lang="ko-KR" altLang="en-US" sz="2400" dirty="0"/>
+                        <a:t>클릭 시 결과 페이지로 이동</a:t>
+                      </a:r>
+                    </a:p>
+                  </a:txBody>
+                  <a:tcPr anchor="ctr"/>
+                </a:tc>
+                <a:extLst>
+                  <a:ext uri="{0D108BD9-81ED-4DB2-BD59-A6C34878D82A}">
+                    <a16:rowId xmlns:a16="http://schemas.microsoft.com/office/drawing/2014/main" val="1548616452"/>
+                  </a:ext>
+                </a:extLst>
+              </a:tr>
+            </a:tbl>
+          </a:graphicData>
+        </a:graphic>
+      </p:graphicFrame>
     </p:spTree>
     <p:extLst>
       <p:ext uri="{BB962C8B-B14F-4D97-AF65-F5344CB8AC3E}">
@@ -4771,7 +5682,13 @@
           <p:cNvGraphicFramePr>
             <a:graphicFrameLocks noGrp="1"/>
           </p:cNvGraphicFramePr>
-          <p:nvPr/>
+          <p:nvPr>
+            <p:extLst>
+              <p:ext uri="{D42A27DB-BD31-4B8C-83A1-F6EECF244321}">
+                <p14:modId xmlns:p14="http://schemas.microsoft.com/office/powerpoint/2010/main" val="3175764760"/>
+              </p:ext>
+            </p:extLst>
+          </p:nvPr>
         </p:nvGraphicFramePr>
         <p:xfrm>
           <a:off x="533399" y="304800"/>
@@ -4892,8 +5809,13 @@
                       <a:pPr algn="ctr" latinLnBrk="1"/>
                       <a:r>
                         <a:rPr lang="ko-KR" altLang="en-US" sz="2800" dirty="0"/>
-                        <a:t>메인 페이지</a:t>
-                      </a:r>
+                        <a:t>결과 페이지 </a:t>
+                      </a:r>
+                      <a:r>
+                        <a:rPr lang="en-US" altLang="ko-KR" sz="2800" dirty="0"/>
+                        <a:t>- 1</a:t>
+                      </a:r>
+                      <a:endParaRPr lang="ko-KR" altLang="en-US" sz="2800" dirty="0"/>
                     </a:p>
                   </a:txBody>
                   <a:tcPr anchor="ctr"/>
@@ -4932,7 +5854,7 @@
                       <a:pPr algn="ctr" latinLnBrk="1"/>
                       <a:r>
                         <a:rPr lang="en-US" altLang="ko-KR" sz="2800" dirty="0"/>
-                        <a:t>01-1</a:t>
+                        <a:t>03-1</a:t>
                       </a:r>
                       <a:endParaRPr lang="ko-KR" altLang="en-US" sz="2800" dirty="0"/>
                     </a:p>
@@ -4975,7 +5897,7 @@
                       <a:pPr algn="ctr" latinLnBrk="1"/>
                       <a:r>
                         <a:rPr lang="ko-KR" altLang="en-US" sz="2800" dirty="0"/>
-                        <a:t>메인 페이지</a:t>
+                        <a:t>결과 페이지</a:t>
                       </a:r>
                     </a:p>
                   </a:txBody>
@@ -5028,222 +5950,6 @@
                 <a:extLst>
                   <a:ext uri="{0D108BD9-81ED-4DB2-BD59-A6C34878D82A}">
                     <a16:rowId xmlns:a16="http://schemas.microsoft.com/office/drawing/2014/main" val="2713347330"/>
-                  </a:ext>
-                </a:extLst>
-              </a:tr>
-            </a:tbl>
-          </a:graphicData>
-        </a:graphic>
-      </p:graphicFrame>
-      <p:graphicFrame>
-        <p:nvGraphicFramePr>
-          <p:cNvPr id="12" name="표 11">
-            <a:extLst>
-              <a:ext uri="{FF2B5EF4-FFF2-40B4-BE49-F238E27FC236}">
-                <a16:creationId xmlns:a16="http://schemas.microsoft.com/office/drawing/2014/main" id="{9E8606B9-8140-B325-7170-CEB9D897FC3A}"/>
-              </a:ext>
-            </a:extLst>
-          </p:cNvPr>
-          <p:cNvGraphicFramePr>
-            <a:graphicFrameLocks noGrp="1"/>
-          </p:cNvGraphicFramePr>
-          <p:nvPr/>
-        </p:nvGraphicFramePr>
-        <p:xfrm>
-          <a:off x="18490773" y="5547522"/>
-          <a:ext cx="5386602" cy="4343400"/>
-        </p:xfrm>
-        <a:graphic>
-          <a:graphicData uri="http://schemas.openxmlformats.org/drawingml/2006/table">
-            <a:tbl>
-              <a:tblPr firstRow="1" bandRow="1">
-                <a:tableStyleId>{5940675A-B579-460E-94D1-54222C63F5DA}</a:tableStyleId>
-              </a:tblPr>
-              <a:tblGrid>
-                <a:gridCol w="1143001">
-                  <a:extLst>
-                    <a:ext uri="{9D8B030D-6E8A-4147-A177-3AD203B41FA5}">
-                      <a16:colId xmlns:a16="http://schemas.microsoft.com/office/drawing/2014/main" val="3099305099"/>
-                    </a:ext>
-                  </a:extLst>
-                </a:gridCol>
-                <a:gridCol w="4243601">
-                  <a:extLst>
-                    <a:ext uri="{9D8B030D-6E8A-4147-A177-3AD203B41FA5}">
-                      <a16:colId xmlns:a16="http://schemas.microsoft.com/office/drawing/2014/main" val="1372832432"/>
-                    </a:ext>
-                  </a:extLst>
-                </a:gridCol>
-              </a:tblGrid>
-              <a:tr h="1085850">
-                <a:tc>
-                  <a:txBody>
-                    <a:bodyPr/>
-                    <a:lstStyle/>
-                    <a:p>
-                      <a:pPr algn="ctr" latinLnBrk="1"/>
-                      <a:r>
-                        <a:rPr lang="en-US" altLang="ko-KR" sz="3200" dirty="0"/>
-                        <a:t>1</a:t>
-                      </a:r>
-                      <a:endParaRPr lang="ko-KR" altLang="en-US" sz="3200" dirty="0"/>
-                    </a:p>
-                  </a:txBody>
-                  <a:tcPr anchor="ctr">
-                    <a:solidFill>
-                      <a:schemeClr val="tx2">
-                        <a:lumMod val="20000"/>
-                        <a:lumOff val="80000"/>
-                      </a:schemeClr>
-                    </a:solidFill>
-                  </a:tcPr>
-                </a:tc>
-                <a:tc>
-                  <a:txBody>
-                    <a:bodyPr/>
-                    <a:lstStyle/>
-                    <a:p>
-                      <a:pPr algn="ctr" latinLnBrk="1"/>
-                      <a:r>
-                        <a:rPr lang="ko-KR" altLang="en-US" sz="3200" dirty="0"/>
-                        <a:t>제목</a:t>
-                      </a:r>
-                    </a:p>
-                  </a:txBody>
-                  <a:tcPr anchor="ctr"/>
-                </a:tc>
-                <a:extLst>
-                  <a:ext uri="{0D108BD9-81ED-4DB2-BD59-A6C34878D82A}">
-                    <a16:rowId xmlns:a16="http://schemas.microsoft.com/office/drawing/2014/main" val="1335438258"/>
-                  </a:ext>
-                </a:extLst>
-              </a:tr>
-              <a:tr h="1085850">
-                <a:tc>
-                  <a:txBody>
-                    <a:bodyPr/>
-                    <a:lstStyle/>
-                    <a:p>
-                      <a:pPr algn="ctr" latinLnBrk="1"/>
-                      <a:r>
-                        <a:rPr lang="en-US" altLang="ko-KR" sz="3200" dirty="0"/>
-                        <a:t>2</a:t>
-                      </a:r>
-                      <a:endParaRPr lang="ko-KR" altLang="en-US" sz="3200" dirty="0"/>
-                    </a:p>
-                  </a:txBody>
-                  <a:tcPr anchor="ctr">
-                    <a:solidFill>
-                      <a:schemeClr val="tx2">
-                        <a:lumMod val="20000"/>
-                        <a:lumOff val="80000"/>
-                      </a:schemeClr>
-                    </a:solidFill>
-                  </a:tcPr>
-                </a:tc>
-                <a:tc>
-                  <a:txBody>
-                    <a:bodyPr/>
-                    <a:lstStyle/>
-                    <a:p>
-                      <a:pPr algn="ctr" latinLnBrk="1"/>
-                      <a:r>
-                        <a:rPr lang="ko-KR" altLang="en-US" sz="3200" dirty="0"/>
-                        <a:t>로그인 탭</a:t>
-                      </a:r>
-                    </a:p>
-                  </a:txBody>
-                  <a:tcPr anchor="ctr"/>
-                </a:tc>
-                <a:extLst>
-                  <a:ext uri="{0D108BD9-81ED-4DB2-BD59-A6C34878D82A}">
-                    <a16:rowId xmlns:a16="http://schemas.microsoft.com/office/drawing/2014/main" val="2820470733"/>
-                  </a:ext>
-                </a:extLst>
-              </a:tr>
-              <a:tr h="1085850">
-                <a:tc>
-                  <a:txBody>
-                    <a:bodyPr/>
-                    <a:lstStyle/>
-                    <a:p>
-                      <a:pPr algn="ctr" latinLnBrk="1"/>
-                      <a:r>
-                        <a:rPr lang="en-US" altLang="ko-KR" sz="3200" dirty="0"/>
-                        <a:t>3</a:t>
-                      </a:r>
-                      <a:endParaRPr lang="ko-KR" altLang="en-US" sz="3200" dirty="0"/>
-                    </a:p>
-                  </a:txBody>
-                  <a:tcPr anchor="ctr">
-                    <a:solidFill>
-                      <a:schemeClr val="tx2">
-                        <a:lumMod val="20000"/>
-                        <a:lumOff val="80000"/>
-                      </a:schemeClr>
-                    </a:solidFill>
-                  </a:tcPr>
-                </a:tc>
-                <a:tc>
-                  <a:txBody>
-                    <a:bodyPr/>
-                    <a:lstStyle/>
-                    <a:p>
-                      <a:pPr algn="ctr" latinLnBrk="1"/>
-                      <a:r>
-                        <a:rPr lang="ko-KR" altLang="en-US" sz="3200" dirty="0"/>
-                        <a:t>회원가입 탭</a:t>
-                      </a:r>
-                    </a:p>
-                  </a:txBody>
-                  <a:tcPr anchor="ctr"/>
-                </a:tc>
-                <a:extLst>
-                  <a:ext uri="{0D108BD9-81ED-4DB2-BD59-A6C34878D82A}">
-                    <a16:rowId xmlns:a16="http://schemas.microsoft.com/office/drawing/2014/main" val="111030149"/>
-                  </a:ext>
-                </a:extLst>
-              </a:tr>
-              <a:tr h="1085850">
-                <a:tc>
-                  <a:txBody>
-                    <a:bodyPr/>
-                    <a:lstStyle/>
-                    <a:p>
-                      <a:pPr algn="ctr" latinLnBrk="1"/>
-                      <a:r>
-                        <a:rPr lang="en-US" altLang="ko-KR" sz="3200" dirty="0"/>
-                        <a:t>4</a:t>
-                      </a:r>
-                      <a:endParaRPr lang="ko-KR" altLang="en-US" sz="3200" dirty="0"/>
-                    </a:p>
-                  </a:txBody>
-                  <a:tcPr anchor="ctr">
-                    <a:solidFill>
-                      <a:schemeClr val="tx2">
-                        <a:lumMod val="20000"/>
-                        <a:lumOff val="80000"/>
-                      </a:schemeClr>
-                    </a:solidFill>
-                  </a:tcPr>
-                </a:tc>
-                <a:tc>
-                  <a:txBody>
-                    <a:bodyPr/>
-                    <a:lstStyle/>
-                    <a:p>
-                      <a:pPr algn="ctr" latinLnBrk="1"/>
-                      <a:r>
-                        <a:rPr lang="ko-KR" altLang="en-US" sz="3200" dirty="0"/>
-                        <a:t>로그인 버튼</a:t>
-                      </a:r>
-                    </a:p>
-                  </a:txBody>
-                  <a:tcPr anchor="ctr"/>
-                </a:tc>
-                <a:extLst>
-                  <a:ext uri="{0D108BD9-81ED-4DB2-BD59-A6C34878D82A}">
-                    <a16:rowId xmlns:a16="http://schemas.microsoft.com/office/drawing/2014/main" val="1548616452"/>
                   </a:ext>
                 </a:extLst>
               </a:tr>
@@ -5287,6 +5993,379 @@
           </a:prstGeom>
         </p:spPr>
       </p:pic>
+      <p:sp>
+        <p:nvSpPr>
+          <p:cNvPr id="2" name="타원 1">
+            <a:extLst>
+              <a:ext uri="{FF2B5EF4-FFF2-40B4-BE49-F238E27FC236}">
+                <a16:creationId xmlns:a16="http://schemas.microsoft.com/office/drawing/2014/main" id="{9D9DE9E5-7529-8DD2-A483-69B96EC06D5E}"/>
+              </a:ext>
+            </a:extLst>
+          </p:cNvPr>
+          <p:cNvSpPr/>
+          <p:nvPr/>
+        </p:nvSpPr>
+        <p:spPr>
+          <a:xfrm>
+            <a:off x="3048000" y="2895600"/>
+            <a:ext cx="762000" cy="762000"/>
+          </a:xfrm>
+          <a:prstGeom prst="ellipse">
+            <a:avLst/>
+          </a:prstGeom>
+        </p:spPr>
+        <p:style>
+          <a:lnRef idx="3">
+            <a:schemeClr val="lt1"/>
+          </a:lnRef>
+          <a:fillRef idx="1">
+            <a:schemeClr val="accent6"/>
+          </a:fillRef>
+          <a:effectRef idx="1">
+            <a:schemeClr val="accent6"/>
+          </a:effectRef>
+          <a:fontRef idx="minor">
+            <a:schemeClr val="lt1"/>
+          </a:fontRef>
+        </p:style>
+        <p:txBody>
+          <a:bodyPr rtlCol="0" anchor="ctr"/>
+          <a:lstStyle/>
+          <a:p>
+            <a:pPr algn="ctr"/>
+            <a:r>
+              <a:rPr lang="en-US" altLang="ko-KR" sz="4800" dirty="0"/>
+              <a:t>1</a:t>
+            </a:r>
+            <a:endParaRPr lang="ko-KR" altLang="en-US" sz="4800" dirty="0"/>
+          </a:p>
+        </p:txBody>
+      </p:sp>
+      <p:sp>
+        <p:nvSpPr>
+          <p:cNvPr id="4" name="타원 3">
+            <a:extLst>
+              <a:ext uri="{FF2B5EF4-FFF2-40B4-BE49-F238E27FC236}">
+                <a16:creationId xmlns:a16="http://schemas.microsoft.com/office/drawing/2014/main" id="{93870B15-3E28-E2F1-6A75-A69259560285}"/>
+              </a:ext>
+            </a:extLst>
+          </p:cNvPr>
+          <p:cNvSpPr/>
+          <p:nvPr/>
+        </p:nvSpPr>
+        <p:spPr>
+          <a:xfrm>
+            <a:off x="3064474" y="4375171"/>
+            <a:ext cx="753763" cy="762000"/>
+          </a:xfrm>
+          <a:prstGeom prst="ellipse">
+            <a:avLst/>
+          </a:prstGeom>
+        </p:spPr>
+        <p:style>
+          <a:lnRef idx="3">
+            <a:schemeClr val="lt1"/>
+          </a:lnRef>
+          <a:fillRef idx="1">
+            <a:schemeClr val="accent6"/>
+          </a:fillRef>
+          <a:effectRef idx="1">
+            <a:schemeClr val="accent6"/>
+          </a:effectRef>
+          <a:fontRef idx="minor">
+            <a:schemeClr val="lt1"/>
+          </a:fontRef>
+        </p:style>
+        <p:txBody>
+          <a:bodyPr rtlCol="0" anchor="ctr"/>
+          <a:lstStyle/>
+          <a:p>
+            <a:pPr algn="ctr"/>
+            <a:r>
+              <a:rPr lang="en-US" altLang="ko-KR" sz="4800" dirty="0"/>
+              <a:t>2</a:t>
+            </a:r>
+            <a:endParaRPr lang="ko-KR" altLang="en-US" sz="4800" dirty="0"/>
+          </a:p>
+        </p:txBody>
+      </p:sp>
+      <p:sp>
+        <p:nvSpPr>
+          <p:cNvPr id="5" name="타원 4">
+            <a:extLst>
+              <a:ext uri="{FF2B5EF4-FFF2-40B4-BE49-F238E27FC236}">
+                <a16:creationId xmlns:a16="http://schemas.microsoft.com/office/drawing/2014/main" id="{69C132FB-4DD0-5D3C-3A35-A99430E47F19}"/>
+              </a:ext>
+            </a:extLst>
+          </p:cNvPr>
+          <p:cNvSpPr/>
+          <p:nvPr/>
+        </p:nvSpPr>
+        <p:spPr>
+          <a:xfrm>
+            <a:off x="3089188" y="6522086"/>
+            <a:ext cx="762000" cy="762000"/>
+          </a:xfrm>
+          <a:prstGeom prst="ellipse">
+            <a:avLst/>
+          </a:prstGeom>
+        </p:spPr>
+        <p:style>
+          <a:lnRef idx="3">
+            <a:schemeClr val="lt1"/>
+          </a:lnRef>
+          <a:fillRef idx="1">
+            <a:schemeClr val="accent6"/>
+          </a:fillRef>
+          <a:effectRef idx="1">
+            <a:schemeClr val="accent6"/>
+          </a:effectRef>
+          <a:fontRef idx="minor">
+            <a:schemeClr val="lt1"/>
+          </a:fontRef>
+        </p:style>
+        <p:txBody>
+          <a:bodyPr rtlCol="0" anchor="ctr"/>
+          <a:lstStyle/>
+          <a:p>
+            <a:pPr algn="ctr"/>
+            <a:r>
+              <a:rPr lang="en-US" altLang="ko-KR" sz="4800" dirty="0"/>
+              <a:t>3</a:t>
+            </a:r>
+            <a:endParaRPr lang="ko-KR" altLang="en-US" sz="4800" dirty="0"/>
+          </a:p>
+        </p:txBody>
+      </p:sp>
+      <p:graphicFrame>
+        <p:nvGraphicFramePr>
+          <p:cNvPr id="8" name="표 7">
+            <a:extLst>
+              <a:ext uri="{FF2B5EF4-FFF2-40B4-BE49-F238E27FC236}">
+                <a16:creationId xmlns:a16="http://schemas.microsoft.com/office/drawing/2014/main" id="{F0504476-C174-14B7-956B-7D88D6D20BB5}"/>
+              </a:ext>
+            </a:extLst>
+          </p:cNvPr>
+          <p:cNvGraphicFramePr>
+            <a:graphicFrameLocks noGrp="1"/>
+          </p:cNvGraphicFramePr>
+          <p:nvPr>
+            <p:extLst>
+              <p:ext uri="{D42A27DB-BD31-4B8C-83A1-F6EECF244321}">
+                <p14:modId xmlns:p14="http://schemas.microsoft.com/office/powerpoint/2010/main" val="1075316952"/>
+              </p:ext>
+            </p:extLst>
+          </p:nvPr>
+        </p:nvGraphicFramePr>
+        <p:xfrm>
+          <a:off x="18490773" y="5547522"/>
+          <a:ext cx="5386602" cy="4343400"/>
+        </p:xfrm>
+        <a:graphic>
+          <a:graphicData uri="http://schemas.openxmlformats.org/drawingml/2006/table">
+            <a:tbl>
+              <a:tblPr firstRow="1" bandRow="1">
+                <a:tableStyleId>{5940675A-B579-460E-94D1-54222C63F5DA}</a:tableStyleId>
+              </a:tblPr>
+              <a:tblGrid>
+                <a:gridCol w="1143001">
+                  <a:extLst>
+                    <a:ext uri="{9D8B030D-6E8A-4147-A177-3AD203B41FA5}">
+                      <a16:colId xmlns:a16="http://schemas.microsoft.com/office/drawing/2014/main" val="3099305099"/>
+                    </a:ext>
+                  </a:extLst>
+                </a:gridCol>
+                <a:gridCol w="4243601">
+                  <a:extLst>
+                    <a:ext uri="{9D8B030D-6E8A-4147-A177-3AD203B41FA5}">
+                      <a16:colId xmlns:a16="http://schemas.microsoft.com/office/drawing/2014/main" val="1372832432"/>
+                    </a:ext>
+                  </a:extLst>
+                </a:gridCol>
+              </a:tblGrid>
+              <a:tr h="1085850">
+                <a:tc>
+                  <a:txBody>
+                    <a:bodyPr/>
+                    <a:lstStyle/>
+                    <a:p>
+                      <a:pPr algn="ctr" latinLnBrk="1"/>
+                      <a:r>
+                        <a:rPr lang="en-US" altLang="ko-KR" sz="3200" dirty="0"/>
+                        <a:t>No.</a:t>
+                      </a:r>
+                      <a:endParaRPr lang="ko-KR" altLang="en-US" sz="3200" dirty="0"/>
+                    </a:p>
+                  </a:txBody>
+                  <a:tcPr anchor="ctr">
+                    <a:solidFill>
+                      <a:schemeClr val="tx2">
+                        <a:lumMod val="20000"/>
+                        <a:lumOff val="80000"/>
+                      </a:schemeClr>
+                    </a:solidFill>
+                  </a:tcPr>
+                </a:tc>
+                <a:tc>
+                  <a:txBody>
+                    <a:bodyPr/>
+                    <a:lstStyle/>
+                    <a:p>
+                      <a:pPr algn="ctr" latinLnBrk="1"/>
+                      <a:r>
+                        <a:rPr lang="ko-KR" altLang="en-US" sz="3200" dirty="0"/>
+                        <a:t>설명</a:t>
+                      </a:r>
+                    </a:p>
+                  </a:txBody>
+                  <a:tcPr anchor="ctr">
+                    <a:solidFill>
+                      <a:schemeClr val="tx2">
+                        <a:lumMod val="20000"/>
+                        <a:lumOff val="80000"/>
+                      </a:schemeClr>
+                    </a:solidFill>
+                  </a:tcPr>
+                </a:tc>
+                <a:extLst>
+                  <a:ext uri="{0D108BD9-81ED-4DB2-BD59-A6C34878D82A}">
+                    <a16:rowId xmlns:a16="http://schemas.microsoft.com/office/drawing/2014/main" val="555083959"/>
+                  </a:ext>
+                </a:extLst>
+              </a:tr>
+              <a:tr h="1085850">
+                <a:tc>
+                  <a:txBody>
+                    <a:bodyPr/>
+                    <a:lstStyle/>
+                    <a:p>
+                      <a:pPr algn="ctr" latinLnBrk="1"/>
+                      <a:r>
+                        <a:rPr lang="en-US" altLang="ko-KR" sz="3200" dirty="0"/>
+                        <a:t>1</a:t>
+                      </a:r>
+                      <a:endParaRPr lang="ko-KR" altLang="en-US" sz="3200" dirty="0"/>
+                    </a:p>
+                  </a:txBody>
+                  <a:tcPr anchor="ctr">
+                    <a:solidFill>
+                      <a:schemeClr val="tx2">
+                        <a:lumMod val="20000"/>
+                        <a:lumOff val="80000"/>
+                      </a:schemeClr>
+                    </a:solidFill>
+                  </a:tcPr>
+                </a:tc>
+                <a:tc>
+                  <a:txBody>
+                    <a:bodyPr/>
+                    <a:lstStyle/>
+                    <a:p>
+                      <a:pPr algn="ctr" latinLnBrk="1"/>
+                      <a:r>
+                        <a:rPr lang="ko-KR" altLang="en-US" sz="2400" dirty="0"/>
+                        <a:t>다시 입력하기 클릭 시 초기화면 이동</a:t>
+                      </a:r>
+                    </a:p>
+                  </a:txBody>
+                  <a:tcPr anchor="ctr"/>
+                </a:tc>
+                <a:extLst>
+                  <a:ext uri="{0D108BD9-81ED-4DB2-BD59-A6C34878D82A}">
+                    <a16:rowId xmlns:a16="http://schemas.microsoft.com/office/drawing/2014/main" val="1335438258"/>
+                  </a:ext>
+                </a:extLst>
+              </a:tr>
+              <a:tr h="1085850">
+                <a:tc>
+                  <a:txBody>
+                    <a:bodyPr/>
+                    <a:lstStyle/>
+                    <a:p>
+                      <a:pPr algn="ctr" latinLnBrk="1"/>
+                      <a:r>
+                        <a:rPr lang="en-US" altLang="ko-KR" sz="3200" dirty="0"/>
+                        <a:t>2</a:t>
+                      </a:r>
+                      <a:endParaRPr lang="ko-KR" altLang="en-US" sz="3200" dirty="0"/>
+                    </a:p>
+                  </a:txBody>
+                  <a:tcPr anchor="ctr">
+                    <a:solidFill>
+                      <a:schemeClr val="tx2">
+                        <a:lumMod val="20000"/>
+                        <a:lumOff val="80000"/>
+                      </a:schemeClr>
+                    </a:solidFill>
+                  </a:tcPr>
+                </a:tc>
+                <a:tc>
+                  <a:txBody>
+                    <a:bodyPr/>
+                    <a:lstStyle/>
+                    <a:p>
+                      <a:pPr algn="ctr" latinLnBrk="1"/>
+                      <a:r>
+                        <a:rPr lang="ko-KR" altLang="en-US" sz="2400" dirty="0"/>
+                        <a:t>유형에 맞는 식습관 유형 결과 카드 출력</a:t>
+                      </a:r>
+                    </a:p>
+                  </a:txBody>
+                  <a:tcPr anchor="ctr"/>
+                </a:tc>
+                <a:extLst>
+                  <a:ext uri="{0D108BD9-81ED-4DB2-BD59-A6C34878D82A}">
+                    <a16:rowId xmlns:a16="http://schemas.microsoft.com/office/drawing/2014/main" val="2820470733"/>
+                  </a:ext>
+                </a:extLst>
+              </a:tr>
+              <a:tr h="1085850">
+                <a:tc>
+                  <a:txBody>
+                    <a:bodyPr/>
+                    <a:lstStyle/>
+                    <a:p>
+                      <a:pPr algn="ctr" latinLnBrk="1"/>
+                      <a:r>
+                        <a:rPr lang="en-US" altLang="ko-KR" sz="3200" dirty="0"/>
+                        <a:t>3</a:t>
+                      </a:r>
+                      <a:endParaRPr lang="ko-KR" altLang="en-US" sz="3200" dirty="0"/>
+                    </a:p>
+                  </a:txBody>
+                  <a:tcPr anchor="ctr">
+                    <a:solidFill>
+                      <a:schemeClr val="tx2">
+                        <a:lumMod val="20000"/>
+                        <a:lumOff val="80000"/>
+                      </a:schemeClr>
+                    </a:solidFill>
+                  </a:tcPr>
+                </a:tc>
+                <a:tc>
+                  <a:txBody>
+                    <a:bodyPr/>
+                    <a:lstStyle/>
+                    <a:p>
+                      <a:pPr algn="ctr" latinLnBrk="1"/>
+                      <a:r>
+                        <a:rPr lang="ko-KR" altLang="en-US" sz="2400" dirty="0"/>
+                        <a:t>각종 영양소 섭취 현황을 진행 바 형태와 수치로 출력</a:t>
+                      </a:r>
+                    </a:p>
+                  </a:txBody>
+                  <a:tcPr anchor="ctr"/>
+                </a:tc>
+                <a:extLst>
+                  <a:ext uri="{0D108BD9-81ED-4DB2-BD59-A6C34878D82A}">
+                    <a16:rowId xmlns:a16="http://schemas.microsoft.com/office/drawing/2014/main" val="111030149"/>
+                  </a:ext>
+                </a:extLst>
+              </a:tr>
+            </a:tbl>
+          </a:graphicData>
+        </a:graphic>
+      </p:graphicFrame>
     </p:spTree>
     <p:extLst>
       <p:ext uri="{BB962C8B-B14F-4D97-AF65-F5344CB8AC3E}">
@@ -5343,7 +6422,13 @@
           <p:cNvGraphicFramePr>
             <a:graphicFrameLocks noGrp="1"/>
           </p:cNvGraphicFramePr>
-          <p:nvPr/>
+          <p:nvPr>
+            <p:extLst>
+              <p:ext uri="{D42A27DB-BD31-4B8C-83A1-F6EECF244321}">
+                <p14:modId xmlns:p14="http://schemas.microsoft.com/office/powerpoint/2010/main" val="4040171196"/>
+              </p:ext>
+            </p:extLst>
+          </p:nvPr>
         </p:nvGraphicFramePr>
         <p:xfrm>
           <a:off x="533399" y="304800"/>
@@ -5464,8 +6549,13 @@
                       <a:pPr algn="ctr" latinLnBrk="1"/>
                       <a:r>
                         <a:rPr lang="ko-KR" altLang="en-US" sz="2800" dirty="0"/>
-                        <a:t>메인 페이지</a:t>
-                      </a:r>
+                        <a:t>결과 페이지 </a:t>
+                      </a:r>
+                      <a:r>
+                        <a:rPr lang="en-US" altLang="ko-KR" sz="2800" dirty="0"/>
+                        <a:t>- 2</a:t>
+                      </a:r>
+                      <a:endParaRPr lang="ko-KR" altLang="en-US" sz="2800" dirty="0"/>
                     </a:p>
                   </a:txBody>
                   <a:tcPr anchor="ctr"/>
@@ -5504,7 +6594,7 @@
                       <a:pPr algn="ctr" latinLnBrk="1"/>
                       <a:r>
                         <a:rPr lang="en-US" altLang="ko-KR" sz="2800" dirty="0"/>
-                        <a:t>01-1</a:t>
+                        <a:t>03-1</a:t>
                       </a:r>
                       <a:endParaRPr lang="ko-KR" altLang="en-US" sz="2800" dirty="0"/>
                     </a:p>
@@ -5547,7 +6637,7 @@
                       <a:pPr algn="ctr" latinLnBrk="1"/>
                       <a:r>
                         <a:rPr lang="ko-KR" altLang="en-US" sz="2800" dirty="0"/>
-                        <a:t>메인 페이지</a:t>
+                        <a:t>결과 페이지</a:t>
                       </a:r>
                     </a:p>
                   </a:txBody>
@@ -5600,222 +6690,6 @@
                 <a:extLst>
                   <a:ext uri="{0D108BD9-81ED-4DB2-BD59-A6C34878D82A}">
                     <a16:rowId xmlns:a16="http://schemas.microsoft.com/office/drawing/2014/main" val="2713347330"/>
-                  </a:ext>
-                </a:extLst>
-              </a:tr>
-            </a:tbl>
-          </a:graphicData>
-        </a:graphic>
-      </p:graphicFrame>
-      <p:graphicFrame>
-        <p:nvGraphicFramePr>
-          <p:cNvPr id="12" name="표 11">
-            <a:extLst>
-              <a:ext uri="{FF2B5EF4-FFF2-40B4-BE49-F238E27FC236}">
-                <a16:creationId xmlns:a16="http://schemas.microsoft.com/office/drawing/2014/main" id="{F7D999C8-94D0-A902-4A5F-49E2BE9AD104}"/>
-              </a:ext>
-            </a:extLst>
-          </p:cNvPr>
-          <p:cNvGraphicFramePr>
-            <a:graphicFrameLocks noGrp="1"/>
-          </p:cNvGraphicFramePr>
-          <p:nvPr/>
-        </p:nvGraphicFramePr>
-        <p:xfrm>
-          <a:off x="18490773" y="5547522"/>
-          <a:ext cx="5386602" cy="4343400"/>
-        </p:xfrm>
-        <a:graphic>
-          <a:graphicData uri="http://schemas.openxmlformats.org/drawingml/2006/table">
-            <a:tbl>
-              <a:tblPr firstRow="1" bandRow="1">
-                <a:tableStyleId>{5940675A-B579-460E-94D1-54222C63F5DA}</a:tableStyleId>
-              </a:tblPr>
-              <a:tblGrid>
-                <a:gridCol w="1143001">
-                  <a:extLst>
-                    <a:ext uri="{9D8B030D-6E8A-4147-A177-3AD203B41FA5}">
-                      <a16:colId xmlns:a16="http://schemas.microsoft.com/office/drawing/2014/main" val="3099305099"/>
-                    </a:ext>
-                  </a:extLst>
-                </a:gridCol>
-                <a:gridCol w="4243601">
-                  <a:extLst>
-                    <a:ext uri="{9D8B030D-6E8A-4147-A177-3AD203B41FA5}">
-                      <a16:colId xmlns:a16="http://schemas.microsoft.com/office/drawing/2014/main" val="1372832432"/>
-                    </a:ext>
-                  </a:extLst>
-                </a:gridCol>
-              </a:tblGrid>
-              <a:tr h="1085850">
-                <a:tc>
-                  <a:txBody>
-                    <a:bodyPr/>
-                    <a:lstStyle/>
-                    <a:p>
-                      <a:pPr algn="ctr" latinLnBrk="1"/>
-                      <a:r>
-                        <a:rPr lang="en-US" altLang="ko-KR" sz="3200" dirty="0"/>
-                        <a:t>1</a:t>
-                      </a:r>
-                      <a:endParaRPr lang="ko-KR" altLang="en-US" sz="3200" dirty="0"/>
-                    </a:p>
-                  </a:txBody>
-                  <a:tcPr anchor="ctr">
-                    <a:solidFill>
-                      <a:schemeClr val="tx2">
-                        <a:lumMod val="20000"/>
-                        <a:lumOff val="80000"/>
-                      </a:schemeClr>
-                    </a:solidFill>
-                  </a:tcPr>
-                </a:tc>
-                <a:tc>
-                  <a:txBody>
-                    <a:bodyPr/>
-                    <a:lstStyle/>
-                    <a:p>
-                      <a:pPr algn="ctr" latinLnBrk="1"/>
-                      <a:r>
-                        <a:rPr lang="ko-KR" altLang="en-US" sz="3200" dirty="0"/>
-                        <a:t>제목</a:t>
-                      </a:r>
-                    </a:p>
-                  </a:txBody>
-                  <a:tcPr anchor="ctr"/>
-                </a:tc>
-                <a:extLst>
-                  <a:ext uri="{0D108BD9-81ED-4DB2-BD59-A6C34878D82A}">
-                    <a16:rowId xmlns:a16="http://schemas.microsoft.com/office/drawing/2014/main" val="1335438258"/>
-                  </a:ext>
-                </a:extLst>
-              </a:tr>
-              <a:tr h="1085850">
-                <a:tc>
-                  <a:txBody>
-                    <a:bodyPr/>
-                    <a:lstStyle/>
-                    <a:p>
-                      <a:pPr algn="ctr" latinLnBrk="1"/>
-                      <a:r>
-                        <a:rPr lang="en-US" altLang="ko-KR" sz="3200" dirty="0"/>
-                        <a:t>2</a:t>
-                      </a:r>
-                      <a:endParaRPr lang="ko-KR" altLang="en-US" sz="3200" dirty="0"/>
-                    </a:p>
-                  </a:txBody>
-                  <a:tcPr anchor="ctr">
-                    <a:solidFill>
-                      <a:schemeClr val="tx2">
-                        <a:lumMod val="20000"/>
-                        <a:lumOff val="80000"/>
-                      </a:schemeClr>
-                    </a:solidFill>
-                  </a:tcPr>
-                </a:tc>
-                <a:tc>
-                  <a:txBody>
-                    <a:bodyPr/>
-                    <a:lstStyle/>
-                    <a:p>
-                      <a:pPr algn="ctr" latinLnBrk="1"/>
-                      <a:r>
-                        <a:rPr lang="ko-KR" altLang="en-US" sz="3200" dirty="0"/>
-                        <a:t>로그인 탭</a:t>
-                      </a:r>
-                    </a:p>
-                  </a:txBody>
-                  <a:tcPr anchor="ctr"/>
-                </a:tc>
-                <a:extLst>
-                  <a:ext uri="{0D108BD9-81ED-4DB2-BD59-A6C34878D82A}">
-                    <a16:rowId xmlns:a16="http://schemas.microsoft.com/office/drawing/2014/main" val="2820470733"/>
-                  </a:ext>
-                </a:extLst>
-              </a:tr>
-              <a:tr h="1085850">
-                <a:tc>
-                  <a:txBody>
-                    <a:bodyPr/>
-                    <a:lstStyle/>
-                    <a:p>
-                      <a:pPr algn="ctr" latinLnBrk="1"/>
-                      <a:r>
-                        <a:rPr lang="en-US" altLang="ko-KR" sz="3200" dirty="0"/>
-                        <a:t>3</a:t>
-                      </a:r>
-                      <a:endParaRPr lang="ko-KR" altLang="en-US" sz="3200" dirty="0"/>
-                    </a:p>
-                  </a:txBody>
-                  <a:tcPr anchor="ctr">
-                    <a:solidFill>
-                      <a:schemeClr val="tx2">
-                        <a:lumMod val="20000"/>
-                        <a:lumOff val="80000"/>
-                      </a:schemeClr>
-                    </a:solidFill>
-                  </a:tcPr>
-                </a:tc>
-                <a:tc>
-                  <a:txBody>
-                    <a:bodyPr/>
-                    <a:lstStyle/>
-                    <a:p>
-                      <a:pPr algn="ctr" latinLnBrk="1"/>
-                      <a:r>
-                        <a:rPr lang="ko-KR" altLang="en-US" sz="3200" dirty="0"/>
-                        <a:t>회원가입 탭</a:t>
-                      </a:r>
-                    </a:p>
-                  </a:txBody>
-                  <a:tcPr anchor="ctr"/>
-                </a:tc>
-                <a:extLst>
-                  <a:ext uri="{0D108BD9-81ED-4DB2-BD59-A6C34878D82A}">
-                    <a16:rowId xmlns:a16="http://schemas.microsoft.com/office/drawing/2014/main" val="111030149"/>
-                  </a:ext>
-                </a:extLst>
-              </a:tr>
-              <a:tr h="1085850">
-                <a:tc>
-                  <a:txBody>
-                    <a:bodyPr/>
-                    <a:lstStyle/>
-                    <a:p>
-                      <a:pPr algn="ctr" latinLnBrk="1"/>
-                      <a:r>
-                        <a:rPr lang="en-US" altLang="ko-KR" sz="3200" dirty="0"/>
-                        <a:t>4</a:t>
-                      </a:r>
-                      <a:endParaRPr lang="ko-KR" altLang="en-US" sz="3200" dirty="0"/>
-                    </a:p>
-                  </a:txBody>
-                  <a:tcPr anchor="ctr">
-                    <a:solidFill>
-                      <a:schemeClr val="tx2">
-                        <a:lumMod val="20000"/>
-                        <a:lumOff val="80000"/>
-                      </a:schemeClr>
-                    </a:solidFill>
-                  </a:tcPr>
-                </a:tc>
-                <a:tc>
-                  <a:txBody>
-                    <a:bodyPr/>
-                    <a:lstStyle/>
-                    <a:p>
-                      <a:pPr algn="ctr" latinLnBrk="1"/>
-                      <a:r>
-                        <a:rPr lang="ko-KR" altLang="en-US" sz="3200" dirty="0"/>
-                        <a:t>로그인 버튼</a:t>
-                      </a:r>
-                    </a:p>
-                  </a:txBody>
-                  <a:tcPr anchor="ctr"/>
-                </a:tc>
-                <a:extLst>
-                  <a:ext uri="{0D108BD9-81ED-4DB2-BD59-A6C34878D82A}">
-                    <a16:rowId xmlns:a16="http://schemas.microsoft.com/office/drawing/2014/main" val="1548616452"/>
                   </a:ext>
                 </a:extLst>
               </a:tr>
@@ -5859,6 +6733,478 @@
           </a:prstGeom>
         </p:spPr>
       </p:pic>
+      <p:sp>
+        <p:nvSpPr>
+          <p:cNvPr id="2" name="타원 1">
+            <a:extLst>
+              <a:ext uri="{FF2B5EF4-FFF2-40B4-BE49-F238E27FC236}">
+                <a16:creationId xmlns:a16="http://schemas.microsoft.com/office/drawing/2014/main" id="{072C14CB-2B5C-05B3-473E-554B764410FD}"/>
+              </a:ext>
+            </a:extLst>
+          </p:cNvPr>
+          <p:cNvSpPr/>
+          <p:nvPr/>
+        </p:nvSpPr>
+        <p:spPr>
+          <a:xfrm>
+            <a:off x="3150970" y="5547522"/>
+            <a:ext cx="762000" cy="762000"/>
+          </a:xfrm>
+          <a:prstGeom prst="ellipse">
+            <a:avLst/>
+          </a:prstGeom>
+        </p:spPr>
+        <p:style>
+          <a:lnRef idx="3">
+            <a:schemeClr val="lt1"/>
+          </a:lnRef>
+          <a:fillRef idx="1">
+            <a:schemeClr val="accent6"/>
+          </a:fillRef>
+          <a:effectRef idx="1">
+            <a:schemeClr val="accent6"/>
+          </a:effectRef>
+          <a:fontRef idx="minor">
+            <a:schemeClr val="lt1"/>
+          </a:fontRef>
+        </p:style>
+        <p:txBody>
+          <a:bodyPr rtlCol="0" anchor="ctr"/>
+          <a:lstStyle/>
+          <a:p>
+            <a:pPr algn="ctr"/>
+            <a:r>
+              <a:rPr lang="en-US" altLang="ko-KR" sz="4800" dirty="0"/>
+              <a:t>1</a:t>
+            </a:r>
+            <a:endParaRPr lang="ko-KR" altLang="en-US" sz="4800" dirty="0"/>
+          </a:p>
+        </p:txBody>
+      </p:sp>
+      <p:sp>
+        <p:nvSpPr>
+          <p:cNvPr id="3" name="타원 2">
+            <a:extLst>
+              <a:ext uri="{FF2B5EF4-FFF2-40B4-BE49-F238E27FC236}">
+                <a16:creationId xmlns:a16="http://schemas.microsoft.com/office/drawing/2014/main" id="{8F9695A7-9333-8801-A829-43478933404E}"/>
+              </a:ext>
+            </a:extLst>
+          </p:cNvPr>
+          <p:cNvSpPr/>
+          <p:nvPr/>
+        </p:nvSpPr>
+        <p:spPr>
+          <a:xfrm>
+            <a:off x="3150970" y="8763000"/>
+            <a:ext cx="753763" cy="762000"/>
+          </a:xfrm>
+          <a:prstGeom prst="ellipse">
+            <a:avLst/>
+          </a:prstGeom>
+        </p:spPr>
+        <p:style>
+          <a:lnRef idx="3">
+            <a:schemeClr val="lt1"/>
+          </a:lnRef>
+          <a:fillRef idx="1">
+            <a:schemeClr val="accent6"/>
+          </a:fillRef>
+          <a:effectRef idx="1">
+            <a:schemeClr val="accent6"/>
+          </a:effectRef>
+          <a:fontRef idx="minor">
+            <a:schemeClr val="lt1"/>
+          </a:fontRef>
+        </p:style>
+        <p:txBody>
+          <a:bodyPr rtlCol="0" anchor="ctr"/>
+          <a:lstStyle/>
+          <a:p>
+            <a:pPr algn="ctr"/>
+            <a:r>
+              <a:rPr lang="en-US" altLang="ko-KR" sz="4800" dirty="0"/>
+              <a:t>2</a:t>
+            </a:r>
+            <a:endParaRPr lang="ko-KR" altLang="en-US" sz="4800" dirty="0"/>
+          </a:p>
+        </p:txBody>
+      </p:sp>
+      <p:sp>
+        <p:nvSpPr>
+          <p:cNvPr id="5" name="타원 4">
+            <a:extLst>
+              <a:ext uri="{FF2B5EF4-FFF2-40B4-BE49-F238E27FC236}">
+                <a16:creationId xmlns:a16="http://schemas.microsoft.com/office/drawing/2014/main" id="{42DB7C5B-F374-7D3E-0978-9195AA289DDA}"/>
+              </a:ext>
+            </a:extLst>
+          </p:cNvPr>
+          <p:cNvSpPr/>
+          <p:nvPr/>
+        </p:nvSpPr>
+        <p:spPr>
+          <a:xfrm>
+            <a:off x="3142733" y="11430000"/>
+            <a:ext cx="762000" cy="762000"/>
+          </a:xfrm>
+          <a:prstGeom prst="ellipse">
+            <a:avLst/>
+          </a:prstGeom>
+        </p:spPr>
+        <p:style>
+          <a:lnRef idx="3">
+            <a:schemeClr val="lt1"/>
+          </a:lnRef>
+          <a:fillRef idx="1">
+            <a:schemeClr val="accent6"/>
+          </a:fillRef>
+          <a:effectRef idx="1">
+            <a:schemeClr val="accent6"/>
+          </a:effectRef>
+          <a:fontRef idx="minor">
+            <a:schemeClr val="lt1"/>
+          </a:fontRef>
+        </p:style>
+        <p:txBody>
+          <a:bodyPr rtlCol="0" anchor="ctr"/>
+          <a:lstStyle/>
+          <a:p>
+            <a:pPr algn="ctr"/>
+            <a:r>
+              <a:rPr lang="en-US" altLang="ko-KR" sz="4800" dirty="0"/>
+              <a:t>3</a:t>
+            </a:r>
+            <a:endParaRPr lang="ko-KR" altLang="en-US" sz="4800" dirty="0"/>
+          </a:p>
+        </p:txBody>
+      </p:sp>
+      <p:sp>
+        <p:nvSpPr>
+          <p:cNvPr id="7" name="타원 6">
+            <a:extLst>
+              <a:ext uri="{FF2B5EF4-FFF2-40B4-BE49-F238E27FC236}">
+                <a16:creationId xmlns:a16="http://schemas.microsoft.com/office/drawing/2014/main" id="{BDC5A27C-CFB4-7283-04E0-C367BA85FE8F}"/>
+              </a:ext>
+            </a:extLst>
+          </p:cNvPr>
+          <p:cNvSpPr/>
+          <p:nvPr/>
+        </p:nvSpPr>
+        <p:spPr>
+          <a:xfrm>
+            <a:off x="9067800" y="11430000"/>
+            <a:ext cx="762000" cy="762000"/>
+          </a:xfrm>
+          <a:prstGeom prst="ellipse">
+            <a:avLst/>
+          </a:prstGeom>
+        </p:spPr>
+        <p:style>
+          <a:lnRef idx="3">
+            <a:schemeClr val="lt1"/>
+          </a:lnRef>
+          <a:fillRef idx="1">
+            <a:schemeClr val="accent6"/>
+          </a:fillRef>
+          <a:effectRef idx="1">
+            <a:schemeClr val="accent6"/>
+          </a:effectRef>
+          <a:fontRef idx="minor">
+            <a:schemeClr val="lt1"/>
+          </a:fontRef>
+        </p:style>
+        <p:txBody>
+          <a:bodyPr rtlCol="0" anchor="ctr"/>
+          <a:lstStyle/>
+          <a:p>
+            <a:pPr algn="ctr"/>
+            <a:r>
+              <a:rPr lang="en-US" altLang="ko-KR" sz="4800" dirty="0"/>
+              <a:t>4</a:t>
+            </a:r>
+            <a:endParaRPr lang="ko-KR" altLang="en-US" sz="4800" dirty="0"/>
+          </a:p>
+        </p:txBody>
+      </p:sp>
+      <p:graphicFrame>
+        <p:nvGraphicFramePr>
+          <p:cNvPr id="8" name="표 7">
+            <a:extLst>
+              <a:ext uri="{FF2B5EF4-FFF2-40B4-BE49-F238E27FC236}">
+                <a16:creationId xmlns:a16="http://schemas.microsoft.com/office/drawing/2014/main" id="{5E9A28C8-5281-D72D-EAF6-4B841AD23223}"/>
+              </a:ext>
+            </a:extLst>
+          </p:cNvPr>
+          <p:cNvGraphicFramePr>
+            <a:graphicFrameLocks noGrp="1"/>
+          </p:cNvGraphicFramePr>
+          <p:nvPr>
+            <p:extLst>
+              <p:ext uri="{D42A27DB-BD31-4B8C-83A1-F6EECF244321}">
+                <p14:modId xmlns:p14="http://schemas.microsoft.com/office/powerpoint/2010/main" val="1826080630"/>
+              </p:ext>
+            </p:extLst>
+          </p:nvPr>
+        </p:nvGraphicFramePr>
+        <p:xfrm>
+          <a:off x="18490773" y="5547522"/>
+          <a:ext cx="5386602" cy="5429250"/>
+        </p:xfrm>
+        <a:graphic>
+          <a:graphicData uri="http://schemas.openxmlformats.org/drawingml/2006/table">
+            <a:tbl>
+              <a:tblPr firstRow="1" bandRow="1">
+                <a:tableStyleId>{5940675A-B579-460E-94D1-54222C63F5DA}</a:tableStyleId>
+              </a:tblPr>
+              <a:tblGrid>
+                <a:gridCol w="1143001">
+                  <a:extLst>
+                    <a:ext uri="{9D8B030D-6E8A-4147-A177-3AD203B41FA5}">
+                      <a16:colId xmlns:a16="http://schemas.microsoft.com/office/drawing/2014/main" val="3099305099"/>
+                    </a:ext>
+                  </a:extLst>
+                </a:gridCol>
+                <a:gridCol w="4243601">
+                  <a:extLst>
+                    <a:ext uri="{9D8B030D-6E8A-4147-A177-3AD203B41FA5}">
+                      <a16:colId xmlns:a16="http://schemas.microsoft.com/office/drawing/2014/main" val="1372832432"/>
+                    </a:ext>
+                  </a:extLst>
+                </a:gridCol>
+              </a:tblGrid>
+              <a:tr h="1085850">
+                <a:tc>
+                  <a:txBody>
+                    <a:bodyPr/>
+                    <a:lstStyle/>
+                    <a:p>
+                      <a:pPr algn="ctr" latinLnBrk="1"/>
+                      <a:r>
+                        <a:rPr lang="en-US" altLang="ko-KR" sz="3200" dirty="0"/>
+                        <a:t>No.</a:t>
+                      </a:r>
+                      <a:endParaRPr lang="ko-KR" altLang="en-US" sz="3200" dirty="0"/>
+                    </a:p>
+                  </a:txBody>
+                  <a:tcPr anchor="ctr">
+                    <a:solidFill>
+                      <a:schemeClr val="tx2">
+                        <a:lumMod val="20000"/>
+                        <a:lumOff val="80000"/>
+                      </a:schemeClr>
+                    </a:solidFill>
+                  </a:tcPr>
+                </a:tc>
+                <a:tc>
+                  <a:txBody>
+                    <a:bodyPr/>
+                    <a:lstStyle/>
+                    <a:p>
+                      <a:pPr algn="ctr" latinLnBrk="1"/>
+                      <a:r>
+                        <a:rPr lang="ko-KR" altLang="en-US" sz="3200" dirty="0"/>
+                        <a:t>설명</a:t>
+                      </a:r>
+                    </a:p>
+                  </a:txBody>
+                  <a:tcPr anchor="ctr">
+                    <a:solidFill>
+                      <a:schemeClr val="tx2">
+                        <a:lumMod val="20000"/>
+                        <a:lumOff val="80000"/>
+                      </a:schemeClr>
+                    </a:solidFill>
+                  </a:tcPr>
+                </a:tc>
+                <a:extLst>
+                  <a:ext uri="{0D108BD9-81ED-4DB2-BD59-A6C34878D82A}">
+                    <a16:rowId xmlns:a16="http://schemas.microsoft.com/office/drawing/2014/main" val="555083959"/>
+                  </a:ext>
+                </a:extLst>
+              </a:tr>
+              <a:tr h="1085850">
+                <a:tc>
+                  <a:txBody>
+                    <a:bodyPr/>
+                    <a:lstStyle/>
+                    <a:p>
+                      <a:pPr algn="ctr" latinLnBrk="1"/>
+                      <a:r>
+                        <a:rPr lang="en-US" altLang="ko-KR" sz="3200" dirty="0"/>
+                        <a:t>1</a:t>
+                      </a:r>
+                      <a:endParaRPr lang="ko-KR" altLang="en-US" sz="3200" dirty="0"/>
+                    </a:p>
+                  </a:txBody>
+                  <a:tcPr anchor="ctr">
+                    <a:solidFill>
+                      <a:schemeClr val="tx2">
+                        <a:lumMod val="20000"/>
+                        <a:lumOff val="80000"/>
+                      </a:schemeClr>
+                    </a:solidFill>
+                  </a:tcPr>
+                </a:tc>
+                <a:tc>
+                  <a:txBody>
+                    <a:bodyPr/>
+                    <a:lstStyle/>
+                    <a:p>
+                      <a:pPr algn="ctr" latinLnBrk="1"/>
+                      <a:r>
+                        <a:rPr lang="ko-KR" altLang="en-US" sz="2400" dirty="0"/>
+                        <a:t>주요 문제점을 나타내는 카드</a:t>
+                      </a:r>
+                    </a:p>
+                  </a:txBody>
+                  <a:tcPr anchor="ctr"/>
+                </a:tc>
+                <a:extLst>
+                  <a:ext uri="{0D108BD9-81ED-4DB2-BD59-A6C34878D82A}">
+                    <a16:rowId xmlns:a16="http://schemas.microsoft.com/office/drawing/2014/main" val="1335438258"/>
+                  </a:ext>
+                </a:extLst>
+              </a:tr>
+              <a:tr h="1085850">
+                <a:tc>
+                  <a:txBody>
+                    <a:bodyPr/>
+                    <a:lstStyle/>
+                    <a:p>
+                      <a:pPr algn="ctr" latinLnBrk="1"/>
+                      <a:r>
+                        <a:rPr lang="en-US" altLang="ko-KR" sz="3200" dirty="0"/>
+                        <a:t>2</a:t>
+                      </a:r>
+                      <a:endParaRPr lang="ko-KR" altLang="en-US" sz="3200" dirty="0"/>
+                    </a:p>
+                  </a:txBody>
+                  <a:tcPr anchor="ctr">
+                    <a:solidFill>
+                      <a:schemeClr val="tx2">
+                        <a:lumMod val="20000"/>
+                        <a:lumOff val="80000"/>
+                      </a:schemeClr>
+                    </a:solidFill>
+                  </a:tcPr>
+                </a:tc>
+                <a:tc>
+                  <a:txBody>
+                    <a:bodyPr/>
+                    <a:lstStyle/>
+                    <a:p>
+                      <a:pPr algn="ctr" latinLnBrk="1"/>
+                      <a:r>
+                        <a:rPr lang="ko-KR" altLang="en-US" sz="2400" dirty="0"/>
+                        <a:t>개선 방안을 나타내는 카드</a:t>
+                      </a:r>
+                    </a:p>
+                  </a:txBody>
+                  <a:tcPr anchor="ctr"/>
+                </a:tc>
+                <a:extLst>
+                  <a:ext uri="{0D108BD9-81ED-4DB2-BD59-A6C34878D82A}">
+                    <a16:rowId xmlns:a16="http://schemas.microsoft.com/office/drawing/2014/main" val="2820470733"/>
+                  </a:ext>
+                </a:extLst>
+              </a:tr>
+              <a:tr h="1085850">
+                <a:tc>
+                  <a:txBody>
+                    <a:bodyPr/>
+                    <a:lstStyle/>
+                    <a:p>
+                      <a:pPr algn="ctr" latinLnBrk="1"/>
+                      <a:r>
+                        <a:rPr lang="en-US" altLang="ko-KR" sz="3200" dirty="0"/>
+                        <a:t>3</a:t>
+                      </a:r>
+                      <a:endParaRPr lang="ko-KR" altLang="en-US" sz="3200" dirty="0"/>
+                    </a:p>
+                  </a:txBody>
+                  <a:tcPr anchor="ctr">
+                    <a:solidFill>
+                      <a:schemeClr val="tx2">
+                        <a:lumMod val="20000"/>
+                        <a:lumOff val="80000"/>
+                      </a:schemeClr>
+                    </a:solidFill>
+                  </a:tcPr>
+                </a:tc>
+                <a:tc>
+                  <a:txBody>
+                    <a:bodyPr/>
+                    <a:lstStyle/>
+                    <a:p>
+                      <a:pPr algn="ctr" latinLnBrk="1"/>
+                      <a:r>
+                        <a:rPr lang="ko-KR" altLang="en-US" sz="2400" dirty="0"/>
+                        <a:t>홈으로 버튼  클릭 시 초기 화면 이동</a:t>
+                      </a:r>
+                    </a:p>
+                  </a:txBody>
+                  <a:tcPr anchor="ctr"/>
+                </a:tc>
+                <a:extLst>
+                  <a:ext uri="{0D108BD9-81ED-4DB2-BD59-A6C34878D82A}">
+                    <a16:rowId xmlns:a16="http://schemas.microsoft.com/office/drawing/2014/main" val="111030149"/>
+                  </a:ext>
+                </a:extLst>
+              </a:tr>
+              <a:tr h="1085850">
+                <a:tc>
+                  <a:txBody>
+                    <a:bodyPr/>
+                    <a:lstStyle/>
+                    <a:p>
+                      <a:pPr algn="ctr" latinLnBrk="1"/>
+                      <a:r>
+                        <a:rPr lang="en-US" altLang="ko-KR" sz="3200" dirty="0"/>
+                        <a:t>4</a:t>
+                      </a:r>
+                      <a:endParaRPr lang="ko-KR" altLang="en-US" sz="3200" dirty="0"/>
+                    </a:p>
+                  </a:txBody>
+                  <a:tcPr anchor="ctr">
+                    <a:solidFill>
+                      <a:schemeClr val="tx2">
+                        <a:lumMod val="20000"/>
+                        <a:lumOff val="80000"/>
+                      </a:schemeClr>
+                    </a:solidFill>
+                  </a:tcPr>
+                </a:tc>
+                <a:tc>
+                  <a:txBody>
+                    <a:bodyPr/>
+                    <a:lstStyle/>
+                    <a:p>
+                      <a:pPr algn="ctr" latinLnBrk="1"/>
+                      <a:r>
+                        <a:rPr lang="ko-KR" altLang="en-US" sz="2400" dirty="0"/>
+                        <a:t>결과 저장하기 </a:t>
+                      </a:r>
+                      <a:r>
+                        <a:rPr lang="ko-KR" altLang="en-US" sz="2400" dirty="0" err="1"/>
+                        <a:t>클릭시</a:t>
+                      </a:r>
+                      <a:r>
+                        <a:rPr lang="ko-KR" altLang="en-US" sz="2400" dirty="0"/>
+                        <a:t> 캡처 본 저장</a:t>
+                      </a:r>
+                    </a:p>
+                  </a:txBody>
+                  <a:tcPr anchor="ctr"/>
+                </a:tc>
+                <a:extLst>
+                  <a:ext uri="{0D108BD9-81ED-4DB2-BD59-A6C34878D82A}">
+                    <a16:rowId xmlns:a16="http://schemas.microsoft.com/office/drawing/2014/main" val="2726012149"/>
+                  </a:ext>
+                </a:extLst>
+              </a:tr>
+            </a:tbl>
+          </a:graphicData>
+        </a:graphic>
+      </p:graphicFrame>
     </p:spTree>
     <p:extLst>
       <p:ext uri="{BB962C8B-B14F-4D97-AF65-F5344CB8AC3E}">

--- a/1차 프로젝트/3. 화면설계서_박준수.pptx
+++ b/1차 프로젝트/3. 화면설계서_박준수.pptx
@@ -315,7 +315,7 @@
             <a:fld id="{1D8BD707-D9CF-40AE-B4C6-C98DA3205C09}" type="datetimeFigureOut">
               <a:rPr lang="en-US" smtClean="0"/>
               <a:pPr/>
-              <a:t>3/22/2026</a:t>
+              <a:t>3/24/2026</a:t>
             </a:fld>
             <a:endParaRPr lang="en-US"/>
           </a:p>
@@ -480,7 +480,7 @@
             <a:fld id="{1D8BD707-D9CF-40AE-B4C6-C98DA3205C09}" type="datetimeFigureOut">
               <a:rPr lang="en-US" smtClean="0"/>
               <a:pPr/>
-              <a:t>3/22/2026</a:t>
+              <a:t>3/24/2026</a:t>
             </a:fld>
             <a:endParaRPr lang="en-US"/>
           </a:p>
@@ -655,7 +655,7 @@
             <a:fld id="{1D8BD707-D9CF-40AE-B4C6-C98DA3205C09}" type="datetimeFigureOut">
               <a:rPr lang="en-US" smtClean="0"/>
               <a:pPr/>
-              <a:t>3/22/2026</a:t>
+              <a:t>3/24/2026</a:t>
             </a:fld>
             <a:endParaRPr lang="en-US"/>
           </a:p>
@@ -820,7 +820,7 @@
             <a:fld id="{1D8BD707-D9CF-40AE-B4C6-C98DA3205C09}" type="datetimeFigureOut">
               <a:rPr lang="en-US" smtClean="0"/>
               <a:pPr/>
-              <a:t>3/22/2026</a:t>
+              <a:t>3/24/2026</a:t>
             </a:fld>
             <a:endParaRPr lang="en-US"/>
           </a:p>
@@ -1062,7 +1062,7 @@
             <a:fld id="{1D8BD707-D9CF-40AE-B4C6-C98DA3205C09}" type="datetimeFigureOut">
               <a:rPr lang="en-US" smtClean="0"/>
               <a:pPr/>
-              <a:t>3/22/2026</a:t>
+              <a:t>3/24/2026</a:t>
             </a:fld>
             <a:endParaRPr lang="en-US"/>
           </a:p>
@@ -1344,7 +1344,7 @@
             <a:fld id="{1D8BD707-D9CF-40AE-B4C6-C98DA3205C09}" type="datetimeFigureOut">
               <a:rPr lang="en-US" smtClean="0"/>
               <a:pPr/>
-              <a:t>3/22/2026</a:t>
+              <a:t>3/24/2026</a:t>
             </a:fld>
             <a:endParaRPr lang="en-US"/>
           </a:p>
@@ -1760,7 +1760,7 @@
             <a:fld id="{1D8BD707-D9CF-40AE-B4C6-C98DA3205C09}" type="datetimeFigureOut">
               <a:rPr lang="en-US" smtClean="0"/>
               <a:pPr/>
-              <a:t>3/22/2026</a:t>
+              <a:t>3/24/2026</a:t>
             </a:fld>
             <a:endParaRPr lang="en-US"/>
           </a:p>
@@ -1874,7 +1874,7 @@
             <a:fld id="{1D8BD707-D9CF-40AE-B4C6-C98DA3205C09}" type="datetimeFigureOut">
               <a:rPr lang="en-US" smtClean="0"/>
               <a:pPr/>
-              <a:t>3/22/2026</a:t>
+              <a:t>3/24/2026</a:t>
             </a:fld>
             <a:endParaRPr lang="en-US"/>
           </a:p>
@@ -1966,7 +1966,7 @@
             <a:fld id="{1D8BD707-D9CF-40AE-B4C6-C98DA3205C09}" type="datetimeFigureOut">
               <a:rPr lang="en-US" smtClean="0"/>
               <a:pPr/>
-              <a:t>3/22/2026</a:t>
+              <a:t>3/24/2026</a:t>
             </a:fld>
             <a:endParaRPr lang="en-US"/>
           </a:p>
@@ -2238,7 +2238,7 @@
             <a:fld id="{1D8BD707-D9CF-40AE-B4C6-C98DA3205C09}" type="datetimeFigureOut">
               <a:rPr lang="en-US" smtClean="0"/>
               <a:pPr/>
-              <a:t>3/22/2026</a:t>
+              <a:t>3/24/2026</a:t>
             </a:fld>
             <a:endParaRPr lang="en-US"/>
           </a:p>
@@ -2487,7 +2487,7 @@
             <a:fld id="{1D8BD707-D9CF-40AE-B4C6-C98DA3205C09}" type="datetimeFigureOut">
               <a:rPr lang="en-US" smtClean="0"/>
               <a:pPr/>
-              <a:t>3/22/2026</a:t>
+              <a:t>3/24/2026</a:t>
             </a:fld>
             <a:endParaRPr lang="en-US"/>
           </a:p>
@@ -2695,7 +2695,7 @@
             <a:fld id="{1D8BD707-D9CF-40AE-B4C6-C98DA3205C09}" type="datetimeFigureOut">
               <a:rPr lang="en-US" smtClean="0"/>
               <a:pPr/>
-              <a:t>3/22/2026</a:t>
+              <a:t>3/24/2026</a:t>
             </a:fld>
             <a:endParaRPr lang="en-US"/>
           </a:p>
@@ -6940,7 +6940,7 @@
           <p:nvPr>
             <p:extLst>
               <p:ext uri="{D42A27DB-BD31-4B8C-83A1-F6EECF244321}">
-                <p14:modId xmlns:p14="http://schemas.microsoft.com/office/powerpoint/2010/main" val="1826080630"/>
+                <p14:modId xmlns:p14="http://schemas.microsoft.com/office/powerpoint/2010/main" val="3860749248"/>
               </p:ext>
             </p:extLst>
           </p:nvPr>
@@ -7181,15 +7181,15 @@
                       <a:pPr algn="ctr" latinLnBrk="1"/>
                       <a:r>
                         <a:rPr lang="ko-KR" altLang="en-US" sz="2400" dirty="0"/>
-                        <a:t>결과 저장하기 </a:t>
-                      </a:r>
-                      <a:r>
-                        <a:rPr lang="ko-KR" altLang="en-US" sz="2400" dirty="0" err="1"/>
-                        <a:t>클릭시</a:t>
+                        <a:t>결과 </a:t>
+                      </a:r>
+                      <a:r>
+                        <a:rPr lang="ko-KR" altLang="en-US" sz="2400"/>
+                        <a:t>저장하기 클릭 시 </a:t>
                       </a:r>
                       <a:r>
                         <a:rPr lang="ko-KR" altLang="en-US" sz="2400" dirty="0"/>
-                        <a:t> 캡처 본 저장</a:t>
+                        <a:t>캡처 본 저장</a:t>
                       </a:r>
                     </a:p>
                   </a:txBody>
